--- a/docs/KICT_Bmaps_Inframon_연구개발_7p_1.pptx
+++ b/docs/KICT_Bmaps_Inframon_연구개발_7p_1.pptx
@@ -4,6 +4,9 @@
   <p:sldMasterIdLst>
     <p:sldMasterId id="2147483648" r:id="rId1"/>
   </p:sldMasterIdLst>
+  <p:notesMasterIdLst>
+    <p:notesMasterId r:id="rId9"/>
+  </p:notesMasterIdLst>
   <p:sldIdLst>
     <p:sldId id="256" r:id="rId2"/>
     <p:sldId id="257" r:id="rId3"/>
@@ -13,9 +16,6 @@
     <p:sldId id="261" r:id="rId7"/>
     <p:sldId id="262" r:id="rId8"/>
   </p:sldIdLst>
-  <p:notesMasterIdLst>
-    <p:notesMasterId r:id="rId9"/>
-  </p:notesMasterIdLst>
   <p:sldSz cx="12192000" cy="6858000"/>
   <p:notesSz cx="6858000" cy="12192000"/>
   <p:defaultTextStyle>
@@ -110,6 +110,11 @@
       </a:defRPr>
     </a:lvl9pPr>
   </p:defaultTextStyle>
+  <p:extLst>
+    <p:ext uri="{EFAFB233-063F-42B5-8137-9DF3F51BA10A}">
+      <p15:sldGuideLst xmlns:p15="http://schemas.microsoft.com/office/powerpoint/2012/main"/>
+    </p:ext>
+  </p:extLst>
 </p:presentation>
 </file>
 
@@ -135,240 +140,16 @@
           <a:chExt cx="0" cy="0"/>
         </a:xfrm>
       </p:grpSpPr>
-      <p:sp>
-        <p:nvSpPr>
-          <p:cNvPr id="2" name="Header Placeholder 1"/>
-          <p:cNvSpPr>
-            <a:spLocks noGrp="1"/>
-          </p:cNvSpPr>
-          <p:nvPr>
-            <p:ph type="hdr" sz="quarter"/>
-          </p:nvPr>
-        </p:nvSpPr>
-        <p:spPr>
-          <a:xfrm>
-            <a:off x="0" y="0"/>
-            <a:ext cx="2971800" cy="458788"/>
-          </a:xfrm>
-          <a:prstGeom prst="rect">
-            <a:avLst/>
-          </a:prstGeom>
-        </p:spPr>
-        <p:txBody>
-          <a:bodyPr vert="horz" lIns="91440" tIns="45720" rIns="91440" bIns="45720" rtlCol="0"/>
-          <a:lstStyle>
-            <a:lvl1pPr algn="l">
-              <a:defRPr sz="1200"/>
-            </a:lvl1pPr>
-          </a:lstStyle>
-          <a:p>
-            <a:endParaRPr lang="en-US"/>
-          </a:p>
-        </p:txBody>
-      </p:sp>
-      <p:sp>
-        <p:nvSpPr>
-          <p:cNvPr id="3" name="Date Placeholder 2"/>
-          <p:cNvSpPr>
-            <a:spLocks noGrp="1"/>
-          </p:cNvSpPr>
-          <p:nvPr>
-            <p:ph type="dt" idx="1"/>
-          </p:nvPr>
-        </p:nvSpPr>
-        <p:spPr>
-          <a:xfrm>
-            <a:off x="3884613" y="0"/>
-            <a:ext cx="2971800" cy="458788"/>
-          </a:xfrm>
-          <a:prstGeom prst="rect">
-            <a:avLst/>
-          </a:prstGeom>
-        </p:spPr>
-        <p:txBody>
-          <a:bodyPr vert="horz" lIns="91440" tIns="45720" rIns="91440" bIns="45720" rtlCol="0"/>
-          <a:lstStyle>
-            <a:lvl1pPr algn="r">
-              <a:defRPr sz="1200"/>
-            </a:lvl1pPr>
-          </a:lstStyle>
-          <a:p>
-            <a:fld id="{5282F153-3F37-0F45-9E97-73ACFA13230C}" type="datetimeFigureOut">
-              <a:rPr lang="en-US"/>
-              <a:t>7/23/19</a:t>
-            </a:fld>
-            <a:endParaRPr lang="en-US"/>
-          </a:p>
-        </p:txBody>
-      </p:sp>
-      <p:sp>
-        <p:nvSpPr>
-          <p:cNvPr id="4" name="Slide Image Placeholder 3"/>
-          <p:cNvSpPr>
-            <a:spLocks noGrp="1" noRot="1" noChangeAspect="1"/>
-          </p:cNvSpPr>
-          <p:nvPr>
-            <p:ph type="sldImg" idx="2"/>
-          </p:nvPr>
-        </p:nvSpPr>
-        <p:spPr>
-          <a:xfrm>
-            <a:off x="685800" y="1143000"/>
-            <a:ext cx="5486400" cy="3086100"/>
-          </a:xfrm>
-          <a:prstGeom prst="rect">
-            <a:avLst/>
-          </a:prstGeom>
-          <a:noFill/>
-          <a:ln w="12700">
-            <a:solidFill>
-              <a:prstClr val="black"/>
-            </a:solidFill>
-          </a:ln>
-        </p:spPr>
-        <p:txBody>
-          <a:bodyPr vert="horz" lIns="91440" tIns="45720" rIns="91440" bIns="45720" rtlCol="0" anchor="ctr"/>
-          <a:lstStyle/>
-          <a:p>
-            <a:endParaRPr lang="en-US"/>
-          </a:p>
-        </p:txBody>
-      </p:sp>
-      <p:sp>
-        <p:nvSpPr>
-          <p:cNvPr id="5" name="Notes Placeholder 4"/>
-          <p:cNvSpPr>
-            <a:spLocks noGrp="1"/>
-          </p:cNvSpPr>
-          <p:nvPr>
-            <p:ph type="body" sz="quarter" idx="3"/>
-          </p:nvPr>
-        </p:nvSpPr>
-        <p:spPr>
-          <a:xfrm>
-            <a:off x="685800" y="4400550"/>
-            <a:ext cx="5486400" cy="3600450"/>
-          </a:xfrm>
-          <a:prstGeom prst="rect">
-            <a:avLst/>
-          </a:prstGeom>
-        </p:spPr>
-        <p:txBody>
-          <a:bodyPr vert="horz" lIns="91440" tIns="45720" rIns="91440" bIns="45720" rtlCol="0"/>
-          <a:lstStyle/>
-          <a:p>
-            <a:pPr lvl="0"/>
-            <a:r>
-              <a:rPr lang="en-US"/>
-              <a:t>Click to edit Master text styles</a:t>
-            </a:r>
-          </a:p>
-          <a:p>
-            <a:pPr lvl="1"/>
-            <a:r>
-              <a:rPr lang="en-US"/>
-              <a:t>Second level</a:t>
-            </a:r>
-          </a:p>
-          <a:p>
-            <a:pPr lvl="2"/>
-            <a:r>
-              <a:rPr lang="en-US"/>
-              <a:t>Third level</a:t>
-            </a:r>
-          </a:p>
-          <a:p>
-            <a:pPr lvl="3"/>
-            <a:r>
-              <a:rPr lang="en-US"/>
-              <a:t>Fourth level</a:t>
-            </a:r>
-          </a:p>
-          <a:p>
-            <a:pPr lvl="4"/>
-            <a:r>
-              <a:rPr lang="en-US"/>
-              <a:t>Fifth level</a:t>
-            </a:r>
-          </a:p>
-        </p:txBody>
-      </p:sp>
-      <p:sp>
-        <p:nvSpPr>
-          <p:cNvPr id="6" name="Footer Placeholder 5"/>
-          <p:cNvSpPr>
-            <a:spLocks noGrp="1"/>
-          </p:cNvSpPr>
-          <p:nvPr>
-            <p:ph type="ftr" sz="quarter" idx="4"/>
-          </p:nvPr>
-        </p:nvSpPr>
-        <p:spPr>
-          <a:xfrm>
-            <a:off x="0" y="8685213"/>
-            <a:ext cx="2971800" cy="458787"/>
-          </a:xfrm>
-          <a:prstGeom prst="rect">
-            <a:avLst/>
-          </a:prstGeom>
-        </p:spPr>
-        <p:txBody>
-          <a:bodyPr vert="horz" lIns="91440" tIns="45720" rIns="91440" bIns="45720" rtlCol="0" anchor="b"/>
-          <a:lstStyle>
-            <a:lvl1pPr algn="l">
-              <a:defRPr sz="1200"/>
-            </a:lvl1pPr>
-          </a:lstStyle>
-          <a:p>
-            <a:endParaRPr lang="en-US"/>
-          </a:p>
-        </p:txBody>
-      </p:sp>
-      <p:sp>
-        <p:nvSpPr>
-          <p:cNvPr id="7" name="Slide Number Placeholder 6"/>
-          <p:cNvSpPr>
-            <a:spLocks noGrp="1"/>
-          </p:cNvSpPr>
-          <p:nvPr>
-            <p:ph type="sldNum" sz="quarter" idx="5"/>
-          </p:nvPr>
-        </p:nvSpPr>
-        <p:spPr>
-          <a:xfrm>
-            <a:off x="3884613" y="8685213"/>
-            <a:ext cx="2971800" cy="458787"/>
-          </a:xfrm>
-          <a:prstGeom prst="rect">
-            <a:avLst/>
-          </a:prstGeom>
-        </p:spPr>
-        <p:txBody>
-          <a:bodyPr vert="horz" lIns="91440" tIns="45720" rIns="91440" bIns="45720" rtlCol="0" anchor="b"/>
-          <a:lstStyle>
-            <a:lvl1pPr algn="r">
-              <a:defRPr sz="1200"/>
-            </a:lvl1pPr>
-          </a:lstStyle>
-          <a:p>
-            <a:fld id="{CE5E9CC1-C706-0F49-92D6-E571CC5EEA8F}" type="slidenum">
-              <a:rPr lang="en-US"/>
-              <a:t>‹#›</a:t>
-            </a:fld>
-            <a:endParaRPr lang="en-US"/>
-          </a:p>
-        </p:txBody>
-      </p:sp>
     </p:spTree>
     <p:extLst>
       <p:ext uri="{BB962C8B-B14F-4D97-AF65-F5344CB8AC3E}">
-        <p14:creationId xmlns:p14="http://schemas.microsoft.com/office/powerpoint/2010/main" val="1024086991"/>
+        <p14:creationId xmlns:p14="http://schemas.microsoft.com/office/powerpoint/2010/main" val="866395031"/>
       </p:ext>
     </p:extLst>
   </p:cSld>
   <p:clrMap bg1="lt1" tx1="dk1" bg2="lt2" tx2="dk2" accent1="accent1" accent2="accent2" accent3="accent3" accent4="accent4" accent5="accent5" accent6="accent6" hlink="hlink" folHlink="folHlink"/>
   <p:notesStyle>
-    <a:lvl1pPr marL="0" algn="l" defTabSz="914400" rtl="0" eaLnBrk="1" latinLnBrk="0" hangingPunct="1">
+    <a:lvl1pPr marL="0" algn="l" defTabSz="914400" rtl="0" eaLnBrk="1" latinLnBrk="1" hangingPunct="1">
       <a:defRPr sz="1200" kern="1200">
         <a:solidFill>
           <a:schemeClr val="tx1"/>
@@ -378,7 +159,7 @@
         <a:cs typeface="+mn-cs"/>
       </a:defRPr>
     </a:lvl1pPr>
-    <a:lvl2pPr marL="457200" algn="l" defTabSz="914400" rtl="0" eaLnBrk="1" latinLnBrk="0" hangingPunct="1">
+    <a:lvl2pPr marL="457200" algn="l" defTabSz="914400" rtl="0" eaLnBrk="1" latinLnBrk="1" hangingPunct="1">
       <a:defRPr sz="1200" kern="1200">
         <a:solidFill>
           <a:schemeClr val="tx1"/>
@@ -388,7 +169,7 @@
         <a:cs typeface="+mn-cs"/>
       </a:defRPr>
     </a:lvl2pPr>
-    <a:lvl3pPr marL="914400" algn="l" defTabSz="914400" rtl="0" eaLnBrk="1" latinLnBrk="0" hangingPunct="1">
+    <a:lvl3pPr marL="914400" algn="l" defTabSz="914400" rtl="0" eaLnBrk="1" latinLnBrk="1" hangingPunct="1">
       <a:defRPr sz="1200" kern="1200">
         <a:solidFill>
           <a:schemeClr val="tx1"/>
@@ -398,7 +179,7 @@
         <a:cs typeface="+mn-cs"/>
       </a:defRPr>
     </a:lvl3pPr>
-    <a:lvl4pPr marL="1371600" algn="l" defTabSz="914400" rtl="0" eaLnBrk="1" latinLnBrk="0" hangingPunct="1">
+    <a:lvl4pPr marL="1371600" algn="l" defTabSz="914400" rtl="0" eaLnBrk="1" latinLnBrk="1" hangingPunct="1">
       <a:defRPr sz="1200" kern="1200">
         <a:solidFill>
           <a:schemeClr val="tx1"/>
@@ -408,7 +189,7 @@
         <a:cs typeface="+mn-cs"/>
       </a:defRPr>
     </a:lvl4pPr>
-    <a:lvl5pPr marL="1828800" algn="l" defTabSz="914400" rtl="0" eaLnBrk="1" latinLnBrk="0" hangingPunct="1">
+    <a:lvl5pPr marL="1828800" algn="l" defTabSz="914400" rtl="0" eaLnBrk="1" latinLnBrk="1" hangingPunct="1">
       <a:defRPr sz="1200" kern="1200">
         <a:solidFill>
           <a:schemeClr val="tx1"/>
@@ -418,7 +199,7 @@
         <a:cs typeface="+mn-cs"/>
       </a:defRPr>
     </a:lvl5pPr>
-    <a:lvl6pPr marL="2286000" algn="l" defTabSz="914400" rtl="0" eaLnBrk="1" latinLnBrk="0" hangingPunct="1">
+    <a:lvl6pPr marL="2286000" algn="l" defTabSz="914400" rtl="0" eaLnBrk="1" latinLnBrk="1" hangingPunct="1">
       <a:defRPr sz="1200" kern="1200">
         <a:solidFill>
           <a:schemeClr val="tx1"/>
@@ -428,7 +209,7 @@
         <a:cs typeface="+mn-cs"/>
       </a:defRPr>
     </a:lvl6pPr>
-    <a:lvl7pPr marL="2743200" algn="l" defTabSz="914400" rtl="0" eaLnBrk="1" latinLnBrk="0" hangingPunct="1">
+    <a:lvl7pPr marL="2743200" algn="l" defTabSz="914400" rtl="0" eaLnBrk="1" latinLnBrk="1" hangingPunct="1">
       <a:defRPr sz="1200" kern="1200">
         <a:solidFill>
           <a:schemeClr val="tx1"/>
@@ -438,7 +219,7 @@
         <a:cs typeface="+mn-cs"/>
       </a:defRPr>
     </a:lvl7pPr>
-    <a:lvl8pPr marL="3200400" algn="l" defTabSz="914400" rtl="0" eaLnBrk="1" latinLnBrk="0" hangingPunct="1">
+    <a:lvl8pPr marL="3200400" algn="l" defTabSz="914400" rtl="0" eaLnBrk="1" latinLnBrk="1" hangingPunct="1">
       <a:defRPr sz="1200" kern="1200">
         <a:solidFill>
           <a:schemeClr val="tx1"/>
@@ -448,7 +229,7 @@
         <a:cs typeface="+mn-cs"/>
       </a:defRPr>
     </a:lvl8pPr>
-    <a:lvl9pPr marL="3657600" algn="l" defTabSz="914400" rtl="0" eaLnBrk="1" latinLnBrk="0" hangingPunct="1">
+    <a:lvl9pPr marL="3657600" algn="l" defTabSz="914400" rtl="0" eaLnBrk="1" latinLnBrk="1" hangingPunct="1">
       <a:defRPr sz="1200" kern="1200">
         <a:solidFill>
           <a:schemeClr val="tx1"/>
@@ -510,7 +291,6 @@
               <a:rPr lang="en-US" dirty="0"/>
               <a:t>오늘은 Inframon 을 연구개발과제 구성에 맞춰 네 부분으로 말씀드리겠습니다. 왜 필요한지, 무엇을 목표로 하는지, 지금까지 무엇을 했는지, 앞으로 KICT 와 어떻게 진행할지입니다. Inframon 은 좌표 하나만 넣으면 위성 자료에서 교량 변위를 뽑고, AI 로 해석하고, 디지털 트윈과 B-Maps 까지 자동으로 잇는 플랫폼입니다.</a:t>
             </a:r>
-            <a:endParaRPr lang="en-US" dirty="0"/>
           </a:p>
         </p:txBody>
       </p:sp>
@@ -598,7 +378,6 @@
               <a:rPr lang="en-US" dirty="0"/>
               <a:t>먼저 필요성입니다. 지금 교량 상태 판단은 센서를 붙인 교량과 정기 점검에 의존합니다. 센서가 없는 교량, 점검과 점검 사이는 비어 있고, 성수대교·한강대교조차 처짐 센서는 설치되어 있지 않습니다. 위성 InSAR 는 2018년부터 쌓인 공개 자료로 과거까지 보고, 교량에 아무것도 달지 않으며, 교량 수가 늘어도 비용이 비례해 늘지 않습니다. 그리고 이 결과가 쓰이려면 이미 전국 교량 자산을 가진 B-Maps 에 붙어야 합니다.</a:t>
             </a:r>
-            <a:endParaRPr lang="en-US" dirty="0"/>
           </a:p>
         </p:txBody>
       </p:sp>
@@ -686,7 +465,6 @@
               <a:rPr lang="en-US" dirty="0"/>
               <a:t>연구 목표입니다. 최종 목표는 계측기가 없는 교량까지 위성 변위로 상태를 파악하는 유지관리 체계를 만들고, 이를 B-Maps 에 연계하는 것입니다. 세부 목표는 네 가지로, 위성 변위 자동 산출, 물리 기반 AI 해석, 교량 디지털 트윈, B-Maps 연계 서비스입니다. 아래 표는 지표별로 지금 어디까지 왔는지와 다음 목표를 함께 보여 드립니다. 인터페이스와 트윈은 이미 구현되었고, 남은 핵심은 현장 계측과의 정밀 검증과 운영 탑재입니다.</a:t>
             </a:r>
-            <a:endParaRPr lang="en-US" dirty="0"/>
           </a:p>
         </p:txBody>
       </p:sp>
@@ -774,7 +552,6 @@
               <a:rPr lang="en-US" dirty="0"/>
               <a:t>Inframon 이 무엇인지 설명드리겠습니다. 여섯 단계로 되어 있습니다. 교량과 위성영상을 고르고, InSAR 로 간섭 처리를 해 측점을 뽑고, 그 측점을 교면 위에 정확히 앉힙니다. 그다음 PINN 이라는 물리식을 함께 푸는 신경망으로 온도, 하중, 침하 성분을 나누고, 공명 위험 지수와 경보를 만듭니다. 마지막으로 IFC 트윈과 B-Maps 용 데이터로 내보냅니다. 이 전 과정이 명령 한 줄, 또는 대시보드 버튼 하나로 돌아가고, 교량을 바꿔도 코드를 고칠 필요가 없습니다.</a:t>
             </a:r>
-            <a:endParaRPr lang="en-US" dirty="0"/>
           </a:p>
         </p:txBody>
       </p:sp>
@@ -862,7 +639,6 @@
               <a:rPr lang="en-US" dirty="0"/>
               <a:t>실증 결과입니다. 한강 교량 16개소를 같은 코드로 전부 처리했고, 모든 교량에서 IFC 트윈이 나왔습니다. 왼쪽 표는 그중 현장 GNSS 계측이 있어 답을 맞춰 볼 수 있는 7개소입니다. 품질 판정은 자동으로 붙어서, 관측 조건이 기준에 못 미치면 B-Maps 로 보내지 않고 보류합니다. 오른쪽 그림은 16개소 트윈에 위성 측점을 얹은 산출물 원본이고, 측점의 94%가 IFC 부재에 묶였습니다.</a:t>
             </a:r>
-            <a:endParaRPr lang="en-US" dirty="0"/>
           </a:p>
         </p:txBody>
       </p:sp>
@@ -950,7 +726,6 @@
               <a:rPr lang="en-US" dirty="0"/>
               <a:t>B-Maps 연동과 검증입니다. 왼쪽은 실제 동작하는 탭 화면으로, 측점을 누르면 변위 시계열이 뜹니다. B-Maps 본체는 건드리지 않고, 사이드카 서버가 결과 파일을 읽어 JSON 으로 내줍니다. 검증은 2024년 한강교량 안전감시 보고서와 비교했고, 16개소 중 14개소에서 판정이 같았습니다. 월 단위 수치 상관은 아직 편차가 있는데, 계측기 위치를 받아 비교할 측점을 미리 정하면 개선됩니다. 이 부분이 향후 계획의 KICT 협력 항목입니다.</a:t>
             </a:r>
-            <a:endParaRPr lang="en-US" dirty="0"/>
           </a:p>
         </p:txBody>
       </p:sp>
@@ -1038,7 +813,6 @@
               <a:rPr lang="en-US" dirty="0"/>
               <a:t>향후 계획입니다. 파이프라인, 실증, 연동 인터페이스는 이미 완료했습니다. 다음 단계는 KICT 와 교량관리번호, 좌표계, 인증 방식을 정해 스테이징 서버에 붙이는 시범 연동입니다. 그 후 B-Maps 운영 탭에 올리고, 계측 위치를 받아 정확도 검증을 완성하고, 코너리플렉터나 고해상도 위성으로 측점 밀도를 보강하겠습니다. KICT 께 요청드리는 것은 아래 네 가지이고, 연동 시연은 오늘이라도 바로 보여드릴 수 있습니다.</a:t>
             </a:r>
-            <a:endParaRPr lang="en-US" dirty="0"/>
           </a:p>
         </p:txBody>
       </p:sp>
@@ -1111,6 +885,11 @@
 <file path=ppt/slideMasters/slideMaster1.xml><?xml version="1.0" encoding="utf-8"?>
 <p:sldMaster xmlns:a="http://schemas.openxmlformats.org/drawingml/2006/main" xmlns:r="http://schemas.openxmlformats.org/officeDocument/2006/relationships" xmlns:p="http://schemas.openxmlformats.org/presentationml/2006/main">
   <p:cSld>
+    <p:bg>
+      <p:bgRef idx="1001">
+        <a:schemeClr val="bg1"/>
+      </p:bgRef>
+    </p:bg>
     <p:spTree>
       <p:nvGrpSpPr>
         <p:cNvPr id="1" name=""/>
@@ -1393,6 +1172,7 @@
         <a:solidFill>
           <a:srgbClr val="FFFFFF"/>
         </a:solidFill>
+        <a:effectLst/>
       </p:bgPr>
     </p:bg>
     <p:spTree>
@@ -1433,6 +1213,10 @@
             <a:prstDash val="solid"/>
           </a:ln>
         </p:spPr>
+        <p:txBody>
+          <a:bodyPr/>
+          <a:p/>
+        </p:txBody>
       </p:sp>
       <p:sp>
         <p:nvSpPr>
@@ -1455,7 +1239,7 @@
           <a:bodyPr wrap="square" lIns="0" tIns="0" rIns="0" bIns="0" rtlCol="0" anchor="t"/>
           <a:lstStyle/>
           <a:p>
-            <a:pPr indent="0" marL="0">
+            <a:pPr marL="0" indent="0">
               <a:buNone/>
             </a:pPr>
             <a:r>
@@ -1494,7 +1278,7 @@
           <a:bodyPr wrap="square" lIns="0" tIns="0" rIns="0" bIns="0" rtlCol="0" anchor="ctr"/>
           <a:lstStyle/>
           <a:p>
-            <a:pPr indent="0" marL="0">
+            <a:pPr marL="0" indent="0">
               <a:buNone/>
             </a:pPr>
             <a:r>
@@ -1533,7 +1317,7 @@
           <a:bodyPr wrap="square" lIns="0" tIns="0" rIns="0" bIns="0" rtlCol="0" anchor="t"/>
           <a:lstStyle/>
           <a:p>
-            <a:pPr indent="0" marL="0">
+            <a:pPr marL="0" indent="0">
               <a:lnSpc>
                 <a:spcPct val="115000"/>
               </a:lnSpc>
@@ -1553,7 +1337,7 @@
             <a:endParaRPr lang="en-US" sz="1800" dirty="0"/>
           </a:p>
           <a:p>
-            <a:pPr indent="0" marL="0">
+            <a:pPr marL="0" indent="0">
               <a:lnSpc>
                 <a:spcPct val="115000"/>
               </a:lnSpc>
@@ -1595,7 +1379,7 @@
           <a:bodyPr wrap="square" lIns="0" tIns="0" rIns="0" bIns="0" rtlCol="0" anchor="t"/>
           <a:lstStyle/>
           <a:p>
-            <a:pPr indent="0" marL="0">
+            <a:pPr marL="0" indent="0">
               <a:lnSpc>
                 <a:spcPct val="120000"/>
               </a:lnSpc>
@@ -1612,12 +1396,6 @@
               </a:rPr>
               <a:t>좌표 하나로 </a:t>
             </a:r>
-            <a:pPr indent="0" marL="0">
-              <a:lnSpc>
-                <a:spcPct val="120000"/>
-              </a:lnSpc>
-              <a:buNone/>
-            </a:pPr>
             <a:r>
               <a:rPr lang="en-US" sz="1200" dirty="0">
                 <a:solidFill>
@@ -1629,12 +1407,6 @@
               </a:rPr>
               <a:t>위성 → 변위 → AI 해석 → 디지털 트윈 → B-Maps</a:t>
             </a:r>
-            <a:pPr indent="0" marL="0">
-              <a:lnSpc>
-                <a:spcPct val="120000"/>
-              </a:lnSpc>
-              <a:buNone/>
-            </a:pPr>
             <a:r>
               <a:rPr lang="en-US" sz="1200" dirty="0">
                 <a:solidFill>
@@ -1676,6 +1448,10 @@
             <a:prstDash val="solid"/>
           </a:ln>
         </p:spPr>
+        <p:txBody>
+          <a:bodyPr/>
+          <a:p/>
+        </p:txBody>
       </p:sp>
       <p:sp>
         <p:nvSpPr>
@@ -1698,7 +1474,7 @@
           <a:bodyPr wrap="square" lIns="0" tIns="0" rIns="0" bIns="0" rtlCol="0" anchor="ctr"/>
           <a:lstStyle/>
           <a:p>
-            <a:pPr indent="0" marL="0">
+            <a:pPr marL="0" indent="0">
               <a:lnSpc>
                 <a:spcPct val="115000"/>
               </a:lnSpc>
@@ -1718,7 +1494,7 @@
             <a:endParaRPr lang="en-US" sz="1100" dirty="0"/>
           </a:p>
           <a:p>
-            <a:pPr indent="0" marL="0">
+            <a:pPr marL="0" indent="0">
               <a:lnSpc>
                 <a:spcPct val="115000"/>
               </a:lnSpc>
@@ -1738,7 +1514,7 @@
             <a:endParaRPr lang="en-US" sz="1100" dirty="0"/>
           </a:p>
           <a:p>
-            <a:pPr indent="0" marL="0">
+            <a:pPr marL="0" indent="0">
               <a:lnSpc>
                 <a:spcPct val="115000"/>
               </a:lnSpc>
@@ -1780,7 +1556,7 @@
           <a:bodyPr wrap="square" lIns="0" tIns="0" rIns="0" bIns="0" rtlCol="0" anchor="ctr"/>
           <a:lstStyle/>
           <a:p>
-            <a:pPr indent="0" marL="0">
+            <a:pPr marL="0" indent="0">
               <a:buNone/>
             </a:pPr>
             <a:r>
@@ -1794,9 +1570,6 @@
               </a:rPr>
               <a:t>목차</a:t>
             </a:r>
-            <a:pPr indent="0" marL="0">
-              <a:buNone/>
-            </a:pPr>
             <a:r>
               <a:rPr lang="en-US" sz="1300" dirty="0">
                 <a:solidFill>
@@ -1836,6 +1609,10 @@
             <a:prstDash val="solid"/>
           </a:ln>
         </p:spPr>
+        <p:txBody>
+          <a:bodyPr/>
+          <a:p/>
+        </p:txBody>
       </p:sp>
       <p:sp>
         <p:nvSpPr>
@@ -1858,7 +1635,7 @@
           <a:bodyPr wrap="square" lIns="0" tIns="0" rIns="0" bIns="0" rtlCol="0" anchor="ctr"/>
           <a:lstStyle/>
           <a:p>
-            <a:pPr algn="ctr" indent="0" marL="0">
+            <a:pPr marL="0" indent="0" algn="ctr">
               <a:buNone/>
             </a:pPr>
             <a:r>
@@ -1897,7 +1674,7 @@
           <a:bodyPr wrap="square" lIns="0" tIns="0" rIns="0" bIns="0" rtlCol="0" anchor="ctr"/>
           <a:lstStyle/>
           <a:p>
-            <a:pPr indent="0" marL="0">
+            <a:pPr marL="0" indent="0">
               <a:buNone/>
             </a:pPr>
             <a:r>
@@ -1936,7 +1713,7 @@
           <a:bodyPr wrap="square" lIns="0" tIns="0" rIns="0" bIns="0" rtlCol="0" anchor="t"/>
           <a:lstStyle/>
           <a:p>
-            <a:pPr indent="0" marL="0">
+            <a:pPr marL="0" indent="0">
               <a:buNone/>
             </a:pPr>
             <a:r>
@@ -1975,7 +1752,7 @@
           <a:bodyPr wrap="square" lIns="0" tIns="0" rIns="0" bIns="0" rtlCol="0" anchor="ctr"/>
           <a:lstStyle/>
           <a:p>
-            <a:pPr algn="r" indent="0" marL="0">
+            <a:pPr marL="0" indent="0" algn="r">
               <a:buNone/>
             </a:pPr>
             <a:r>
@@ -2015,6 +1792,10 @@
             <a:prstDash val="solid"/>
           </a:ln>
         </p:spPr>
+        <p:txBody>
+          <a:bodyPr/>
+          <a:p/>
+        </p:txBody>
       </p:sp>
       <p:sp>
         <p:nvSpPr>
@@ -2040,6 +1821,10 @@
             <a:prstDash val="solid"/>
           </a:ln>
         </p:spPr>
+        <p:txBody>
+          <a:bodyPr/>
+          <a:p/>
+        </p:txBody>
       </p:sp>
       <p:sp>
         <p:nvSpPr>
@@ -2062,7 +1847,7 @@
           <a:bodyPr wrap="square" lIns="0" tIns="0" rIns="0" bIns="0" rtlCol="0" anchor="ctr"/>
           <a:lstStyle/>
           <a:p>
-            <a:pPr algn="ctr" indent="0" marL="0">
+            <a:pPr marL="0" indent="0" algn="ctr">
               <a:buNone/>
             </a:pPr>
             <a:r>
@@ -2101,7 +1886,7 @@
           <a:bodyPr wrap="square" lIns="0" tIns="0" rIns="0" bIns="0" rtlCol="0" anchor="ctr"/>
           <a:lstStyle/>
           <a:p>
-            <a:pPr indent="0" marL="0">
+            <a:pPr marL="0" indent="0">
               <a:buNone/>
             </a:pPr>
             <a:r>
@@ -2140,7 +1925,7 @@
           <a:bodyPr wrap="square" lIns="0" tIns="0" rIns="0" bIns="0" rtlCol="0" anchor="t"/>
           <a:lstStyle/>
           <a:p>
-            <a:pPr indent="0" marL="0">
+            <a:pPr marL="0" indent="0">
               <a:buNone/>
             </a:pPr>
             <a:r>
@@ -2179,7 +1964,7 @@
           <a:bodyPr wrap="square" lIns="0" tIns="0" rIns="0" bIns="0" rtlCol="0" anchor="ctr"/>
           <a:lstStyle/>
           <a:p>
-            <a:pPr algn="r" indent="0" marL="0">
+            <a:pPr marL="0" indent="0" algn="r">
               <a:buNone/>
             </a:pPr>
             <a:r>
@@ -2219,6 +2004,10 @@
             <a:prstDash val="solid"/>
           </a:ln>
         </p:spPr>
+        <p:txBody>
+          <a:bodyPr/>
+          <a:p/>
+        </p:txBody>
       </p:sp>
       <p:sp>
         <p:nvSpPr>
@@ -2244,6 +2033,10 @@
             <a:prstDash val="solid"/>
           </a:ln>
         </p:spPr>
+        <p:txBody>
+          <a:bodyPr/>
+          <a:p/>
+        </p:txBody>
       </p:sp>
       <p:sp>
         <p:nvSpPr>
@@ -2266,7 +2059,7 @@
           <a:bodyPr wrap="square" lIns="0" tIns="0" rIns="0" bIns="0" rtlCol="0" anchor="ctr"/>
           <a:lstStyle/>
           <a:p>
-            <a:pPr algn="ctr" indent="0" marL="0">
+            <a:pPr marL="0" indent="0" algn="ctr">
               <a:buNone/>
             </a:pPr>
             <a:r>
@@ -2305,7 +2098,7 @@
           <a:bodyPr wrap="square" lIns="0" tIns="0" rIns="0" bIns="0" rtlCol="0" anchor="ctr"/>
           <a:lstStyle/>
           <a:p>
-            <a:pPr indent="0" marL="0">
+            <a:pPr marL="0" indent="0">
               <a:buNone/>
             </a:pPr>
             <a:r>
@@ -2344,7 +2137,7 @@
           <a:bodyPr wrap="square" lIns="0" tIns="0" rIns="0" bIns="0" rtlCol="0" anchor="t"/>
           <a:lstStyle/>
           <a:p>
-            <a:pPr indent="0" marL="0">
+            <a:pPr marL="0" indent="0">
               <a:buNone/>
             </a:pPr>
             <a:r>
@@ -2356,7 +2149,7 @@
                 <a:ea typeface="Paperlogy 5 Medium" pitchFamily="34" charset="-122"/>
                 <a:cs typeface="Paperlogy 5 Medium" pitchFamily="34" charset="-120"/>
               </a:rPr>
-              <a:t>① Inframon 플랫폼 구성   ② 한강 교량 실증 · 디지털 트윈   ③ B-Maps 연동 · 현장 검증</a:t>
+              <a:t>① Inframon 플랫폼 구성   ② 한강 교량 실증 · 디지털 트윈   ③ B-Maps 연동 · 서비스 제공</a:t>
             </a:r>
             <a:endParaRPr lang="en-US" sz="1150" dirty="0"/>
           </a:p>
@@ -2383,7 +2176,7 @@
           <a:bodyPr wrap="square" lIns="0" tIns="0" rIns="0" bIns="0" rtlCol="0" anchor="ctr"/>
           <a:lstStyle/>
           <a:p>
-            <a:pPr algn="r" indent="0" marL="0">
+            <a:pPr marL="0" indent="0" algn="r">
               <a:buNone/>
             </a:pPr>
             <a:r>
@@ -2470,7 +2263,7 @@
           <a:bodyPr wrap="square" lIns="0" tIns="0" rIns="0" bIns="0" rtlCol="0" anchor="ctr"/>
           <a:lstStyle/>
           <a:p>
-            <a:pPr algn="ctr" indent="0" marL="0">
+            <a:pPr marL="0" indent="0" algn="ctr">
               <a:buNone/>
             </a:pPr>
             <a:r>
@@ -2509,7 +2302,7 @@
           <a:bodyPr wrap="square" lIns="0" tIns="0" rIns="0" bIns="0" rtlCol="0" anchor="ctr"/>
           <a:lstStyle/>
           <a:p>
-            <a:pPr indent="0" marL="0">
+            <a:pPr marL="0" indent="0">
               <a:buNone/>
             </a:pPr>
             <a:r>
@@ -2548,7 +2341,7 @@
           <a:bodyPr wrap="square" lIns="0" tIns="0" rIns="0" bIns="0" rtlCol="0" anchor="t"/>
           <a:lstStyle/>
           <a:p>
-            <a:pPr indent="0" marL="0">
+            <a:pPr marL="0" indent="0">
               <a:buNone/>
             </a:pPr>
             <a:r>
@@ -2587,7 +2380,7 @@
           <a:bodyPr wrap="square" lIns="0" tIns="0" rIns="0" bIns="0" rtlCol="0" anchor="ctr"/>
           <a:lstStyle/>
           <a:p>
-            <a:pPr algn="r" indent="0" marL="0">
+            <a:pPr marL="0" indent="0" algn="r">
               <a:buNone/>
             </a:pPr>
             <a:r>
@@ -2651,7 +2444,7 @@
           <a:bodyPr wrap="square" lIns="0" tIns="0" rIns="0" bIns="0" rtlCol="0" anchor="ctr"/>
           <a:lstStyle/>
           <a:p>
-            <a:pPr algn="r" indent="0" marL="0">
+            <a:pPr marL="0" indent="0" algn="r">
               <a:buNone/>
             </a:pPr>
             <a:r>
@@ -2685,6 +2478,7 @@
         <a:solidFill>
           <a:srgbClr val="FFFFFF"/>
         </a:solidFill>
+        <a:effectLst/>
       </p:bgPr>
     </p:bg>
     <p:spTree>
@@ -2772,7 +2566,7 @@
           <a:bodyPr wrap="square" lIns="0" tIns="0" rIns="0" bIns="0" rtlCol="0" anchor="ctr"/>
           <a:lstStyle/>
           <a:p>
-            <a:pPr algn="ctr" indent="0" marL="0">
+            <a:pPr marL="0" indent="0" algn="ctr">
               <a:buNone/>
             </a:pPr>
             <a:r>
@@ -2836,7 +2630,7 @@
           <a:bodyPr wrap="square" lIns="0" tIns="0" rIns="0" bIns="0" rtlCol="0" anchor="ctr"/>
           <a:lstStyle/>
           <a:p>
-            <a:pPr indent="0" marL="0">
+            <a:pPr marL="0" indent="0">
               <a:buNone/>
             </a:pPr>
             <a:r>
@@ -2902,7 +2696,7 @@
           <a:bodyPr wrap="square" lIns="0" tIns="0" rIns="0" bIns="0" rtlCol="0" anchor="ctr"/>
           <a:lstStyle/>
           <a:p>
-            <a:pPr algn="ctr" indent="0" marL="0">
+            <a:pPr marL="0" indent="0" algn="ctr">
               <a:buNone/>
             </a:pPr>
             <a:r>
@@ -2968,7 +2762,7 @@
           <a:bodyPr wrap="square" lIns="0" tIns="0" rIns="0" bIns="0" rtlCol="0" anchor="ctr"/>
           <a:lstStyle/>
           <a:p>
-            <a:pPr algn="ctr" indent="0" marL="0">
+            <a:pPr marL="0" indent="0" algn="ctr">
               <a:buNone/>
             </a:pPr>
             <a:r>
@@ -3034,7 +2828,7 @@
           <a:bodyPr wrap="square" lIns="0" tIns="0" rIns="0" bIns="0" rtlCol="0" anchor="ctr"/>
           <a:lstStyle/>
           <a:p>
-            <a:pPr algn="ctr" indent="0" marL="0">
+            <a:pPr marL="0" indent="0" algn="ctr">
               <a:buNone/>
             </a:pPr>
             <a:r>
@@ -3100,7 +2894,7 @@
           <a:bodyPr wrap="square" lIns="0" tIns="0" rIns="0" bIns="0" rtlCol="0" anchor="ctr"/>
           <a:lstStyle/>
           <a:p>
-            <a:pPr algn="ctr" indent="0" marL="0">
+            <a:pPr marL="0" indent="0" algn="ctr">
               <a:buNone/>
             </a:pPr>
             <a:r>
@@ -3164,7 +2958,7 @@
           <a:bodyPr wrap="square" lIns="0" tIns="0" rIns="0" bIns="0" rtlCol="0" anchor="ctr"/>
           <a:lstStyle/>
           <a:p>
-            <a:pPr indent="0" marL="0">
+            <a:pPr marL="0" indent="0">
               <a:buNone/>
             </a:pPr>
             <a:r>
@@ -3228,7 +3022,7 @@
           <a:bodyPr wrap="square" lIns="0" tIns="0" rIns="0" bIns="0" rtlCol="0" anchor="ctr"/>
           <a:lstStyle/>
           <a:p>
-            <a:pPr indent="0" marL="0">
+            <a:pPr marL="0" indent="0">
               <a:buNone/>
             </a:pPr>
             <a:r>
@@ -3292,7 +3086,7 @@
           <a:bodyPr wrap="square" lIns="0" tIns="0" rIns="0" bIns="0" rtlCol="0" anchor="ctr"/>
           <a:lstStyle/>
           <a:p>
-            <a:pPr algn="r" indent="0" marL="0">
+            <a:pPr marL="0" indent="0" algn="r">
               <a:buNone/>
             </a:pPr>
             <a:r>
@@ -3385,7 +3179,7 @@
           <a:bodyPr wrap="square" lIns="0" tIns="0" rIns="0" bIns="0" rtlCol="0" anchor="ctr"/>
           <a:lstStyle/>
           <a:p>
-            <a:pPr algn="ctr" indent="0" marL="0">
+            <a:pPr marL="0" indent="0" algn="ctr">
               <a:buNone/>
             </a:pPr>
             <a:r>
@@ -3445,12 +3239,6 @@
               </a:rPr>
               <a:t>상시 계측  </a:t>
             </a:r>
-            <a:pPr indent="0" marL="0">
-              <a:lnSpc>
-                <a:spcPct val="115000"/>
-              </a:lnSpc>
-              <a:buNone/>
-            </a:pPr>
             <a:r>
               <a:rPr lang="en-US" sz="1200" dirty="0">
                 <a:solidFill>
@@ -3486,12 +3274,6 @@
               </a:rPr>
               <a:t>정기 점검  </a:t>
             </a:r>
-            <a:pPr indent="0" marL="0">
-              <a:lnSpc>
-                <a:spcPct val="115000"/>
-              </a:lnSpc>
-              <a:buNone/>
-            </a:pPr>
             <a:r>
               <a:rPr lang="en-US" sz="1200" dirty="0">
                 <a:solidFill>
@@ -3527,12 +3309,6 @@
               </a:rPr>
               <a:t>센서 미설치  </a:t>
             </a:r>
-            <a:pPr indent="0" marL="0">
-              <a:lnSpc>
-                <a:spcPct val="115000"/>
-              </a:lnSpc>
-              <a:buNone/>
-            </a:pPr>
             <a:r>
               <a:rPr lang="en-US" sz="1200" dirty="0">
                 <a:solidFill>
@@ -3623,7 +3399,7 @@
           <a:bodyPr wrap="square" lIns="0" tIns="0" rIns="0" bIns="0" rtlCol="0" anchor="ctr"/>
           <a:lstStyle/>
           <a:p>
-            <a:pPr algn="ctr" indent="0" marL="0">
+            <a:pPr marL="0" indent="0" algn="ctr">
               <a:buNone/>
             </a:pPr>
             <a:r>
@@ -3683,12 +3459,6 @@
               </a:rPr>
               <a:t>소급 관측  </a:t>
             </a:r>
-            <a:pPr indent="0" marL="0">
-              <a:lnSpc>
-                <a:spcPct val="115000"/>
-              </a:lnSpc>
-              <a:buNone/>
-            </a:pPr>
             <a:r>
               <a:rPr lang="en-US" sz="1200" dirty="0">
                 <a:solidFill>
@@ -3724,12 +3494,6 @@
               </a:rPr>
               <a:t>무설치  </a:t>
             </a:r>
-            <a:pPr indent="0" marL="0">
-              <a:lnSpc>
-                <a:spcPct val="115000"/>
-              </a:lnSpc>
-              <a:buNone/>
-            </a:pPr>
             <a:r>
               <a:rPr lang="en-US" sz="1200" dirty="0">
                 <a:solidFill>
@@ -3765,12 +3529,6 @@
               </a:rPr>
               <a:t>확장성  </a:t>
             </a:r>
-            <a:pPr indent="0" marL="0">
-              <a:lnSpc>
-                <a:spcPct val="115000"/>
-              </a:lnSpc>
-              <a:buNone/>
-            </a:pPr>
             <a:r>
               <a:rPr lang="en-US" sz="1200" dirty="0">
                 <a:solidFill>
@@ -3861,7 +3619,7 @@
           <a:bodyPr wrap="square" lIns="0" tIns="0" rIns="0" bIns="0" rtlCol="0" anchor="ctr"/>
           <a:lstStyle/>
           <a:p>
-            <a:pPr algn="ctr" indent="0" marL="0">
+            <a:pPr marL="0" indent="0" algn="ctr">
               <a:buNone/>
             </a:pPr>
             <a:r>
@@ -3921,12 +3679,6 @@
               </a:rPr>
               <a:t>공간 + 시간  </a:t>
             </a:r>
-            <a:pPr indent="0" marL="0">
-              <a:lnSpc>
-                <a:spcPct val="115000"/>
-              </a:lnSpc>
-              <a:buNone/>
-            </a:pPr>
             <a:r>
               <a:rPr lang="en-US" sz="1200" dirty="0">
                 <a:solidFill>
@@ -3962,12 +3714,6 @@
               </a:rPr>
               <a:t>부재 단위  </a:t>
             </a:r>
-            <a:pPr indent="0" marL="0">
-              <a:lnSpc>
-                <a:spcPct val="115000"/>
-              </a:lnSpc>
-              <a:buNone/>
-            </a:pPr>
             <a:r>
               <a:rPr lang="en-US" sz="1200" dirty="0">
                 <a:solidFill>
@@ -4003,12 +3749,6 @@
               </a:rPr>
               <a:t>서비스화  </a:t>
             </a:r>
-            <a:pPr indent="0" marL="0">
-              <a:lnSpc>
-                <a:spcPct val="115000"/>
-              </a:lnSpc>
-              <a:buNone/>
-            </a:pPr>
             <a:r>
               <a:rPr lang="en-US" sz="1200" dirty="0">
                 <a:solidFill>
@@ -4072,7 +3812,7 @@
           <a:bodyPr wrap="square" lIns="0" tIns="0" rIns="0" bIns="0" rtlCol="0" anchor="ctr"/>
           <a:lstStyle/>
           <a:p>
-            <a:pPr indent="0" marL="0">
+            <a:pPr marL="0" indent="0">
               <a:buNone/>
             </a:pPr>
             <a:r>
@@ -4086,9 +3826,6 @@
               </a:rPr>
               <a:t>7</a:t>
             </a:r>
-            <a:pPr indent="0" marL="0">
-              <a:buNone/>
-            </a:pPr>
             <a:r>
               <a:rPr lang="en-US" sz="1200" dirty="0">
                 <a:solidFill>
@@ -4125,7 +3862,7 @@
           <a:bodyPr wrap="square" lIns="0" tIns="0" rIns="0" bIns="0" rtlCol="0" anchor="t"/>
           <a:lstStyle/>
           <a:p>
-            <a:pPr indent="0" marL="0">
+            <a:pPr marL="0" indent="0">
               <a:lnSpc>
                 <a:spcPct val="110000"/>
               </a:lnSpc>
@@ -4194,7 +3931,7 @@
           <a:bodyPr wrap="square" lIns="0" tIns="0" rIns="0" bIns="0" rtlCol="0" anchor="ctr"/>
           <a:lstStyle/>
           <a:p>
-            <a:pPr indent="0" marL="0">
+            <a:pPr marL="0" indent="0">
               <a:buNone/>
             </a:pPr>
             <a:r>
@@ -4208,9 +3945,6 @@
               </a:rPr>
               <a:t>12</a:t>
             </a:r>
-            <a:pPr indent="0" marL="0">
-              <a:buNone/>
-            </a:pPr>
             <a:r>
               <a:rPr lang="en-US" sz="1200" dirty="0">
                 <a:solidFill>
@@ -4247,7 +3981,7 @@
           <a:bodyPr wrap="square" lIns="0" tIns="0" rIns="0" bIns="0" rtlCol="0" anchor="t"/>
           <a:lstStyle/>
           <a:p>
-            <a:pPr indent="0" marL="0">
+            <a:pPr marL="0" indent="0">
               <a:lnSpc>
                 <a:spcPct val="110000"/>
               </a:lnSpc>
@@ -4316,7 +4050,7 @@
           <a:bodyPr wrap="square" lIns="0" tIns="0" rIns="0" bIns="0" rtlCol="0" anchor="ctr"/>
           <a:lstStyle/>
           <a:p>
-            <a:pPr indent="0" marL="0">
+            <a:pPr marL="0" indent="0">
               <a:buNone/>
             </a:pPr>
             <a:r>
@@ -4330,9 +4064,6 @@
               </a:rPr>
               <a:t>0</a:t>
             </a:r>
-            <a:pPr indent="0" marL="0">
-              <a:buNone/>
-            </a:pPr>
             <a:r>
               <a:rPr lang="en-US" sz="1200" dirty="0">
                 <a:solidFill>
@@ -4369,7 +4100,7 @@
           <a:bodyPr wrap="square" lIns="0" tIns="0" rIns="0" bIns="0" rtlCol="0" anchor="t"/>
           <a:lstStyle/>
           <a:p>
-            <a:pPr indent="0" marL="0">
+            <a:pPr marL="0" indent="0">
               <a:lnSpc>
                 <a:spcPct val="110000"/>
               </a:lnSpc>
@@ -4438,7 +4169,7 @@
           <a:bodyPr wrap="square" lIns="0" tIns="0" rIns="0" bIns="0" rtlCol="0" anchor="ctr"/>
           <a:lstStyle/>
           <a:p>
-            <a:pPr indent="0" marL="0">
+            <a:pPr marL="0" indent="0">
               <a:buNone/>
             </a:pPr>
             <a:r>
@@ -4452,9 +4183,6 @@
               </a:rPr>
               <a:t>전량</a:t>
             </a:r>
-            <a:pPr indent="0" marL="0">
-              <a:buNone/>
-            </a:pPr>
             <a:r>
               <a:rPr lang="en-US" sz="1200" dirty="0">
                 <a:solidFill>
@@ -4491,7 +4219,7 @@
           <a:bodyPr wrap="square" lIns="0" tIns="0" rIns="0" bIns="0" rtlCol="0" anchor="t"/>
           <a:lstStyle/>
           <a:p>
-            <a:pPr indent="0" marL="0">
+            <a:pPr marL="0" indent="0">
               <a:lnSpc>
                 <a:spcPct val="110000"/>
               </a:lnSpc>
@@ -4514,7 +4242,7 @@
       </p:sp>
       <p:graphicFrame>
         <p:nvGraphicFramePr>
-          <p:cNvPr id="3" name="Table 0"/>
+          <p:cNvPr id="21" name="Table 0"/>
           <p:cNvGraphicFramePr>
             <a:graphicFrameLocks noGrp="1"/>
           </p:cNvGraphicFramePr>
@@ -4528,16 +4256,34 @@
         </p:nvGraphicFramePr>
         <p:xfrm>
           <a:off x="411480" y="4937760"/>
-          <a:ext cx="11365992" cy="914400"/>
+          <a:ext cx="11365992" cy="1316736"/>
         </p:xfrm>
         <a:graphic>
           <a:graphicData uri="http://schemas.openxmlformats.org/drawingml/2006/table">
             <a:tbl>
               <a:tblPr/>
               <a:tblGrid>
-                <a:gridCol w="2194560"/>
-                <a:gridCol w="4206240"/>
-                <a:gridCol w="4965192"/>
+                <a:gridCol w="2194560">
+                  <a:extLst>
+                    <a:ext uri="{9D8B030D-6E8A-4147-A177-3AD203B41FA5}">
+                      <a16:colId xmlns:a16="http://schemas.microsoft.com/office/drawing/2014/main" val="20000"/>
+                    </a:ext>
+                  </a:extLst>
+                </a:gridCol>
+                <a:gridCol w="4206240">
+                  <a:extLst>
+                    <a:ext uri="{9D8B030D-6E8A-4147-A177-3AD203B41FA5}">
+                      <a16:colId xmlns:a16="http://schemas.microsoft.com/office/drawing/2014/main" val="20001"/>
+                    </a:ext>
+                  </a:extLst>
+                </a:gridCol>
+                <a:gridCol w="4965192">
+                  <a:extLst>
+                    <a:ext uri="{9D8B030D-6E8A-4147-A177-3AD203B41FA5}">
+                      <a16:colId xmlns:a16="http://schemas.microsoft.com/office/drawing/2014/main" val="20002"/>
+                    </a:ext>
+                  </a:extLst>
+                </a:gridCol>
               </a:tblGrid>
               <a:tr h="329184">
                 <a:tc>
@@ -4545,7 +4291,7 @@
                     <a:bodyPr/>
                     <a:lstStyle/>
                     <a:p>
-                      <a:pPr algn="ctr" indent="0" marL="0">
+                      <a:pPr marL="0" indent="0" algn="ctr">
                         <a:buNone/>
                       </a:pPr>
                       <a:r>
@@ -4613,7 +4359,7 @@
                     <a:bodyPr/>
                     <a:lstStyle/>
                     <a:p>
-                      <a:pPr algn="ctr" indent="0" marL="0">
+                      <a:pPr marL="0" indent="0" algn="ctr">
                         <a:buNone/>
                       </a:pPr>
                       <a:r>
@@ -4681,7 +4427,7 @@
                     <a:bodyPr/>
                     <a:lstStyle/>
                     <a:p>
-                      <a:pPr algn="ctr" indent="0" marL="0">
+                      <a:pPr marL="0" indent="0" algn="ctr">
                         <a:buNone/>
                       </a:pPr>
                       <a:r>
@@ -4744,6 +4490,11 @@
                     </a:solidFill>
                   </a:tcPr>
                 </a:tc>
+                <a:extLst>
+                  <a:ext uri="{0D108BD9-81ED-4DB2-BD59-A6C34878D82A}">
+                    <a16:rowId xmlns:a16="http://schemas.microsoft.com/office/drawing/2014/main" val="10000"/>
+                  </a:ext>
+                </a:extLst>
               </a:tr>
               <a:tr h="329184">
                 <a:tc>
@@ -4751,7 +4502,7 @@
                     <a:bodyPr/>
                     <a:lstStyle/>
                     <a:p>
-                      <a:pPr algn="l" indent="0" marL="0">
+                      <a:pPr marL="0" indent="0" algn="l">
                         <a:buNone/>
                       </a:pPr>
                       <a:r>
@@ -4819,7 +4570,7 @@
                     <a:bodyPr/>
                     <a:lstStyle/>
                     <a:p>
-                      <a:pPr algn="l" indent="0" marL="0">
+                      <a:pPr marL="0" indent="0" algn="l">
                         <a:buNone/>
                       </a:pPr>
                       <a:r>
@@ -4887,7 +4638,7 @@
                     <a:bodyPr/>
                     <a:lstStyle/>
                     <a:p>
-                      <a:pPr algn="l" indent="0" marL="0">
+                      <a:pPr marL="0" indent="0" algn="l">
                         <a:buNone/>
                       </a:pPr>
                       <a:r>
@@ -4950,6 +4701,11 @@
                     </a:solidFill>
                   </a:tcPr>
                 </a:tc>
+                <a:extLst>
+                  <a:ext uri="{0D108BD9-81ED-4DB2-BD59-A6C34878D82A}">
+                    <a16:rowId xmlns:a16="http://schemas.microsoft.com/office/drawing/2014/main" val="10001"/>
+                  </a:ext>
+                </a:extLst>
               </a:tr>
               <a:tr h="329184">
                 <a:tc>
@@ -4957,7 +4713,7 @@
                     <a:bodyPr/>
                     <a:lstStyle/>
                     <a:p>
-                      <a:pPr algn="l" indent="0" marL="0">
+                      <a:pPr marL="0" indent="0" algn="l">
                         <a:buNone/>
                       </a:pPr>
                       <a:r>
@@ -5025,7 +4781,7 @@
                     <a:bodyPr/>
                     <a:lstStyle/>
                     <a:p>
-                      <a:pPr algn="l" indent="0" marL="0">
+                      <a:pPr marL="0" indent="0" algn="l">
                         <a:buNone/>
                       </a:pPr>
                       <a:r>
@@ -5093,7 +4849,7 @@
                     <a:bodyPr/>
                     <a:lstStyle/>
                     <a:p>
-                      <a:pPr algn="l" indent="0" marL="0">
+                      <a:pPr marL="0" indent="0" algn="l">
                         <a:buNone/>
                       </a:pPr>
                       <a:r>
@@ -5156,6 +4912,11 @@
                     </a:solidFill>
                   </a:tcPr>
                 </a:tc>
+                <a:extLst>
+                  <a:ext uri="{0D108BD9-81ED-4DB2-BD59-A6C34878D82A}">
+                    <a16:rowId xmlns:a16="http://schemas.microsoft.com/office/drawing/2014/main" val="10002"/>
+                  </a:ext>
+                </a:extLst>
               </a:tr>
               <a:tr h="329184">
                 <a:tc>
@@ -5163,7 +4924,7 @@
                     <a:bodyPr/>
                     <a:lstStyle/>
                     <a:p>
-                      <a:pPr algn="l" indent="0" marL="0">
+                      <a:pPr marL="0" indent="0" algn="l">
                         <a:buNone/>
                       </a:pPr>
                       <a:r>
@@ -5231,7 +4992,7 @@
                     <a:bodyPr/>
                     <a:lstStyle/>
                     <a:p>
-                      <a:pPr algn="l" indent="0" marL="0">
+                      <a:pPr marL="0" indent="0" algn="l">
                         <a:buNone/>
                       </a:pPr>
                       <a:r>
@@ -5299,7 +5060,7 @@
                     <a:bodyPr/>
                     <a:lstStyle/>
                     <a:p>
-                      <a:pPr algn="l" indent="0" marL="0">
+                      <a:pPr marL="0" indent="0" algn="l">
                         <a:buNone/>
                       </a:pPr>
                       <a:r>
@@ -5362,6 +5123,11 @@
                     </a:solidFill>
                   </a:tcPr>
                 </a:tc>
+                <a:extLst>
+                  <a:ext uri="{0D108BD9-81ED-4DB2-BD59-A6C34878D82A}">
+                    <a16:rowId xmlns:a16="http://schemas.microsoft.com/office/drawing/2014/main" val="10003"/>
+                  </a:ext>
+                </a:extLst>
               </a:tr>
             </a:tbl>
           </a:graphicData>
@@ -5388,7 +5154,7 @@
           <a:bodyPr wrap="square" lIns="0" tIns="0" rIns="0" bIns="0" rtlCol="0" anchor="ctr"/>
           <a:lstStyle/>
           <a:p>
-            <a:pPr indent="0" marL="0">
+            <a:pPr marL="0" indent="0">
               <a:buNone/>
             </a:pPr>
             <a:r>
@@ -5422,6 +5188,7 @@
         <a:solidFill>
           <a:srgbClr val="FFFFFF"/>
         </a:solidFill>
+        <a:effectLst/>
       </p:bgPr>
     </p:bg>
     <p:spTree>
@@ -5462,6 +5229,10 @@
             <a:prstDash val="solid"/>
           </a:ln>
         </p:spPr>
+        <p:txBody>
+          <a:bodyPr/>
+          <a:p/>
+        </p:txBody>
       </p:sp>
       <p:sp>
         <p:nvSpPr>
@@ -5487,6 +5258,10 @@
             <a:prstDash val="solid"/>
           </a:ln>
         </p:spPr>
+        <p:txBody>
+          <a:bodyPr/>
+          <a:p/>
+        </p:txBody>
       </p:sp>
       <p:sp>
         <p:nvSpPr>
@@ -5509,7 +5284,7 @@
           <a:bodyPr wrap="square" lIns="0" tIns="0" rIns="0" bIns="0" rtlCol="0" anchor="ctr"/>
           <a:lstStyle/>
           <a:p>
-            <a:pPr algn="ctr" indent="0" marL="0">
+            <a:pPr marL="0" indent="0" algn="ctr">
               <a:buNone/>
             </a:pPr>
             <a:r>
@@ -5551,6 +5326,10 @@
             <a:prstDash val="solid"/>
           </a:ln>
         </p:spPr>
+        <p:txBody>
+          <a:bodyPr/>
+          <a:p/>
+        </p:txBody>
       </p:sp>
       <p:sp>
         <p:nvSpPr>
@@ -5573,7 +5352,7 @@
           <a:bodyPr wrap="square" lIns="0" tIns="0" rIns="0" bIns="0" rtlCol="0" anchor="ctr"/>
           <a:lstStyle/>
           <a:p>
-            <a:pPr indent="0" marL="0">
+            <a:pPr marL="0" indent="0">
               <a:buNone/>
             </a:pPr>
             <a:r>
@@ -5617,6 +5396,10 @@
             <a:prstDash val="solid"/>
           </a:ln>
         </p:spPr>
+        <p:txBody>
+          <a:bodyPr/>
+          <a:p/>
+        </p:txBody>
       </p:sp>
       <p:sp>
         <p:nvSpPr>
@@ -5639,7 +5422,7 @@
           <a:bodyPr wrap="square" lIns="0" tIns="0" rIns="0" bIns="0" rtlCol="0" anchor="ctr"/>
           <a:lstStyle/>
           <a:p>
-            <a:pPr algn="ctr" indent="0" marL="0">
+            <a:pPr marL="0" indent="0" algn="ctr">
               <a:buNone/>
             </a:pPr>
             <a:r>
@@ -5683,6 +5466,10 @@
             <a:prstDash val="solid"/>
           </a:ln>
         </p:spPr>
+        <p:txBody>
+          <a:bodyPr/>
+          <a:p/>
+        </p:txBody>
       </p:sp>
       <p:sp>
         <p:nvSpPr>
@@ -5705,7 +5492,7 @@
           <a:bodyPr wrap="square" lIns="0" tIns="0" rIns="0" bIns="0" rtlCol="0" anchor="ctr"/>
           <a:lstStyle/>
           <a:p>
-            <a:pPr algn="ctr" indent="0" marL="0">
+            <a:pPr marL="0" indent="0" algn="ctr">
               <a:buNone/>
             </a:pPr>
             <a:r>
@@ -5749,6 +5536,10 @@
             <a:prstDash val="solid"/>
           </a:ln>
         </p:spPr>
+        <p:txBody>
+          <a:bodyPr/>
+          <a:p/>
+        </p:txBody>
       </p:sp>
       <p:sp>
         <p:nvSpPr>
@@ -5771,7 +5562,7 @@
           <a:bodyPr wrap="square" lIns="0" tIns="0" rIns="0" bIns="0" rtlCol="0" anchor="ctr"/>
           <a:lstStyle/>
           <a:p>
-            <a:pPr algn="ctr" indent="0" marL="0">
+            <a:pPr marL="0" indent="0" algn="ctr">
               <a:buNone/>
             </a:pPr>
             <a:r>
@@ -5815,6 +5606,10 @@
             <a:prstDash val="solid"/>
           </a:ln>
         </p:spPr>
+        <p:txBody>
+          <a:bodyPr/>
+          <a:p/>
+        </p:txBody>
       </p:sp>
       <p:sp>
         <p:nvSpPr>
@@ -5837,7 +5632,7 @@
           <a:bodyPr wrap="square" lIns="0" tIns="0" rIns="0" bIns="0" rtlCol="0" anchor="ctr"/>
           <a:lstStyle/>
           <a:p>
-            <a:pPr algn="ctr" indent="0" marL="0">
+            <a:pPr marL="0" indent="0" algn="ctr">
               <a:buNone/>
             </a:pPr>
             <a:r>
@@ -5879,6 +5674,10 @@
             <a:prstDash val="solid"/>
           </a:ln>
         </p:spPr>
+        <p:txBody>
+          <a:bodyPr/>
+          <a:p/>
+        </p:txBody>
       </p:sp>
       <p:sp>
         <p:nvSpPr>
@@ -5901,7 +5700,7 @@
           <a:bodyPr wrap="square" lIns="0" tIns="0" rIns="0" bIns="0" rtlCol="0" anchor="ctr"/>
           <a:lstStyle/>
           <a:p>
-            <a:pPr indent="0" marL="0">
+            <a:pPr marL="0" indent="0">
               <a:buNone/>
             </a:pPr>
             <a:r>
@@ -5943,6 +5742,10 @@
             <a:prstDash val="solid"/>
           </a:ln>
         </p:spPr>
+        <p:txBody>
+          <a:bodyPr/>
+          <a:p/>
+        </p:txBody>
       </p:sp>
       <p:sp>
         <p:nvSpPr>
@@ -5965,7 +5768,7 @@
           <a:bodyPr wrap="square" lIns="0" tIns="0" rIns="0" bIns="0" rtlCol="0" anchor="ctr"/>
           <a:lstStyle/>
           <a:p>
-            <a:pPr indent="0" marL="0">
+            <a:pPr marL="0" indent="0">
               <a:buNone/>
             </a:pPr>
             <a:r>
@@ -6007,6 +5810,10 @@
             <a:prstDash val="solid"/>
           </a:ln>
         </p:spPr>
+        <p:txBody>
+          <a:bodyPr/>
+          <a:p/>
+        </p:txBody>
       </p:sp>
       <p:sp>
         <p:nvSpPr>
@@ -6029,7 +5836,7 @@
           <a:bodyPr wrap="square" lIns="0" tIns="0" rIns="0" bIns="0" rtlCol="0" anchor="ctr"/>
           <a:lstStyle/>
           <a:p>
-            <a:pPr algn="r" indent="0" marL="0">
+            <a:pPr marL="0" indent="0" algn="r">
               <a:buNone/>
             </a:pPr>
             <a:r>
@@ -6073,6 +5880,10 @@
             <a:prstDash val="solid"/>
           </a:ln>
         </p:spPr>
+        <p:txBody>
+          <a:bodyPr/>
+          <a:p/>
+        </p:txBody>
       </p:sp>
       <p:sp>
         <p:nvSpPr>
@@ -6100,6 +5911,10 @@
             <a:prstDash val="solid"/>
           </a:ln>
         </p:spPr>
+        <p:txBody>
+          <a:bodyPr/>
+          <a:p/>
+        </p:txBody>
       </p:sp>
       <p:sp>
         <p:nvSpPr>
@@ -6122,7 +5937,7 @@
           <a:bodyPr wrap="square" lIns="0" tIns="0" rIns="0" bIns="0" rtlCol="0" anchor="ctr"/>
           <a:lstStyle/>
           <a:p>
-            <a:pPr algn="ctr" indent="0" marL="0">
+            <a:pPr marL="0" indent="0" algn="ctr">
               <a:buNone/>
             </a:pPr>
             <a:r>
@@ -6161,7 +5976,7 @@
           <a:bodyPr wrap="square" lIns="0" tIns="0" rIns="0" bIns="0" rtlCol="0" anchor="ctr"/>
           <a:lstStyle/>
           <a:p>
-            <a:pPr indent="0" marL="0">
+            <a:pPr marL="0" indent="0">
               <a:buNone/>
             </a:pPr>
             <a:r>
@@ -6205,6 +6020,10 @@
             <a:prstDash val="solid"/>
           </a:ln>
         </p:spPr>
+        <p:txBody>
+          <a:bodyPr/>
+          <a:p/>
+        </p:txBody>
       </p:sp>
       <p:sp>
         <p:nvSpPr>
@@ -6230,6 +6049,10 @@
             <a:prstDash val="solid"/>
           </a:ln>
         </p:spPr>
+        <p:txBody>
+          <a:bodyPr/>
+          <a:p/>
+        </p:txBody>
       </p:sp>
       <p:sp>
         <p:nvSpPr>
@@ -6252,7 +6075,7 @@
           <a:bodyPr wrap="square" lIns="0" tIns="0" rIns="0" bIns="0" rtlCol="0" anchor="ctr"/>
           <a:lstStyle/>
           <a:p>
-            <a:pPr algn="ctr" indent="0" marL="0">
+            <a:pPr marL="0" indent="0" algn="ctr">
               <a:buNone/>
             </a:pPr>
             <a:r>
@@ -6291,7 +6114,7 @@
           <a:bodyPr wrap="square" lIns="0" tIns="0" rIns="0" bIns="0" rtlCol="0" anchor="ctr"/>
           <a:lstStyle/>
           <a:p>
-            <a:pPr indent="0" marL="0">
+            <a:pPr marL="0" indent="0">
               <a:buNone/>
             </a:pPr>
             <a:r>
@@ -6330,7 +6153,7 @@
           <a:bodyPr wrap="square" lIns="0" tIns="0" rIns="0" bIns="0" rtlCol="0" anchor="t"/>
           <a:lstStyle/>
           <a:p>
-            <a:pPr indent="0" marL="0">
+            <a:pPr marL="0" indent="0">
               <a:lnSpc>
                 <a:spcPct val="115000"/>
               </a:lnSpc>
@@ -6350,7 +6173,7 @@
             <a:endParaRPr lang="en-US" sz="1050" dirty="0"/>
           </a:p>
           <a:p>
-            <a:pPr indent="0" marL="0">
+            <a:pPr marL="0" indent="0">
               <a:lnSpc>
                 <a:spcPct val="115000"/>
               </a:lnSpc>
@@ -6397,6 +6220,10 @@
             <a:prstDash val="solid"/>
           </a:ln>
         </p:spPr>
+        <p:txBody>
+          <a:bodyPr/>
+          <a:p/>
+        </p:txBody>
       </p:sp>
       <p:sp>
         <p:nvSpPr>
@@ -6422,6 +6249,10 @@
             <a:prstDash val="solid"/>
           </a:ln>
         </p:spPr>
+        <p:txBody>
+          <a:bodyPr/>
+          <a:p/>
+        </p:txBody>
       </p:sp>
       <p:sp>
         <p:nvSpPr>
@@ -6444,7 +6275,7 @@
           <a:bodyPr wrap="square" lIns="0" tIns="0" rIns="0" bIns="0" rtlCol="0" anchor="ctr"/>
           <a:lstStyle/>
           <a:p>
-            <a:pPr algn="ctr" indent="0" marL="0">
+            <a:pPr marL="0" indent="0" algn="ctr">
               <a:buNone/>
             </a:pPr>
             <a:r>
@@ -6483,7 +6314,7 @@
           <a:bodyPr wrap="square" lIns="0" tIns="0" rIns="0" bIns="0" rtlCol="0" anchor="ctr"/>
           <a:lstStyle/>
           <a:p>
-            <a:pPr indent="0" marL="0">
+            <a:pPr marL="0" indent="0">
               <a:buNone/>
             </a:pPr>
             <a:r>
@@ -6522,7 +6353,7 @@
           <a:bodyPr wrap="square" lIns="0" tIns="0" rIns="0" bIns="0" rtlCol="0" anchor="t"/>
           <a:lstStyle/>
           <a:p>
-            <a:pPr indent="0" marL="0">
+            <a:pPr marL="0" indent="0">
               <a:lnSpc>
                 <a:spcPct val="115000"/>
               </a:lnSpc>
@@ -6542,7 +6373,7 @@
             <a:endParaRPr lang="en-US" sz="1050" dirty="0"/>
           </a:p>
           <a:p>
-            <a:pPr indent="0" marL="0">
+            <a:pPr marL="0" indent="0">
               <a:lnSpc>
                 <a:spcPct val="115000"/>
               </a:lnSpc>
@@ -6589,6 +6420,10 @@
             <a:prstDash val="solid"/>
           </a:ln>
         </p:spPr>
+        <p:txBody>
+          <a:bodyPr/>
+          <a:p/>
+        </p:txBody>
       </p:sp>
       <p:sp>
         <p:nvSpPr>
@@ -6614,6 +6449,10 @@
             <a:prstDash val="solid"/>
           </a:ln>
         </p:spPr>
+        <p:txBody>
+          <a:bodyPr/>
+          <a:p/>
+        </p:txBody>
       </p:sp>
       <p:sp>
         <p:nvSpPr>
@@ -6636,7 +6475,7 @@
           <a:bodyPr wrap="square" lIns="0" tIns="0" rIns="0" bIns="0" rtlCol="0" anchor="ctr"/>
           <a:lstStyle/>
           <a:p>
-            <a:pPr algn="ctr" indent="0" marL="0">
+            <a:pPr marL="0" indent="0" algn="ctr">
               <a:buNone/>
             </a:pPr>
             <a:r>
@@ -6675,7 +6514,7 @@
           <a:bodyPr wrap="square" lIns="0" tIns="0" rIns="0" bIns="0" rtlCol="0" anchor="ctr"/>
           <a:lstStyle/>
           <a:p>
-            <a:pPr indent="0" marL="0">
+            <a:pPr marL="0" indent="0">
               <a:buNone/>
             </a:pPr>
             <a:r>
@@ -6714,7 +6553,7 @@
           <a:bodyPr wrap="square" lIns="0" tIns="0" rIns="0" bIns="0" rtlCol="0" anchor="t"/>
           <a:lstStyle/>
           <a:p>
-            <a:pPr indent="0" marL="0">
+            <a:pPr marL="0" indent="0">
               <a:lnSpc>
                 <a:spcPct val="115000"/>
               </a:lnSpc>
@@ -6734,7 +6573,7 @@
             <a:endParaRPr lang="en-US" sz="1050" dirty="0"/>
           </a:p>
           <a:p>
-            <a:pPr indent="0" marL="0">
+            <a:pPr marL="0" indent="0">
               <a:lnSpc>
                 <a:spcPct val="115000"/>
               </a:lnSpc>
@@ -6781,6 +6620,10 @@
             <a:prstDash val="solid"/>
           </a:ln>
         </p:spPr>
+        <p:txBody>
+          <a:bodyPr/>
+          <a:p/>
+        </p:txBody>
       </p:sp>
       <p:sp>
         <p:nvSpPr>
@@ -6806,6 +6649,10 @@
             <a:prstDash val="solid"/>
           </a:ln>
         </p:spPr>
+        <p:txBody>
+          <a:bodyPr/>
+          <a:p/>
+        </p:txBody>
       </p:sp>
       <p:sp>
         <p:nvSpPr>
@@ -6828,7 +6675,7 @@
           <a:bodyPr wrap="square" lIns="0" tIns="0" rIns="0" bIns="0" rtlCol="0" anchor="ctr"/>
           <a:lstStyle/>
           <a:p>
-            <a:pPr algn="ctr" indent="0" marL="0">
+            <a:pPr marL="0" indent="0" algn="ctr">
               <a:buNone/>
             </a:pPr>
             <a:r>
@@ -6867,7 +6714,7 @@
           <a:bodyPr wrap="square" lIns="0" tIns="0" rIns="0" bIns="0" rtlCol="0" anchor="ctr"/>
           <a:lstStyle/>
           <a:p>
-            <a:pPr indent="0" marL="0">
+            <a:pPr marL="0" indent="0">
               <a:buNone/>
             </a:pPr>
             <a:r>
@@ -6906,7 +6753,7 @@
           <a:bodyPr wrap="square" lIns="0" tIns="0" rIns="0" bIns="0" rtlCol="0" anchor="t"/>
           <a:lstStyle/>
           <a:p>
-            <a:pPr indent="0" marL="0">
+            <a:pPr marL="0" indent="0">
               <a:lnSpc>
                 <a:spcPct val="115000"/>
               </a:lnSpc>
@@ -6926,7 +6773,7 @@
             <a:endParaRPr lang="en-US" sz="1050" dirty="0"/>
           </a:p>
           <a:p>
-            <a:pPr indent="0" marL="0">
+            <a:pPr marL="0" indent="0">
               <a:lnSpc>
                 <a:spcPct val="115000"/>
               </a:lnSpc>
@@ -6949,7 +6796,7 @@
       </p:sp>
       <p:graphicFrame>
         <p:nvGraphicFramePr>
-          <p:cNvPr id="4" name="Table 0"/>
+          <p:cNvPr id="21" name="Table 0"/>
           <p:cNvGraphicFramePr>
             <a:graphicFrameLocks noGrp="1"/>
           </p:cNvGraphicFramePr>
@@ -6963,17 +6810,41 @@
         </p:nvGraphicFramePr>
         <p:xfrm>
           <a:off x="411480" y="3822192"/>
-          <a:ext cx="11365992" cy="914400"/>
+          <a:ext cx="11365992" cy="2359152"/>
         </p:xfrm>
         <a:graphic>
           <a:graphicData uri="http://schemas.openxmlformats.org/drawingml/2006/table">
             <a:tbl>
               <a:tblPr/>
               <a:tblGrid>
-                <a:gridCol w="1737360"/>
-                <a:gridCol w="2834640"/>
-                <a:gridCol w="3017520"/>
-                <a:gridCol w="3776472"/>
+                <a:gridCol w="1737360">
+                  <a:extLst>
+                    <a:ext uri="{9D8B030D-6E8A-4147-A177-3AD203B41FA5}">
+                      <a16:colId xmlns:a16="http://schemas.microsoft.com/office/drawing/2014/main" val="20000"/>
+                    </a:ext>
+                  </a:extLst>
+                </a:gridCol>
+                <a:gridCol w="2834640">
+                  <a:extLst>
+                    <a:ext uri="{9D8B030D-6E8A-4147-A177-3AD203B41FA5}">
+                      <a16:colId xmlns:a16="http://schemas.microsoft.com/office/drawing/2014/main" val="20001"/>
+                    </a:ext>
+                  </a:extLst>
+                </a:gridCol>
+                <a:gridCol w="3017520">
+                  <a:extLst>
+                    <a:ext uri="{9D8B030D-6E8A-4147-A177-3AD203B41FA5}">
+                      <a16:colId xmlns:a16="http://schemas.microsoft.com/office/drawing/2014/main" val="20002"/>
+                    </a:ext>
+                  </a:extLst>
+                </a:gridCol>
+                <a:gridCol w="3776472">
+                  <a:extLst>
+                    <a:ext uri="{9D8B030D-6E8A-4147-A177-3AD203B41FA5}">
+                      <a16:colId xmlns:a16="http://schemas.microsoft.com/office/drawing/2014/main" val="20003"/>
+                    </a:ext>
+                  </a:extLst>
+                </a:gridCol>
               </a:tblGrid>
               <a:tr h="393192">
                 <a:tc>
@@ -6981,7 +6852,7 @@
                     <a:bodyPr/>
                     <a:lstStyle/>
                     <a:p>
-                      <a:pPr algn="ctr" indent="0" marL="0">
+                      <a:pPr marL="0" indent="0" algn="ctr">
                         <a:buNone/>
                       </a:pPr>
                       <a:r>
@@ -7049,7 +6920,7 @@
                     <a:bodyPr/>
                     <a:lstStyle/>
                     <a:p>
-                      <a:pPr algn="ctr" indent="0" marL="0">
+                      <a:pPr marL="0" indent="0" algn="ctr">
                         <a:buNone/>
                       </a:pPr>
                       <a:r>
@@ -7117,7 +6988,7 @@
                     <a:bodyPr/>
                     <a:lstStyle/>
                     <a:p>
-                      <a:pPr algn="ctr" indent="0" marL="0">
+                      <a:pPr marL="0" indent="0" algn="ctr">
                         <a:buNone/>
                       </a:pPr>
                       <a:r>
@@ -7185,7 +7056,7 @@
                     <a:bodyPr/>
                     <a:lstStyle/>
                     <a:p>
-                      <a:pPr algn="ctr" indent="0" marL="0">
+                      <a:pPr marL="0" indent="0" algn="ctr">
                         <a:buNone/>
                       </a:pPr>
                       <a:r>
@@ -7248,6 +7119,11 @@
                     </a:solidFill>
                   </a:tcPr>
                 </a:tc>
+                <a:extLst>
+                  <a:ext uri="{0D108BD9-81ED-4DB2-BD59-A6C34878D82A}">
+                    <a16:rowId xmlns:a16="http://schemas.microsoft.com/office/drawing/2014/main" val="10000"/>
+                  </a:ext>
+                </a:extLst>
               </a:tr>
               <a:tr h="393192">
                 <a:tc>
@@ -7255,7 +7131,7 @@
                     <a:bodyPr/>
                     <a:lstStyle/>
                     <a:p>
-                      <a:pPr algn="l" indent="0" marL="0">
+                      <a:pPr marL="0" indent="0" algn="l">
                         <a:buNone/>
                       </a:pPr>
                       <a:r>
@@ -7323,7 +7199,7 @@
                     <a:bodyPr/>
                     <a:lstStyle/>
                     <a:p>
-                      <a:pPr algn="l" indent="0" marL="0">
+                      <a:pPr marL="0" indent="0" algn="l">
                         <a:buNone/>
                       </a:pPr>
                       <a:r>
@@ -7391,7 +7267,7 @@
                     <a:bodyPr/>
                     <a:lstStyle/>
                     <a:p>
-                      <a:pPr algn="l" indent="0" marL="0">
+                      <a:pPr marL="0" indent="0" algn="l">
                         <a:buNone/>
                       </a:pPr>
                       <a:r>
@@ -7403,7 +7279,7 @@
                           <a:ea typeface="Paperlogy 7 Bold" pitchFamily="34" charset="-122"/>
                           <a:cs typeface="Paperlogy 7 Bold" pitchFamily="34" charset="-120"/>
                         </a:rPr>
-                        <a:t>23개소 (한강 16개소 포함)</a:t>
+                        <a:t>좌표 1개로 수집–처리–교면 변위 시계열까지 자동</a:t>
                       </a:r>
                       <a:endParaRPr lang="en-US" sz="1100" dirty="0">
                         <a:latin typeface="Paperlogy 7 Bold" charset="0"/>
@@ -7459,7 +7335,7 @@
                     <a:bodyPr/>
                     <a:lstStyle/>
                     <a:p>
-                      <a:pPr algn="l" indent="0" marL="0">
+                      <a:pPr marL="0" indent="0" algn="l">
                         <a:buNone/>
                       </a:pPr>
                       <a:r>
@@ -7522,6 +7398,11 @@
                     </a:solidFill>
                   </a:tcPr>
                 </a:tc>
+                <a:extLst>
+                  <a:ext uri="{0D108BD9-81ED-4DB2-BD59-A6C34878D82A}">
+                    <a16:rowId xmlns:a16="http://schemas.microsoft.com/office/drawing/2014/main" val="10001"/>
+                  </a:ext>
+                </a:extLst>
               </a:tr>
               <a:tr h="393192">
                 <a:tc>
@@ -7529,281 +7410,7 @@
                     <a:bodyPr/>
                     <a:lstStyle/>
                     <a:p>
-                      <a:pPr algn="l" indent="0" marL="0">
-                        <a:buNone/>
-                      </a:pPr>
-                      <a:r>
-                        <a:rPr lang="en-US" sz="1100" dirty="0">
-                          <a:solidFill>
-                            <a:srgbClr val="373D47"/>
-                          </a:solidFill>
-                          <a:latin typeface="Paperlogy 7 Bold" pitchFamily="34" charset="0"/>
-                          <a:ea typeface="Paperlogy 7 Bold" pitchFamily="34" charset="-122"/>
-                          <a:cs typeface="Paperlogy 7 Bold" pitchFamily="34" charset="-120"/>
-                        </a:rPr>
-                        <a:t>1  위성 변위</a:t>
-                      </a:r>
-                      <a:endParaRPr lang="en-US" sz="1100" dirty="0">
-                        <a:latin typeface="Paperlogy 7 Bold" charset="0"/>
-                        <a:ea typeface="Paperlogy 7 Bold" charset="0"/>
-                        <a:cs typeface="Paperlogy 7 Bold" charset="0"/>
-                      </a:endParaRPr>
-                    </a:p>
-                  </a:txBody>
-                  <a:tcPr marL="73152" marR="45720" marT="0" marB="0" anchor="ctr">
-                    <a:lnL w="6350" cap="flat" cmpd="sng" algn="ctr">
-                      <a:solidFill>
-                        <a:srgbClr val="E3E6EA"/>
-                      </a:solidFill>
-                      <a:prstDash val="solid"/>
-                      <a:round/>
-                      <a:headEnd type="none" w="med" len="med"/>
-                      <a:tailEnd type="none" w="med" len="med"/>
-                    </a:lnL>
-                    <a:lnR w="6350" cap="flat" cmpd="sng" algn="ctr">
-                      <a:solidFill>
-                        <a:srgbClr val="E3E6EA"/>
-                      </a:solidFill>
-                      <a:prstDash val="solid"/>
-                      <a:round/>
-                      <a:headEnd type="none" w="med" len="med"/>
-                      <a:tailEnd type="none" w="med" len="med"/>
-                    </a:lnR>
-                    <a:lnT w="6350" cap="flat" cmpd="sng" algn="ctr">
-                      <a:solidFill>
-                        <a:srgbClr val="E3E6EA"/>
-                      </a:solidFill>
-                      <a:prstDash val="solid"/>
-                      <a:round/>
-                      <a:headEnd type="none" w="med" len="med"/>
-                      <a:tailEnd type="none" w="med" len="med"/>
-                    </a:lnT>
-                    <a:lnB w="6350" cap="flat" cmpd="sng" algn="ctr">
-                      <a:solidFill>
-                        <a:srgbClr val="E3E6EA"/>
-                      </a:solidFill>
-                      <a:prstDash val="solid"/>
-                      <a:round/>
-                      <a:headEnd type="none" w="med" len="med"/>
-                      <a:tailEnd type="none" w="med" len="med"/>
-                    </a:lnB>
-                    <a:solidFill>
-                      <a:srgbClr val="F5F7F9"/>
-                    </a:solidFill>
-                  </a:tcPr>
-                </a:tc>
-                <a:tc>
-                  <a:txBody>
-                    <a:bodyPr/>
-                    <a:lstStyle/>
-                    <a:p>
-                      <a:pPr algn="l" indent="0" marL="0">
-                        <a:buNone/>
-                      </a:pPr>
-                      <a:r>
-                        <a:rPr lang="en-US" sz="1100" dirty="0">
-                          <a:solidFill>
-                            <a:srgbClr val="373D47"/>
-                          </a:solidFill>
-                          <a:latin typeface="Paperlogy 5 Medium" pitchFamily="34" charset="0"/>
-                          <a:ea typeface="Paperlogy 5 Medium" pitchFamily="34" charset="-122"/>
-                          <a:cs typeface="Paperlogy 5 Medium" pitchFamily="34" charset="-120"/>
-                        </a:rPr>
-                        <a:t>현장 보고서 판정 대조</a:t>
-                      </a:r>
-                      <a:endParaRPr lang="en-US" sz="1100" dirty="0">
-                        <a:latin typeface="Paperlogy 5 Medium" charset="0"/>
-                        <a:ea typeface="Paperlogy 5 Medium" charset="0"/>
-                        <a:cs typeface="Paperlogy 5 Medium" charset="0"/>
-                      </a:endParaRPr>
-                    </a:p>
-                  </a:txBody>
-                  <a:tcPr marL="73152" marR="45720" marT="0" marB="0" anchor="ctr">
-                    <a:lnL w="6350" cap="flat" cmpd="sng" algn="ctr">
-                      <a:solidFill>
-                        <a:srgbClr val="E3E6EA"/>
-                      </a:solidFill>
-                      <a:prstDash val="solid"/>
-                      <a:round/>
-                      <a:headEnd type="none" w="med" len="med"/>
-                      <a:tailEnd type="none" w="med" len="med"/>
-                    </a:lnL>
-                    <a:lnR w="6350" cap="flat" cmpd="sng" algn="ctr">
-                      <a:solidFill>
-                        <a:srgbClr val="E3E6EA"/>
-                      </a:solidFill>
-                      <a:prstDash val="solid"/>
-                      <a:round/>
-                      <a:headEnd type="none" w="med" len="med"/>
-                      <a:tailEnd type="none" w="med" len="med"/>
-                    </a:lnR>
-                    <a:lnT w="6350" cap="flat" cmpd="sng" algn="ctr">
-                      <a:solidFill>
-                        <a:srgbClr val="E3E6EA"/>
-                      </a:solidFill>
-                      <a:prstDash val="solid"/>
-                      <a:round/>
-                      <a:headEnd type="none" w="med" len="med"/>
-                      <a:tailEnd type="none" w="med" len="med"/>
-                    </a:lnT>
-                    <a:lnB w="6350" cap="flat" cmpd="sng" algn="ctr">
-                      <a:solidFill>
-                        <a:srgbClr val="E3E6EA"/>
-                      </a:solidFill>
-                      <a:prstDash val="solid"/>
-                      <a:round/>
-                      <a:headEnd type="none" w="med" len="med"/>
-                      <a:tailEnd type="none" w="med" len="med"/>
-                    </a:lnB>
-                    <a:solidFill>
-                      <a:srgbClr val="F5F7F9"/>
-                    </a:solidFill>
-                  </a:tcPr>
-                </a:tc>
-                <a:tc>
-                  <a:txBody>
-                    <a:bodyPr/>
-                    <a:lstStyle/>
-                    <a:p>
-                      <a:pPr algn="l" indent="0" marL="0">
-                        <a:buNone/>
-                      </a:pPr>
-                      <a:r>
-                        <a:rPr lang="en-US" sz="1100" dirty="0">
-                          <a:solidFill>
-                            <a:srgbClr val="1C5B8A"/>
-                          </a:solidFill>
-                          <a:latin typeface="Paperlogy 7 Bold" pitchFamily="34" charset="0"/>
-                          <a:ea typeface="Paperlogy 7 Bold" pitchFamily="34" charset="-122"/>
-                          <a:cs typeface="Paperlogy 7 Bold" pitchFamily="34" charset="-120"/>
-                        </a:rPr>
-                        <a:t>16개소 중 14개소 일치</a:t>
-                      </a:r>
-                      <a:endParaRPr lang="en-US" sz="1100" dirty="0">
-                        <a:latin typeface="Paperlogy 7 Bold" charset="0"/>
-                        <a:ea typeface="Paperlogy 7 Bold" charset="0"/>
-                        <a:cs typeface="Paperlogy 7 Bold" charset="0"/>
-                      </a:endParaRPr>
-                    </a:p>
-                  </a:txBody>
-                  <a:tcPr marL="73152" marR="45720" marT="0" marB="0" anchor="ctr">
-                    <a:lnL w="6350" cap="flat" cmpd="sng" algn="ctr">
-                      <a:solidFill>
-                        <a:srgbClr val="E3E6EA"/>
-                      </a:solidFill>
-                      <a:prstDash val="solid"/>
-                      <a:round/>
-                      <a:headEnd type="none" w="med" len="med"/>
-                      <a:tailEnd type="none" w="med" len="med"/>
-                    </a:lnL>
-                    <a:lnR w="6350" cap="flat" cmpd="sng" algn="ctr">
-                      <a:solidFill>
-                        <a:srgbClr val="E3E6EA"/>
-                      </a:solidFill>
-                      <a:prstDash val="solid"/>
-                      <a:round/>
-                      <a:headEnd type="none" w="med" len="med"/>
-                      <a:tailEnd type="none" w="med" len="med"/>
-                    </a:lnR>
-                    <a:lnT w="6350" cap="flat" cmpd="sng" algn="ctr">
-                      <a:solidFill>
-                        <a:srgbClr val="E3E6EA"/>
-                      </a:solidFill>
-                      <a:prstDash val="solid"/>
-                      <a:round/>
-                      <a:headEnd type="none" w="med" len="med"/>
-                      <a:tailEnd type="none" w="med" len="med"/>
-                    </a:lnT>
-                    <a:lnB w="6350" cap="flat" cmpd="sng" algn="ctr">
-                      <a:solidFill>
-                        <a:srgbClr val="E3E6EA"/>
-                      </a:solidFill>
-                      <a:prstDash val="solid"/>
-                      <a:round/>
-                      <a:headEnd type="none" w="med" len="med"/>
-                      <a:tailEnd type="none" w="med" len="med"/>
-                    </a:lnB>
-                    <a:solidFill>
-                      <a:srgbClr val="F5F7F9"/>
-                    </a:solidFill>
-                  </a:tcPr>
-                </a:tc>
-                <a:tc>
-                  <a:txBody>
-                    <a:bodyPr/>
-                    <a:lstStyle/>
-                    <a:p>
-                      <a:pPr algn="l" indent="0" marL="0">
-                        <a:buNone/>
-                      </a:pPr>
-                      <a:r>
-                        <a:rPr lang="en-US" sz="1100" dirty="0">
-                          <a:solidFill>
-                            <a:srgbClr val="373D47"/>
-                          </a:solidFill>
-                          <a:latin typeface="Paperlogy 5 Medium" pitchFamily="34" charset="0"/>
-                          <a:ea typeface="Paperlogy 5 Medium" pitchFamily="34" charset="-122"/>
-                          <a:cs typeface="Paperlogy 5 Medium" pitchFamily="34" charset="-120"/>
-                        </a:rPr>
-                        <a:t>계측기 위치 기반 측점 1:1 정확도 검증</a:t>
-                      </a:r>
-                      <a:endParaRPr lang="en-US" sz="1100" dirty="0">
-                        <a:latin typeface="Paperlogy 5 Medium" charset="0"/>
-                        <a:ea typeface="Paperlogy 5 Medium" charset="0"/>
-                        <a:cs typeface="Paperlogy 5 Medium" charset="0"/>
-                      </a:endParaRPr>
-                    </a:p>
-                  </a:txBody>
-                  <a:tcPr marL="73152" marR="45720" marT="0" marB="0" anchor="ctr">
-                    <a:lnL w="6350" cap="flat" cmpd="sng" algn="ctr">
-                      <a:solidFill>
-                        <a:srgbClr val="E3E6EA"/>
-                      </a:solidFill>
-                      <a:prstDash val="solid"/>
-                      <a:round/>
-                      <a:headEnd type="none" w="med" len="med"/>
-                      <a:tailEnd type="none" w="med" len="med"/>
-                    </a:lnL>
-                    <a:lnR w="6350" cap="flat" cmpd="sng" algn="ctr">
-                      <a:solidFill>
-                        <a:srgbClr val="E3E6EA"/>
-                      </a:solidFill>
-                      <a:prstDash val="solid"/>
-                      <a:round/>
-                      <a:headEnd type="none" w="med" len="med"/>
-                      <a:tailEnd type="none" w="med" len="med"/>
-                    </a:lnR>
-                    <a:lnT w="6350" cap="flat" cmpd="sng" algn="ctr">
-                      <a:solidFill>
-                        <a:srgbClr val="E3E6EA"/>
-                      </a:solidFill>
-                      <a:prstDash val="solid"/>
-                      <a:round/>
-                      <a:headEnd type="none" w="med" len="med"/>
-                      <a:tailEnd type="none" w="med" len="med"/>
-                    </a:lnT>
-                    <a:lnB w="6350" cap="flat" cmpd="sng" algn="ctr">
-                      <a:solidFill>
-                        <a:srgbClr val="E3E6EA"/>
-                      </a:solidFill>
-                      <a:prstDash val="solid"/>
-                      <a:round/>
-                      <a:headEnd type="none" w="med" len="med"/>
-                      <a:tailEnd type="none" w="med" len="med"/>
-                    </a:lnB>
-                    <a:solidFill>
-                      <a:srgbClr val="F5F7F9"/>
-                    </a:solidFill>
-                  </a:tcPr>
-                </a:tc>
-              </a:tr>
-              <a:tr h="393192">
-                <a:tc>
-                  <a:txBody>
-                    <a:bodyPr/>
-                    <a:lstStyle/>
-                    <a:p>
-                      <a:pPr algn="l" indent="0" marL="0">
+                      <a:pPr marL="0" indent="0" algn="l">
                         <a:buNone/>
                       </a:pPr>
                       <a:r>
@@ -7871,7 +7478,7 @@
                     <a:bodyPr/>
                     <a:lstStyle/>
                     <a:p>
-                      <a:pPr algn="l" indent="0" marL="0">
+                      <a:pPr marL="0" indent="0" algn="l">
                         <a:buNone/>
                       </a:pPr>
                       <a:r>
@@ -7939,7 +7546,7 @@
                     <a:bodyPr/>
                     <a:lstStyle/>
                     <a:p>
-                      <a:pPr algn="l" indent="0" marL="0">
+                      <a:pPr marL="0" indent="0" algn="l">
                         <a:buNone/>
                       </a:pPr>
                       <a:r>
@@ -7951,7 +7558,7 @@
                           <a:ea typeface="Paperlogy 7 Bold" pitchFamily="34" charset="-122"/>
                           <a:cs typeface="Paperlogy 7 Bold" pitchFamily="34" charset="-120"/>
                         </a:rPr>
-                        <a:t>한강 16개소 산출 (기준 잠정)</a:t>
+                        <a:t>열·하중 성분 분리 · CRI 산출 (기준 잠정)</a:t>
                       </a:r>
                       <a:endParaRPr lang="en-US" sz="1100" dirty="0">
                         <a:latin typeface="Paperlogy 7 Bold" charset="0"/>
@@ -8007,7 +7614,7 @@
                     <a:bodyPr/>
                     <a:lstStyle/>
                     <a:p>
-                      <a:pPr algn="l" indent="0" marL="0">
+                      <a:pPr marL="0" indent="0" algn="l">
                         <a:buNone/>
                       </a:pPr>
                       <a:r>
@@ -8070,6 +7677,11 @@
                     </a:solidFill>
                   </a:tcPr>
                 </a:tc>
+                <a:extLst>
+                  <a:ext uri="{0D108BD9-81ED-4DB2-BD59-A6C34878D82A}">
+                    <a16:rowId xmlns:a16="http://schemas.microsoft.com/office/drawing/2014/main" val="10003"/>
+                  </a:ext>
+                </a:extLst>
               </a:tr>
               <a:tr h="393192">
                 <a:tc>
@@ -8077,7 +7689,7 @@
                     <a:bodyPr/>
                     <a:lstStyle/>
                     <a:p>
-                      <a:pPr algn="l" indent="0" marL="0">
+                      <a:pPr marL="0" indent="0" algn="l">
                         <a:buNone/>
                       </a:pPr>
                       <a:r>
@@ -8145,7 +7757,7 @@
                     <a:bodyPr/>
                     <a:lstStyle/>
                     <a:p>
-                      <a:pPr algn="l" indent="0" marL="0">
+                      <a:pPr marL="0" indent="0" algn="l">
                         <a:buNone/>
                       </a:pPr>
                       <a:r>
@@ -8213,7 +7825,7 @@
                     <a:bodyPr/>
                     <a:lstStyle/>
                     <a:p>
-                      <a:pPr algn="l" indent="0" marL="0">
+                      <a:pPr marL="0" indent="0" algn="l">
                         <a:buNone/>
                       </a:pPr>
                       <a:r>
@@ -8225,7 +7837,7 @@
                           <a:ea typeface="Paperlogy 7 Bold" pitchFamily="34" charset="-122"/>
                           <a:cs typeface="Paperlogy 7 Bold" pitchFamily="34" charset="-120"/>
                         </a:rPr>
-                        <a:t>16/16개소 · 결합률 94%</a:t>
+                        <a:t>IFC 부재 GUID 에 교면 측점 결합</a:t>
                       </a:r>
                       <a:endParaRPr lang="en-US" sz="1100" dirty="0">
                         <a:latin typeface="Paperlogy 7 Bold" charset="0"/>
@@ -8281,7 +7893,7 @@
                     <a:bodyPr/>
                     <a:lstStyle/>
                     <a:p>
-                      <a:pPr algn="l" indent="0" marL="0">
+                      <a:pPr marL="0" indent="0" algn="l">
                         <a:buNone/>
                       </a:pPr>
                       <a:r>
@@ -8344,6 +7956,11 @@
                     </a:solidFill>
                   </a:tcPr>
                 </a:tc>
+                <a:extLst>
+                  <a:ext uri="{0D108BD9-81ED-4DB2-BD59-A6C34878D82A}">
+                    <a16:rowId xmlns:a16="http://schemas.microsoft.com/office/drawing/2014/main" val="10004"/>
+                  </a:ext>
+                </a:extLst>
               </a:tr>
               <a:tr h="393192">
                 <a:tc>
@@ -8351,7 +7968,7 @@
                     <a:bodyPr/>
                     <a:lstStyle/>
                     <a:p>
-                      <a:pPr algn="l" indent="0" marL="0">
+                      <a:pPr marL="0" indent="0" algn="l">
                         <a:buNone/>
                       </a:pPr>
                       <a:r>
@@ -8419,7 +8036,7 @@
                     <a:bodyPr/>
                     <a:lstStyle/>
                     <a:p>
-                      <a:pPr algn="l" indent="0" marL="0">
+                      <a:pPr marL="0" indent="0" algn="l">
                         <a:buNone/>
                       </a:pPr>
                       <a:r>
@@ -8487,7 +8104,7 @@
                     <a:bodyPr/>
                     <a:lstStyle/>
                     <a:p>
-                      <a:pPr algn="l" indent="0" marL="0">
+                      <a:pPr marL="0" indent="0" algn="l">
                         <a:buNone/>
                       </a:pPr>
                       <a:r>
@@ -8555,7 +8172,7 @@
                     <a:bodyPr/>
                     <a:lstStyle/>
                     <a:p>
-                      <a:pPr algn="l" indent="0" marL="0">
+                      <a:pPr marL="0" indent="0" algn="l">
                         <a:buNone/>
                       </a:pPr>
                       <a:r>
@@ -8618,6 +8235,11 @@
                     </a:solidFill>
                   </a:tcPr>
                 </a:tc>
+                <a:extLst>
+                  <a:ext uri="{0D108BD9-81ED-4DB2-BD59-A6C34878D82A}">
+                    <a16:rowId xmlns:a16="http://schemas.microsoft.com/office/drawing/2014/main" val="10005"/>
+                  </a:ext>
+                </a:extLst>
               </a:tr>
             </a:tbl>
           </a:graphicData>
@@ -8644,7 +8266,7 @@
           <a:bodyPr wrap="square" lIns="0" tIns="0" rIns="0" bIns="0" rtlCol="0" anchor="ctr"/>
           <a:lstStyle/>
           <a:p>
-            <a:pPr indent="0" marL="0">
+            <a:pPr marL="0" indent="0">
               <a:buNone/>
             </a:pPr>
             <a:r>
@@ -8656,7 +8278,7 @@
                 <a:ea typeface="Paperlogy 5 Medium" pitchFamily="34" charset="-122"/>
                 <a:cs typeface="Paperlogy 5 Medium" pitchFamily="34" charset="-120"/>
               </a:rPr>
-              <a:t>※ 현재 달성 = 실제 Sentinel-1 자료(ASC path127, 2018-06-19 ~ 2025-12-27) 처리 결과 기준. 판정 대조는 2024 한강교량 온라인 안전감시시스템 유지관리 최종보고.</a:t>
+              <a:t>※ 현재 달성 = 실제 Sentinel-1 자료(ASC path127, 2018-06-19 ~ 2025-12-27) 처리 결과 기준.</a:t>
             </a:r>
             <a:endParaRPr lang="en-US" sz="850" dirty="0"/>
           </a:p>
@@ -8678,6 +8300,7 @@
         <a:solidFill>
           <a:srgbClr val="FFFFFF"/>
         </a:solidFill>
+        <a:effectLst/>
       </p:bgPr>
     </p:bg>
     <p:spTree>
@@ -8765,7 +8388,7 @@
           <a:bodyPr wrap="square" lIns="0" tIns="0" rIns="0" bIns="0" rtlCol="0" anchor="ctr"/>
           <a:lstStyle/>
           <a:p>
-            <a:pPr algn="ctr" indent="0" marL="0">
+            <a:pPr marL="0" indent="0" algn="ctr">
               <a:buNone/>
             </a:pPr>
             <a:r>
@@ -8829,7 +8452,7 @@
           <a:bodyPr wrap="square" lIns="0" tIns="0" rIns="0" bIns="0" rtlCol="0" anchor="ctr"/>
           <a:lstStyle/>
           <a:p>
-            <a:pPr indent="0" marL="0">
+            <a:pPr marL="0" indent="0">
               <a:buNone/>
             </a:pPr>
             <a:r>
@@ -8895,7 +8518,7 @@
           <a:bodyPr wrap="square" lIns="0" tIns="0" rIns="0" bIns="0" rtlCol="0" anchor="ctr"/>
           <a:lstStyle/>
           <a:p>
-            <a:pPr algn="ctr" indent="0" marL="0">
+            <a:pPr marL="0" indent="0" algn="ctr">
               <a:buNone/>
             </a:pPr>
             <a:r>
@@ -8961,7 +8584,7 @@
           <a:bodyPr wrap="square" lIns="0" tIns="0" rIns="0" bIns="0" rtlCol="0" anchor="ctr"/>
           <a:lstStyle/>
           <a:p>
-            <a:pPr algn="ctr" indent="0" marL="0">
+            <a:pPr marL="0" indent="0" algn="ctr">
               <a:buNone/>
             </a:pPr>
             <a:r>
@@ -9027,7 +8650,7 @@
           <a:bodyPr wrap="square" lIns="0" tIns="0" rIns="0" bIns="0" rtlCol="0" anchor="ctr"/>
           <a:lstStyle/>
           <a:p>
-            <a:pPr algn="ctr" indent="0" marL="0">
+            <a:pPr marL="0" indent="0" algn="ctr">
               <a:buNone/>
             </a:pPr>
             <a:r>
@@ -9093,7 +8716,7 @@
           <a:bodyPr wrap="square" lIns="0" tIns="0" rIns="0" bIns="0" rtlCol="0" anchor="ctr"/>
           <a:lstStyle/>
           <a:p>
-            <a:pPr algn="ctr" indent="0" marL="0">
+            <a:pPr marL="0" indent="0" algn="ctr">
               <a:buNone/>
             </a:pPr>
             <a:r>
@@ -9157,7 +8780,7 @@
           <a:bodyPr wrap="square" lIns="0" tIns="0" rIns="0" bIns="0" rtlCol="0" anchor="ctr"/>
           <a:lstStyle/>
           <a:p>
-            <a:pPr indent="0" marL="0">
+            <a:pPr marL="0" indent="0">
               <a:buNone/>
             </a:pPr>
             <a:r>
@@ -9221,7 +8844,7 @@
           <a:bodyPr wrap="square" lIns="0" tIns="0" rIns="0" bIns="0" rtlCol="0" anchor="ctr"/>
           <a:lstStyle/>
           <a:p>
-            <a:pPr indent="0" marL="0">
+            <a:pPr marL="0" indent="0">
               <a:buNone/>
             </a:pPr>
             <a:r>
@@ -9285,7 +8908,7 @@
           <a:bodyPr wrap="square" lIns="0" tIns="0" rIns="0" bIns="0" rtlCol="0" anchor="ctr"/>
           <a:lstStyle/>
           <a:p>
-            <a:pPr algn="r" indent="0" marL="0">
+            <a:pPr marL="0" indent="0" algn="r">
               <a:buNone/>
             </a:pPr>
             <a:r>
@@ -9403,7 +9026,7 @@
           <a:bodyPr wrap="square" lIns="0" tIns="0" rIns="0" bIns="0" rtlCol="0" anchor="ctr"/>
           <a:lstStyle/>
           <a:p>
-            <a:pPr algn="ctr" indent="0" marL="0">
+            <a:pPr marL="0" indent="0" algn="ctr">
               <a:buNone/>
             </a:pPr>
             <a:r>
@@ -9640,7 +9263,7 @@
           <a:bodyPr wrap="square" lIns="0" tIns="0" rIns="0" bIns="0" rtlCol="0" anchor="ctr"/>
           <a:lstStyle/>
           <a:p>
-            <a:pPr algn="ctr" indent="0" marL="0">
+            <a:pPr marL="0" indent="0" algn="ctr">
               <a:buNone/>
             </a:pPr>
             <a:r>
@@ -9877,7 +9500,7 @@
           <a:bodyPr wrap="square" lIns="0" tIns="0" rIns="0" bIns="0" rtlCol="0" anchor="ctr"/>
           <a:lstStyle/>
           <a:p>
-            <a:pPr algn="ctr" indent="0" marL="0">
+            <a:pPr marL="0" indent="0" algn="ctr">
               <a:buNone/>
             </a:pPr>
             <a:r>
@@ -10114,7 +9737,7 @@
           <a:bodyPr wrap="square" lIns="0" tIns="0" rIns="0" bIns="0" rtlCol="0" anchor="ctr"/>
           <a:lstStyle/>
           <a:p>
-            <a:pPr algn="ctr" indent="0" marL="0">
+            <a:pPr marL="0" indent="0" algn="ctr">
               <a:buNone/>
             </a:pPr>
             <a:r>
@@ -10351,7 +9974,7 @@
           <a:bodyPr wrap="square" lIns="0" tIns="0" rIns="0" bIns="0" rtlCol="0" anchor="ctr"/>
           <a:lstStyle/>
           <a:p>
-            <a:pPr algn="ctr" indent="0" marL="0">
+            <a:pPr marL="0" indent="0" algn="ctr">
               <a:buNone/>
             </a:pPr>
             <a:r>
@@ -10588,7 +10211,7 @@
           <a:bodyPr wrap="square" lIns="0" tIns="0" rIns="0" bIns="0" rtlCol="0" anchor="ctr"/>
           <a:lstStyle/>
           <a:p>
-            <a:pPr algn="ctr" indent="0" marL="0">
+            <a:pPr marL="0" indent="0" algn="ctr">
               <a:buNone/>
             </a:pPr>
             <a:r>
@@ -10775,7 +10398,7 @@
           <a:bodyPr wrap="square" lIns="0" tIns="0" rIns="0" bIns="0" rtlCol="0" anchor="ctr"/>
           <a:lstStyle/>
           <a:p>
-            <a:pPr algn="ctr" indent="0" marL="0">
+            <a:pPr marL="0" indent="0" algn="ctr">
               <a:buNone/>
             </a:pPr>
             <a:r>
@@ -10841,7 +10464,7 @@
           <a:bodyPr wrap="square" lIns="0" tIns="0" rIns="0" bIns="0" rtlCol="0" anchor="ctr"/>
           <a:lstStyle/>
           <a:p>
-            <a:pPr indent="0" marL="0">
+            <a:pPr marL="0" indent="0">
               <a:lnSpc>
                 <a:spcPct val="115000"/>
               </a:lnSpc>
@@ -10861,7 +10484,7 @@
             <a:endParaRPr lang="en-US" sz="1100" dirty="0"/>
           </a:p>
           <a:p>
-            <a:pPr indent="0" marL="0">
+            <a:pPr marL="0" indent="0">
               <a:lnSpc>
                 <a:spcPct val="115000"/>
               </a:lnSpc>
@@ -10930,7 +10553,7 @@
           <a:bodyPr wrap="square" lIns="0" tIns="0" rIns="0" bIns="0" rtlCol="0" anchor="ctr"/>
           <a:lstStyle/>
           <a:p>
-            <a:pPr indent="0" marL="0">
+            <a:pPr marL="0" indent="0">
               <a:lnSpc>
                 <a:spcPct val="115000"/>
               </a:lnSpc>
@@ -10950,7 +10573,7 @@
             <a:endParaRPr lang="en-US" sz="1100" dirty="0"/>
           </a:p>
           <a:p>
-            <a:pPr indent="0" marL="0">
+            <a:pPr marL="0" indent="0">
               <a:lnSpc>
                 <a:spcPct val="115000"/>
               </a:lnSpc>
@@ -11019,7 +10642,7 @@
           <a:bodyPr wrap="square" lIns="0" tIns="0" rIns="0" bIns="0" rtlCol="0" anchor="ctr"/>
           <a:lstStyle/>
           <a:p>
-            <a:pPr indent="0" marL="0">
+            <a:pPr marL="0" indent="0">
               <a:lnSpc>
                 <a:spcPct val="115000"/>
               </a:lnSpc>
@@ -11039,7 +10662,7 @@
             <a:endParaRPr lang="en-US" sz="1100" dirty="0"/>
           </a:p>
           <a:p>
-            <a:pPr indent="0" marL="0">
+            <a:pPr marL="0" indent="0">
               <a:lnSpc>
                 <a:spcPct val="115000"/>
               </a:lnSpc>
@@ -11108,7 +10731,7 @@
           <a:bodyPr wrap="square" lIns="0" tIns="0" rIns="0" bIns="0" rtlCol="0" anchor="ctr"/>
           <a:lstStyle/>
           <a:p>
-            <a:pPr indent="0" marL="0">
+            <a:pPr marL="0" indent="0">
               <a:lnSpc>
                 <a:spcPct val="115000"/>
               </a:lnSpc>
@@ -11128,7 +10751,7 @@
             <a:endParaRPr lang="en-US" sz="1100" dirty="0"/>
           </a:p>
           <a:p>
-            <a:pPr indent="0" marL="0">
+            <a:pPr marL="0" indent="0">
               <a:lnSpc>
                 <a:spcPct val="115000"/>
               </a:lnSpc>
@@ -11197,7 +10820,7 @@
           <a:bodyPr wrap="square" lIns="0" tIns="0" rIns="0" bIns="0" rtlCol="0" anchor="ctr"/>
           <a:lstStyle/>
           <a:p>
-            <a:pPr indent="0" marL="0">
+            <a:pPr marL="0" indent="0">
               <a:buNone/>
             </a:pPr>
             <a:r>
@@ -11211,9 +10834,6 @@
               </a:rPr>
               <a:t>51</a:t>
             </a:r>
-            <a:pPr indent="0" marL="0">
-              <a:buNone/>
-            </a:pPr>
             <a:r>
               <a:rPr lang="en-US" sz="1200" dirty="0">
                 <a:solidFill>
@@ -11250,7 +10870,7 @@
           <a:bodyPr wrap="square" lIns="0" tIns="0" rIns="0" bIns="0" rtlCol="0" anchor="t"/>
           <a:lstStyle/>
           <a:p>
-            <a:pPr indent="0" marL="0">
+            <a:pPr marL="0" indent="0">
               <a:lnSpc>
                 <a:spcPct val="110000"/>
               </a:lnSpc>
@@ -11319,7 +10939,7 @@
           <a:bodyPr wrap="square" lIns="0" tIns="0" rIns="0" bIns="0" rtlCol="0" anchor="ctr"/>
           <a:lstStyle/>
           <a:p>
-            <a:pPr indent="0" marL="0">
+            <a:pPr marL="0" indent="0">
               <a:buNone/>
             </a:pPr>
             <a:r>
@@ -11333,9 +10953,6 @@
               </a:rPr>
               <a:t>23</a:t>
             </a:r>
-            <a:pPr indent="0" marL="0">
-              <a:buNone/>
-            </a:pPr>
             <a:r>
               <a:rPr lang="en-US" sz="1200" dirty="0">
                 <a:solidFill>
@@ -11372,7 +10989,7 @@
           <a:bodyPr wrap="square" lIns="0" tIns="0" rIns="0" bIns="0" rtlCol="0" anchor="t"/>
           <a:lstStyle/>
           <a:p>
-            <a:pPr indent="0" marL="0">
+            <a:pPr marL="0" indent="0">
               <a:lnSpc>
                 <a:spcPct val="110000"/>
               </a:lnSpc>
@@ -11441,7 +11058,7 @@
           <a:bodyPr wrap="square" lIns="0" tIns="0" rIns="0" bIns="0" rtlCol="0" anchor="ctr"/>
           <a:lstStyle/>
           <a:p>
-            <a:pPr indent="0" marL="0">
+            <a:pPr marL="0" indent="0">
               <a:buNone/>
             </a:pPr>
             <a:r>
@@ -11455,9 +11072,6 @@
               </a:rPr>
               <a:t>16/16</a:t>
             </a:r>
-            <a:pPr indent="0" marL="0">
-              <a:buNone/>
-            </a:pPr>
             <a:r>
               <a:rPr lang="en-US" sz="1200" dirty="0">
                 <a:solidFill>
@@ -11494,7 +11108,7 @@
           <a:bodyPr wrap="square" lIns="0" tIns="0" rIns="0" bIns="0" rtlCol="0" anchor="t"/>
           <a:lstStyle/>
           <a:p>
-            <a:pPr indent="0" marL="0">
+            <a:pPr marL="0" indent="0">
               <a:lnSpc>
                 <a:spcPct val="110000"/>
               </a:lnSpc>
@@ -11563,7 +11177,7 @@
           <a:bodyPr wrap="square" lIns="0" tIns="0" rIns="0" bIns="0" rtlCol="0" anchor="ctr"/>
           <a:lstStyle/>
           <a:p>
-            <a:pPr indent="0" marL="0">
+            <a:pPr marL="0" indent="0">
               <a:buNone/>
             </a:pPr>
             <a:r>
@@ -11577,9 +11191,6 @@
               </a:rPr>
               <a:t>12</a:t>
             </a:r>
-            <a:pPr indent="0" marL="0">
-              <a:buNone/>
-            </a:pPr>
             <a:r>
               <a:rPr lang="en-US" sz="1200" dirty="0">
                 <a:solidFill>
@@ -11616,7 +11227,7 @@
           <a:bodyPr wrap="square" lIns="0" tIns="0" rIns="0" bIns="0" rtlCol="0" anchor="t"/>
           <a:lstStyle/>
           <a:p>
-            <a:pPr indent="0" marL="0">
+            <a:pPr marL="0" indent="0">
               <a:lnSpc>
                 <a:spcPct val="110000"/>
               </a:lnSpc>
@@ -11658,7 +11269,7 @@
           <a:bodyPr wrap="square" lIns="0" tIns="0" rIns="0" bIns="0" rtlCol="0" anchor="ctr"/>
           <a:lstStyle/>
           <a:p>
-            <a:pPr indent="0" marL="0">
+            <a:pPr marL="0" indent="0">
               <a:buNone/>
             </a:pPr>
             <a:r>
@@ -11692,6 +11303,7 @@
         <a:solidFill>
           <a:srgbClr val="FFFFFF"/>
         </a:solidFill>
+        <a:effectLst/>
       </p:bgPr>
     </p:bg>
     <p:spTree>
@@ -11732,6 +11344,10 @@
             <a:prstDash val="solid"/>
           </a:ln>
         </p:spPr>
+        <p:txBody>
+          <a:bodyPr/>
+          <a:p/>
+        </p:txBody>
       </p:sp>
       <p:sp>
         <p:nvSpPr>
@@ -11757,6 +11373,10 @@
             <a:prstDash val="solid"/>
           </a:ln>
         </p:spPr>
+        <p:txBody>
+          <a:bodyPr/>
+          <a:p/>
+        </p:txBody>
       </p:sp>
       <p:sp>
         <p:nvSpPr>
@@ -11779,7 +11399,7 @@
           <a:bodyPr wrap="square" lIns="0" tIns="0" rIns="0" bIns="0" rtlCol="0" anchor="ctr"/>
           <a:lstStyle/>
           <a:p>
-            <a:pPr algn="ctr" indent="0" marL="0">
+            <a:pPr marL="0" indent="0" algn="ctr">
               <a:buNone/>
             </a:pPr>
             <a:r>
@@ -11821,6 +11441,10 @@
             <a:prstDash val="solid"/>
           </a:ln>
         </p:spPr>
+        <p:txBody>
+          <a:bodyPr/>
+          <a:p/>
+        </p:txBody>
       </p:sp>
       <p:sp>
         <p:nvSpPr>
@@ -11843,7 +11467,7 @@
           <a:bodyPr wrap="square" lIns="0" tIns="0" rIns="0" bIns="0" rtlCol="0" anchor="ctr"/>
           <a:lstStyle/>
           <a:p>
-            <a:pPr indent="0" marL="0">
+            <a:pPr marL="0" indent="0">
               <a:buNone/>
             </a:pPr>
             <a:r>
@@ -11887,6 +11511,10 @@
             <a:prstDash val="solid"/>
           </a:ln>
         </p:spPr>
+        <p:txBody>
+          <a:bodyPr/>
+          <a:p/>
+        </p:txBody>
       </p:sp>
       <p:sp>
         <p:nvSpPr>
@@ -11909,7 +11537,7 @@
           <a:bodyPr wrap="square" lIns="0" tIns="0" rIns="0" bIns="0" rtlCol="0" anchor="ctr"/>
           <a:lstStyle/>
           <a:p>
-            <a:pPr algn="ctr" indent="0" marL="0">
+            <a:pPr marL="0" indent="0" algn="ctr">
               <a:buNone/>
             </a:pPr>
             <a:r>
@@ -11953,6 +11581,10 @@
             <a:prstDash val="solid"/>
           </a:ln>
         </p:spPr>
+        <p:txBody>
+          <a:bodyPr/>
+          <a:p/>
+        </p:txBody>
       </p:sp>
       <p:sp>
         <p:nvSpPr>
@@ -11975,7 +11607,7 @@
           <a:bodyPr wrap="square" lIns="0" tIns="0" rIns="0" bIns="0" rtlCol="0" anchor="ctr"/>
           <a:lstStyle/>
           <a:p>
-            <a:pPr algn="ctr" indent="0" marL="0">
+            <a:pPr marL="0" indent="0" algn="ctr">
               <a:buNone/>
             </a:pPr>
             <a:r>
@@ -12019,6 +11651,10 @@
             <a:prstDash val="solid"/>
           </a:ln>
         </p:spPr>
+        <p:txBody>
+          <a:bodyPr/>
+          <a:p/>
+        </p:txBody>
       </p:sp>
       <p:sp>
         <p:nvSpPr>
@@ -12041,7 +11677,7 @@
           <a:bodyPr wrap="square" lIns="0" tIns="0" rIns="0" bIns="0" rtlCol="0" anchor="ctr"/>
           <a:lstStyle/>
           <a:p>
-            <a:pPr algn="ctr" indent="0" marL="0">
+            <a:pPr marL="0" indent="0" algn="ctr">
               <a:buNone/>
             </a:pPr>
             <a:r>
@@ -12085,6 +11721,10 @@
             <a:prstDash val="solid"/>
           </a:ln>
         </p:spPr>
+        <p:txBody>
+          <a:bodyPr/>
+          <a:p/>
+        </p:txBody>
       </p:sp>
       <p:sp>
         <p:nvSpPr>
@@ -12107,7 +11747,7 @@
           <a:bodyPr wrap="square" lIns="0" tIns="0" rIns="0" bIns="0" rtlCol="0" anchor="ctr"/>
           <a:lstStyle/>
           <a:p>
-            <a:pPr algn="ctr" indent="0" marL="0">
+            <a:pPr marL="0" indent="0" algn="ctr">
               <a:buNone/>
             </a:pPr>
             <a:r>
@@ -12149,6 +11789,10 @@
             <a:prstDash val="solid"/>
           </a:ln>
         </p:spPr>
+        <p:txBody>
+          <a:bodyPr/>
+          <a:p/>
+        </p:txBody>
       </p:sp>
       <p:sp>
         <p:nvSpPr>
@@ -12171,7 +11815,7 @@
           <a:bodyPr wrap="square" lIns="0" tIns="0" rIns="0" bIns="0" rtlCol="0" anchor="ctr"/>
           <a:lstStyle/>
           <a:p>
-            <a:pPr indent="0" marL="0">
+            <a:pPr marL="0" indent="0">
               <a:buNone/>
             </a:pPr>
             <a:r>
@@ -12183,7 +11827,7 @@
                 <a:ea typeface="Paperlogy 7 Bold" pitchFamily="34" charset="-122"/>
                 <a:cs typeface="Paperlogy 7 Bold" pitchFamily="34" charset="-120"/>
               </a:rPr>
-              <a:t>한강 교량 16개소 전수 처리 — 교량마다 사람 손 없이 같은 산출물과 IFC 트윈이 나온다</a:t>
+              <a:t>교량마다 사람 손 없이 같은 산출물과 IFC 트윈이 나온다 — 좌표 하나로 끝까지</a:t>
             </a:r>
             <a:endParaRPr lang="en-US" sz="1450" dirty="0"/>
           </a:p>
@@ -12213,6 +11857,10 @@
             <a:prstDash val="solid"/>
           </a:ln>
         </p:spPr>
+        <p:txBody>
+          <a:bodyPr/>
+          <a:p/>
+        </p:txBody>
       </p:sp>
       <p:sp>
         <p:nvSpPr>
@@ -12235,7 +11883,7 @@
           <a:bodyPr wrap="square" lIns="0" tIns="0" rIns="0" bIns="0" rtlCol="0" anchor="ctr"/>
           <a:lstStyle/>
           <a:p>
-            <a:pPr indent="0" marL="0">
+            <a:pPr marL="0" indent="0">
               <a:buNone/>
             </a:pPr>
             <a:r>
@@ -12277,6 +11925,10 @@
             <a:prstDash val="solid"/>
           </a:ln>
         </p:spPr>
+        <p:txBody>
+          <a:bodyPr/>
+          <a:p/>
+        </p:txBody>
       </p:sp>
       <p:sp>
         <p:nvSpPr>
@@ -12299,7 +11951,7 @@
           <a:bodyPr wrap="square" lIns="0" tIns="0" rIns="0" bIns="0" rtlCol="0" anchor="ctr"/>
           <a:lstStyle/>
           <a:p>
-            <a:pPr algn="r" indent="0" marL="0">
+            <a:pPr marL="0" indent="0" algn="r">
               <a:buNone/>
             </a:pPr>
             <a:r>
@@ -12319,7 +11971,7 @@
       </p:sp>
       <p:graphicFrame>
         <p:nvGraphicFramePr>
-          <p:cNvPr id="6" name="Table 0"/>
+          <p:cNvPr id="21" name="Table 0"/>
           <p:cNvGraphicFramePr>
             <a:graphicFrameLocks noGrp="1"/>
           </p:cNvGraphicFramePr>
@@ -12333,19 +11985,48 @@
         </p:nvGraphicFramePr>
         <p:xfrm>
           <a:off x="411480" y="1280160"/>
-          <a:ext cx="5715000" cy="914400"/>
+          <a:ext cx="5715000" cy="2706624"/>
         </p:xfrm>
         <a:graphic>
           <a:graphicData uri="http://schemas.openxmlformats.org/drawingml/2006/table">
             <a:tbl>
               <a:tblPr/>
               <a:tblGrid>
-                <a:gridCol w="1097280"/>
-                <a:gridCol w="914400"/>
-                <a:gridCol w="868680"/>
-                <a:gridCol w="868680"/>
-                <a:gridCol w="1005840"/>
-                <a:gridCol w="960120"/>
+                <a:gridCol w="1318846">
+                  <a:extLst>
+                    <a:ext uri="{9D8B030D-6E8A-4147-A177-3AD203B41FA5}">
+                      <a16:colId xmlns:a16="http://schemas.microsoft.com/office/drawing/2014/main" val="20000"/>
+                    </a:ext>
+                  </a:extLst>
+                </a:gridCol>
+                <a:gridCol w="1099038">
+                  <a:extLst>
+                    <a:ext uri="{9D8B030D-6E8A-4147-A177-3AD203B41FA5}">
+                      <a16:colId xmlns:a16="http://schemas.microsoft.com/office/drawing/2014/main" val="20001"/>
+                    </a:ext>
+                  </a:extLst>
+                </a:gridCol>
+                <a:gridCol w="1044087">
+                  <a:extLst>
+                    <a:ext uri="{9D8B030D-6E8A-4147-A177-3AD203B41FA5}">
+                      <a16:colId xmlns:a16="http://schemas.microsoft.com/office/drawing/2014/main" val="20002"/>
+                    </a:ext>
+                  </a:extLst>
+                </a:gridCol>
+                <a:gridCol w="1044087">
+                  <a:extLst>
+                    <a:ext uri="{9D8B030D-6E8A-4147-A177-3AD203B41FA5}">
+                      <a16:colId xmlns:a16="http://schemas.microsoft.com/office/drawing/2014/main" val="20003"/>
+                    </a:ext>
+                  </a:extLst>
+                </a:gridCol>
+                <a:gridCol w="1208942">
+                  <a:extLst>
+                    <a:ext uri="{9D8B030D-6E8A-4147-A177-3AD203B41FA5}">
+                      <a16:colId xmlns:a16="http://schemas.microsoft.com/office/drawing/2014/main" val="20004"/>
+                    </a:ext>
+                  </a:extLst>
+                </a:gridCol>
               </a:tblGrid>
               <a:tr h="338328">
                 <a:tc>
@@ -12353,7 +12034,7 @@
                     <a:bodyPr/>
                     <a:lstStyle/>
                     <a:p>
-                      <a:pPr algn="ctr" indent="0" marL="0">
+                      <a:pPr marL="0" indent="0" algn="ctr">
                         <a:buNone/>
                       </a:pPr>
                       <a:r>
@@ -12421,7 +12102,7 @@
                     <a:bodyPr/>
                     <a:lstStyle/>
                     <a:p>
-                      <a:pPr algn="ctr" indent="0" marL="0">
+                      <a:pPr marL="0" indent="0" algn="ctr">
                         <a:buNone/>
                       </a:pPr>
                       <a:r>
@@ -12489,7 +12170,7 @@
                     <a:bodyPr/>
                     <a:lstStyle/>
                     <a:p>
-                      <a:pPr algn="ctr" indent="0" marL="0">
+                      <a:pPr marL="0" indent="0" algn="ctr">
                         <a:buNone/>
                       </a:pPr>
                       <a:r>
@@ -12557,7 +12238,7 @@
                     <a:bodyPr/>
                     <a:lstStyle/>
                     <a:p>
-                      <a:pPr algn="ctr" indent="0" marL="0">
+                      <a:pPr marL="0" indent="0" algn="ctr">
                         <a:buNone/>
                       </a:pPr>
                       <a:r>
@@ -12625,7 +12306,7 @@
                     <a:bodyPr/>
                     <a:lstStyle/>
                     <a:p>
-                      <a:pPr algn="ctr" indent="0" marL="0">
+                      <a:pPr marL="0" indent="0" algn="ctr">
                         <a:buNone/>
                       </a:pPr>
                       <a:r>
@@ -12688,74 +12369,11 @@
                     </a:solidFill>
                   </a:tcPr>
                 </a:tc>
-                <a:tc>
-                  <a:txBody>
-                    <a:bodyPr/>
-                    <a:lstStyle/>
-                    <a:p>
-                      <a:pPr algn="ctr" indent="0" marL="0">
-                        <a:buNone/>
-                      </a:pPr>
-                      <a:r>
-                        <a:rPr lang="en-US" sz="1050" dirty="0">
-                          <a:solidFill>
-                            <a:srgbClr val="FFFFFF"/>
-                          </a:solidFill>
-                          <a:latin typeface="Paperlogy 7 Bold" pitchFamily="34" charset="0"/>
-                          <a:ea typeface="Paperlogy 7 Bold" pitchFamily="34" charset="-122"/>
-                          <a:cs typeface="Paperlogy 7 Bold" pitchFamily="34" charset="-120"/>
-                        </a:rPr>
-                        <a:t>품질 판정</a:t>
-                      </a:r>
-                      <a:endParaRPr lang="en-US" sz="1050" dirty="0">
-                        <a:latin typeface="Paperlogy 7 Bold" charset="0"/>
-                        <a:ea typeface="Paperlogy 7 Bold" charset="0"/>
-                        <a:cs typeface="Paperlogy 7 Bold" charset="0"/>
-                      </a:endParaRPr>
-                    </a:p>
-                  </a:txBody>
-                  <a:tcPr marL="73152" marR="45720" marT="0" marB="0" anchor="ctr">
-                    <a:lnL w="6350" cap="flat" cmpd="sng" algn="ctr">
-                      <a:solidFill>
-                        <a:srgbClr val="E3E6EA"/>
-                      </a:solidFill>
-                      <a:prstDash val="solid"/>
-                      <a:round/>
-                      <a:headEnd type="none" w="med" len="med"/>
-                      <a:tailEnd type="none" w="med" len="med"/>
-                    </a:lnL>
-                    <a:lnR w="6350" cap="flat" cmpd="sng" algn="ctr">
-                      <a:solidFill>
-                        <a:srgbClr val="E3E6EA"/>
-                      </a:solidFill>
-                      <a:prstDash val="solid"/>
-                      <a:round/>
-                      <a:headEnd type="none" w="med" len="med"/>
-                      <a:tailEnd type="none" w="med" len="med"/>
-                    </a:lnR>
-                    <a:lnT w="6350" cap="flat" cmpd="sng" algn="ctr">
-                      <a:solidFill>
-                        <a:srgbClr val="E3E6EA"/>
-                      </a:solidFill>
-                      <a:prstDash val="solid"/>
-                      <a:round/>
-                      <a:headEnd type="none" w="med" len="med"/>
-                      <a:tailEnd type="none" w="med" len="med"/>
-                    </a:lnT>
-                    <a:lnB w="6350" cap="flat" cmpd="sng" algn="ctr">
-                      <a:solidFill>
-                        <a:srgbClr val="E3E6EA"/>
-                      </a:solidFill>
-                      <a:prstDash val="solid"/>
-                      <a:round/>
-                      <a:headEnd type="none" w="med" len="med"/>
-                      <a:tailEnd type="none" w="med" len="med"/>
-                    </a:lnB>
-                    <a:solidFill>
-                      <a:srgbClr val="373D47"/>
-                    </a:solidFill>
-                  </a:tcPr>
-                </a:tc>
+                <a:extLst>
+                  <a:ext uri="{0D108BD9-81ED-4DB2-BD59-A6C34878D82A}">
+                    <a16:rowId xmlns:a16="http://schemas.microsoft.com/office/drawing/2014/main" val="10000"/>
+                  </a:ext>
+                </a:extLst>
               </a:tr>
               <a:tr h="338328">
                 <a:tc>
@@ -12763,7 +12381,7 @@
                     <a:bodyPr/>
                     <a:lstStyle/>
                     <a:p>
-                      <a:pPr algn="l" indent="0" marL="0">
+                      <a:pPr marL="0" indent="0" algn="l">
                         <a:buNone/>
                       </a:pPr>
                       <a:r>
@@ -12831,7 +12449,7 @@
                     <a:bodyPr/>
                     <a:lstStyle/>
                     <a:p>
-                      <a:pPr algn="ctr" indent="0" marL="0">
+                      <a:pPr marL="0" indent="0" algn="ctr">
                         <a:buNone/>
                       </a:pPr>
                       <a:r>
@@ -12899,7 +12517,7 @@
                     <a:bodyPr/>
                     <a:lstStyle/>
                     <a:p>
-                      <a:pPr algn="ctr" indent="0" marL="0">
+                      <a:pPr marL="0" indent="0" algn="ctr">
                         <a:buNone/>
                       </a:pPr>
                       <a:r>
@@ -12967,7 +12585,7 @@
                     <a:bodyPr/>
                     <a:lstStyle/>
                     <a:p>
-                      <a:pPr algn="ctr" indent="0" marL="0">
+                      <a:pPr marL="0" indent="0" algn="ctr">
                         <a:buNone/>
                       </a:pPr>
                       <a:r>
@@ -13035,7 +12653,7 @@
                     <a:bodyPr/>
                     <a:lstStyle/>
                     <a:p>
-                      <a:pPr algn="ctr" indent="0" marL="0">
+                      <a:pPr marL="0" indent="0" algn="ctr">
                         <a:buNone/>
                       </a:pPr>
                       <a:r>
@@ -13098,74 +12716,11 @@
                     </a:solidFill>
                   </a:tcPr>
                 </a:tc>
-                <a:tc>
-                  <a:txBody>
-                    <a:bodyPr/>
-                    <a:lstStyle/>
-                    <a:p>
-                      <a:pPr algn="ctr" indent="0" marL="0">
-                        <a:buNone/>
-                      </a:pPr>
-                      <a:r>
-                        <a:rPr lang="en-US" sz="1050" dirty="0">
-                          <a:solidFill>
-                            <a:srgbClr val="1C5B8A"/>
-                          </a:solidFill>
-                          <a:latin typeface="Paperlogy 7 Bold" pitchFamily="34" charset="0"/>
-                          <a:ea typeface="Paperlogy 7 Bold" pitchFamily="34" charset="-122"/>
-                          <a:cs typeface="Paperlogy 7 Bold" pitchFamily="34" charset="-120"/>
-                        </a:rPr>
-                        <a:t>조건부</a:t>
-                      </a:r>
-                      <a:endParaRPr lang="en-US" sz="1050" dirty="0">
-                        <a:latin typeface="Paperlogy 7 Bold" charset="0"/>
-                        <a:ea typeface="Paperlogy 7 Bold" charset="0"/>
-                        <a:cs typeface="Paperlogy 7 Bold" charset="0"/>
-                      </a:endParaRPr>
-                    </a:p>
-                  </a:txBody>
-                  <a:tcPr marL="73152" marR="45720" marT="0" marB="0" anchor="ctr">
-                    <a:lnL w="6350" cap="flat" cmpd="sng" algn="ctr">
-                      <a:solidFill>
-                        <a:srgbClr val="E3E6EA"/>
-                      </a:solidFill>
-                      <a:prstDash val="solid"/>
-                      <a:round/>
-                      <a:headEnd type="none" w="med" len="med"/>
-                      <a:tailEnd type="none" w="med" len="med"/>
-                    </a:lnL>
-                    <a:lnR w="6350" cap="flat" cmpd="sng" algn="ctr">
-                      <a:solidFill>
-                        <a:srgbClr val="E3E6EA"/>
-                      </a:solidFill>
-                      <a:prstDash val="solid"/>
-                      <a:round/>
-                      <a:headEnd type="none" w="med" len="med"/>
-                      <a:tailEnd type="none" w="med" len="med"/>
-                    </a:lnR>
-                    <a:lnT w="6350" cap="flat" cmpd="sng" algn="ctr">
-                      <a:solidFill>
-                        <a:srgbClr val="E3E6EA"/>
-                      </a:solidFill>
-                      <a:prstDash val="solid"/>
-                      <a:round/>
-                      <a:headEnd type="none" w="med" len="med"/>
-                      <a:tailEnd type="none" w="med" len="med"/>
-                    </a:lnT>
-                    <a:lnB w="6350" cap="flat" cmpd="sng" algn="ctr">
-                      <a:solidFill>
-                        <a:srgbClr val="E3E6EA"/>
-                      </a:solidFill>
-                      <a:prstDash val="solid"/>
-                      <a:round/>
-                      <a:headEnd type="none" w="med" len="med"/>
-                      <a:tailEnd type="none" w="med" len="med"/>
-                    </a:lnB>
-                    <a:solidFill>
-                      <a:srgbClr val="FFFFFF"/>
-                    </a:solidFill>
-                  </a:tcPr>
-                </a:tc>
+                <a:extLst>
+                  <a:ext uri="{0D108BD9-81ED-4DB2-BD59-A6C34878D82A}">
+                    <a16:rowId xmlns:a16="http://schemas.microsoft.com/office/drawing/2014/main" val="10001"/>
+                  </a:ext>
+                </a:extLst>
               </a:tr>
               <a:tr h="338328">
                 <a:tc>
@@ -13173,7 +12728,7 @@
                     <a:bodyPr/>
                     <a:lstStyle/>
                     <a:p>
-                      <a:pPr algn="l" indent="0" marL="0">
+                      <a:pPr marL="0" indent="0" algn="l">
                         <a:buNone/>
                       </a:pPr>
                       <a:r>
@@ -13241,7 +12796,7 @@
                     <a:bodyPr/>
                     <a:lstStyle/>
                     <a:p>
-                      <a:pPr algn="ctr" indent="0" marL="0">
+                      <a:pPr marL="0" indent="0" algn="ctr">
                         <a:buNone/>
                       </a:pPr>
                       <a:r>
@@ -13309,7 +12864,7 @@
                     <a:bodyPr/>
                     <a:lstStyle/>
                     <a:p>
-                      <a:pPr algn="ctr" indent="0" marL="0">
+                      <a:pPr marL="0" indent="0" algn="ctr">
                         <a:buNone/>
                       </a:pPr>
                       <a:r>
@@ -13377,7 +12932,7 @@
                     <a:bodyPr/>
                     <a:lstStyle/>
                     <a:p>
-                      <a:pPr algn="ctr" indent="0" marL="0">
+                      <a:pPr marL="0" indent="0" algn="ctr">
                         <a:buNone/>
                       </a:pPr>
                       <a:r>
@@ -13445,7 +13000,7 @@
                     <a:bodyPr/>
                     <a:lstStyle/>
                     <a:p>
-                      <a:pPr algn="ctr" indent="0" marL="0">
+                      <a:pPr marL="0" indent="0" algn="ctr">
                         <a:buNone/>
                       </a:pPr>
                       <a:r>
@@ -13508,74 +13063,11 @@
                     </a:solidFill>
                   </a:tcPr>
                 </a:tc>
-                <a:tc>
-                  <a:txBody>
-                    <a:bodyPr/>
-                    <a:lstStyle/>
-                    <a:p>
-                      <a:pPr algn="ctr" indent="0" marL="0">
-                        <a:buNone/>
-                      </a:pPr>
-                      <a:r>
-                        <a:rPr lang="en-US" sz="1050" dirty="0">
-                          <a:solidFill>
-                            <a:srgbClr val="8A939E"/>
-                          </a:solidFill>
-                          <a:latin typeface="Paperlogy 7 Bold" pitchFamily="34" charset="0"/>
-                          <a:ea typeface="Paperlogy 7 Bold" pitchFamily="34" charset="-122"/>
-                          <a:cs typeface="Paperlogy 7 Bold" pitchFamily="34" charset="-120"/>
-                        </a:rPr>
-                        <a:t>전송 보류</a:t>
-                      </a:r>
-                      <a:endParaRPr lang="en-US" sz="1050" dirty="0">
-                        <a:latin typeface="Paperlogy 7 Bold" charset="0"/>
-                        <a:ea typeface="Paperlogy 7 Bold" charset="0"/>
-                        <a:cs typeface="Paperlogy 7 Bold" charset="0"/>
-                      </a:endParaRPr>
-                    </a:p>
-                  </a:txBody>
-                  <a:tcPr marL="73152" marR="45720" marT="0" marB="0" anchor="ctr">
-                    <a:lnL w="6350" cap="flat" cmpd="sng" algn="ctr">
-                      <a:solidFill>
-                        <a:srgbClr val="E3E6EA"/>
-                      </a:solidFill>
-                      <a:prstDash val="solid"/>
-                      <a:round/>
-                      <a:headEnd type="none" w="med" len="med"/>
-                      <a:tailEnd type="none" w="med" len="med"/>
-                    </a:lnL>
-                    <a:lnR w="6350" cap="flat" cmpd="sng" algn="ctr">
-                      <a:solidFill>
-                        <a:srgbClr val="E3E6EA"/>
-                      </a:solidFill>
-                      <a:prstDash val="solid"/>
-                      <a:round/>
-                      <a:headEnd type="none" w="med" len="med"/>
-                      <a:tailEnd type="none" w="med" len="med"/>
-                    </a:lnR>
-                    <a:lnT w="6350" cap="flat" cmpd="sng" algn="ctr">
-                      <a:solidFill>
-                        <a:srgbClr val="E3E6EA"/>
-                      </a:solidFill>
-                      <a:prstDash val="solid"/>
-                      <a:round/>
-                      <a:headEnd type="none" w="med" len="med"/>
-                      <a:tailEnd type="none" w="med" len="med"/>
-                    </a:lnT>
-                    <a:lnB w="6350" cap="flat" cmpd="sng" algn="ctr">
-                      <a:solidFill>
-                        <a:srgbClr val="E3E6EA"/>
-                      </a:solidFill>
-                      <a:prstDash val="solid"/>
-                      <a:round/>
-                      <a:headEnd type="none" w="med" len="med"/>
-                      <a:tailEnd type="none" w="med" len="med"/>
-                    </a:lnB>
-                    <a:solidFill>
-                      <a:srgbClr val="F5F7F9"/>
-                    </a:solidFill>
-                  </a:tcPr>
-                </a:tc>
+                <a:extLst>
+                  <a:ext uri="{0D108BD9-81ED-4DB2-BD59-A6C34878D82A}">
+                    <a16:rowId xmlns:a16="http://schemas.microsoft.com/office/drawing/2014/main" val="10002"/>
+                  </a:ext>
+                </a:extLst>
               </a:tr>
               <a:tr h="338328">
                 <a:tc>
@@ -13583,7 +13075,7 @@
                     <a:bodyPr/>
                     <a:lstStyle/>
                     <a:p>
-                      <a:pPr algn="l" indent="0" marL="0">
+                      <a:pPr marL="0" indent="0" algn="l">
                         <a:buNone/>
                       </a:pPr>
                       <a:r>
@@ -13651,7 +13143,7 @@
                     <a:bodyPr/>
                     <a:lstStyle/>
                     <a:p>
-                      <a:pPr algn="ctr" indent="0" marL="0">
+                      <a:pPr marL="0" indent="0" algn="ctr">
                         <a:buNone/>
                       </a:pPr>
                       <a:r>
@@ -13719,7 +13211,7 @@
                     <a:bodyPr/>
                     <a:lstStyle/>
                     <a:p>
-                      <a:pPr algn="ctr" indent="0" marL="0">
+                      <a:pPr marL="0" indent="0" algn="ctr">
                         <a:buNone/>
                       </a:pPr>
                       <a:r>
@@ -13787,7 +13279,7 @@
                     <a:bodyPr/>
                     <a:lstStyle/>
                     <a:p>
-                      <a:pPr algn="ctr" indent="0" marL="0">
+                      <a:pPr marL="0" indent="0" algn="ctr">
                         <a:buNone/>
                       </a:pPr>
                       <a:r>
@@ -13855,7 +13347,7 @@
                     <a:bodyPr/>
                     <a:lstStyle/>
                     <a:p>
-                      <a:pPr algn="ctr" indent="0" marL="0">
+                      <a:pPr marL="0" indent="0" algn="ctr">
                         <a:buNone/>
                       </a:pPr>
                       <a:r>
@@ -13918,74 +13410,11 @@
                     </a:solidFill>
                   </a:tcPr>
                 </a:tc>
-                <a:tc>
-                  <a:txBody>
-                    <a:bodyPr/>
-                    <a:lstStyle/>
-                    <a:p>
-                      <a:pPr algn="ctr" indent="0" marL="0">
-                        <a:buNone/>
-                      </a:pPr>
-                      <a:r>
-                        <a:rPr lang="en-US" sz="1050" dirty="0">
-                          <a:solidFill>
-                            <a:srgbClr val="8A939E"/>
-                          </a:solidFill>
-                          <a:latin typeface="Paperlogy 7 Bold" pitchFamily="34" charset="0"/>
-                          <a:ea typeface="Paperlogy 7 Bold" pitchFamily="34" charset="-122"/>
-                          <a:cs typeface="Paperlogy 7 Bold" pitchFamily="34" charset="-120"/>
-                        </a:rPr>
-                        <a:t>전송 보류</a:t>
-                      </a:r>
-                      <a:endParaRPr lang="en-US" sz="1050" dirty="0">
-                        <a:latin typeface="Paperlogy 7 Bold" charset="0"/>
-                        <a:ea typeface="Paperlogy 7 Bold" charset="0"/>
-                        <a:cs typeface="Paperlogy 7 Bold" charset="0"/>
-                      </a:endParaRPr>
-                    </a:p>
-                  </a:txBody>
-                  <a:tcPr marL="73152" marR="45720" marT="0" marB="0" anchor="ctr">
-                    <a:lnL w="6350" cap="flat" cmpd="sng" algn="ctr">
-                      <a:solidFill>
-                        <a:srgbClr val="E3E6EA"/>
-                      </a:solidFill>
-                      <a:prstDash val="solid"/>
-                      <a:round/>
-                      <a:headEnd type="none" w="med" len="med"/>
-                      <a:tailEnd type="none" w="med" len="med"/>
-                    </a:lnL>
-                    <a:lnR w="6350" cap="flat" cmpd="sng" algn="ctr">
-                      <a:solidFill>
-                        <a:srgbClr val="E3E6EA"/>
-                      </a:solidFill>
-                      <a:prstDash val="solid"/>
-                      <a:round/>
-                      <a:headEnd type="none" w="med" len="med"/>
-                      <a:tailEnd type="none" w="med" len="med"/>
-                    </a:lnR>
-                    <a:lnT w="6350" cap="flat" cmpd="sng" algn="ctr">
-                      <a:solidFill>
-                        <a:srgbClr val="E3E6EA"/>
-                      </a:solidFill>
-                      <a:prstDash val="solid"/>
-                      <a:round/>
-                      <a:headEnd type="none" w="med" len="med"/>
-                      <a:tailEnd type="none" w="med" len="med"/>
-                    </a:lnT>
-                    <a:lnB w="6350" cap="flat" cmpd="sng" algn="ctr">
-                      <a:solidFill>
-                        <a:srgbClr val="E3E6EA"/>
-                      </a:solidFill>
-                      <a:prstDash val="solid"/>
-                      <a:round/>
-                      <a:headEnd type="none" w="med" len="med"/>
-                      <a:tailEnd type="none" w="med" len="med"/>
-                    </a:lnB>
-                    <a:solidFill>
-                      <a:srgbClr val="FFFFFF"/>
-                    </a:solidFill>
-                  </a:tcPr>
-                </a:tc>
+                <a:extLst>
+                  <a:ext uri="{0D108BD9-81ED-4DB2-BD59-A6C34878D82A}">
+                    <a16:rowId xmlns:a16="http://schemas.microsoft.com/office/drawing/2014/main" val="10003"/>
+                  </a:ext>
+                </a:extLst>
               </a:tr>
               <a:tr h="338328">
                 <a:tc>
@@ -13993,7 +13422,7 @@
                     <a:bodyPr/>
                     <a:lstStyle/>
                     <a:p>
-                      <a:pPr algn="l" indent="0" marL="0">
+                      <a:pPr marL="0" indent="0" algn="l">
                         <a:buNone/>
                       </a:pPr>
                       <a:r>
@@ -14061,7 +13490,7 @@
                     <a:bodyPr/>
                     <a:lstStyle/>
                     <a:p>
-                      <a:pPr algn="ctr" indent="0" marL="0">
+                      <a:pPr marL="0" indent="0" algn="ctr">
                         <a:buNone/>
                       </a:pPr>
                       <a:r>
@@ -14129,7 +13558,7 @@
                     <a:bodyPr/>
                     <a:lstStyle/>
                     <a:p>
-                      <a:pPr algn="ctr" indent="0" marL="0">
+                      <a:pPr marL="0" indent="0" algn="ctr">
                         <a:buNone/>
                       </a:pPr>
                       <a:r>
@@ -14197,7 +13626,7 @@
                     <a:bodyPr/>
                     <a:lstStyle/>
                     <a:p>
-                      <a:pPr algn="ctr" indent="0" marL="0">
+                      <a:pPr marL="0" indent="0" algn="ctr">
                         <a:buNone/>
                       </a:pPr>
                       <a:r>
@@ -14265,7 +13694,7 @@
                     <a:bodyPr/>
                     <a:lstStyle/>
                     <a:p>
-                      <a:pPr algn="ctr" indent="0" marL="0">
+                      <a:pPr marL="0" indent="0" algn="ctr">
                         <a:buNone/>
                       </a:pPr>
                       <a:r>
@@ -14328,74 +13757,11 @@
                     </a:solidFill>
                   </a:tcPr>
                 </a:tc>
-                <a:tc>
-                  <a:txBody>
-                    <a:bodyPr/>
-                    <a:lstStyle/>
-                    <a:p>
-                      <a:pPr algn="ctr" indent="0" marL="0">
-                        <a:buNone/>
-                      </a:pPr>
-                      <a:r>
-                        <a:rPr lang="en-US" sz="1050" dirty="0">
-                          <a:solidFill>
-                            <a:srgbClr val="8A939E"/>
-                          </a:solidFill>
-                          <a:latin typeface="Paperlogy 7 Bold" pitchFamily="34" charset="0"/>
-                          <a:ea typeface="Paperlogy 7 Bold" pitchFamily="34" charset="-122"/>
-                          <a:cs typeface="Paperlogy 7 Bold" pitchFamily="34" charset="-120"/>
-                        </a:rPr>
-                        <a:t>전송 보류</a:t>
-                      </a:r>
-                      <a:endParaRPr lang="en-US" sz="1050" dirty="0">
-                        <a:latin typeface="Paperlogy 7 Bold" charset="0"/>
-                        <a:ea typeface="Paperlogy 7 Bold" charset="0"/>
-                        <a:cs typeface="Paperlogy 7 Bold" charset="0"/>
-                      </a:endParaRPr>
-                    </a:p>
-                  </a:txBody>
-                  <a:tcPr marL="73152" marR="45720" marT="0" marB="0" anchor="ctr">
-                    <a:lnL w="6350" cap="flat" cmpd="sng" algn="ctr">
-                      <a:solidFill>
-                        <a:srgbClr val="E3E6EA"/>
-                      </a:solidFill>
-                      <a:prstDash val="solid"/>
-                      <a:round/>
-                      <a:headEnd type="none" w="med" len="med"/>
-                      <a:tailEnd type="none" w="med" len="med"/>
-                    </a:lnL>
-                    <a:lnR w="6350" cap="flat" cmpd="sng" algn="ctr">
-                      <a:solidFill>
-                        <a:srgbClr val="E3E6EA"/>
-                      </a:solidFill>
-                      <a:prstDash val="solid"/>
-                      <a:round/>
-                      <a:headEnd type="none" w="med" len="med"/>
-                      <a:tailEnd type="none" w="med" len="med"/>
-                    </a:lnR>
-                    <a:lnT w="6350" cap="flat" cmpd="sng" algn="ctr">
-                      <a:solidFill>
-                        <a:srgbClr val="E3E6EA"/>
-                      </a:solidFill>
-                      <a:prstDash val="solid"/>
-                      <a:round/>
-                      <a:headEnd type="none" w="med" len="med"/>
-                      <a:tailEnd type="none" w="med" len="med"/>
-                    </a:lnT>
-                    <a:lnB w="6350" cap="flat" cmpd="sng" algn="ctr">
-                      <a:solidFill>
-                        <a:srgbClr val="E3E6EA"/>
-                      </a:solidFill>
-                      <a:prstDash val="solid"/>
-                      <a:round/>
-                      <a:headEnd type="none" w="med" len="med"/>
-                      <a:tailEnd type="none" w="med" len="med"/>
-                    </a:lnB>
-                    <a:solidFill>
-                      <a:srgbClr val="F5F7F9"/>
-                    </a:solidFill>
-                  </a:tcPr>
-                </a:tc>
+                <a:extLst>
+                  <a:ext uri="{0D108BD9-81ED-4DB2-BD59-A6C34878D82A}">
+                    <a16:rowId xmlns:a16="http://schemas.microsoft.com/office/drawing/2014/main" val="10004"/>
+                  </a:ext>
+                </a:extLst>
               </a:tr>
               <a:tr h="338328">
                 <a:tc>
@@ -14403,7 +13769,7 @@
                     <a:bodyPr/>
                     <a:lstStyle/>
                     <a:p>
-                      <a:pPr algn="l" indent="0" marL="0">
+                      <a:pPr marL="0" indent="0" algn="l">
                         <a:buNone/>
                       </a:pPr>
                       <a:r>
@@ -14471,7 +13837,7 @@
                     <a:bodyPr/>
                     <a:lstStyle/>
                     <a:p>
-                      <a:pPr algn="ctr" indent="0" marL="0">
+                      <a:pPr marL="0" indent="0" algn="ctr">
                         <a:buNone/>
                       </a:pPr>
                       <a:r>
@@ -14539,7 +13905,7 @@
                     <a:bodyPr/>
                     <a:lstStyle/>
                     <a:p>
-                      <a:pPr algn="ctr" indent="0" marL="0">
+                      <a:pPr marL="0" indent="0" algn="ctr">
                         <a:buNone/>
                       </a:pPr>
                       <a:r>
@@ -14607,7 +13973,7 @@
                     <a:bodyPr/>
                     <a:lstStyle/>
                     <a:p>
-                      <a:pPr algn="ctr" indent="0" marL="0">
+                      <a:pPr marL="0" indent="0" algn="ctr">
                         <a:buNone/>
                       </a:pPr>
                       <a:r>
@@ -14675,7 +14041,7 @@
                     <a:bodyPr/>
                     <a:lstStyle/>
                     <a:p>
-                      <a:pPr algn="ctr" indent="0" marL="0">
+                      <a:pPr marL="0" indent="0" algn="ctr">
                         <a:buNone/>
                       </a:pPr>
                       <a:r>
@@ -14738,74 +14104,11 @@
                     </a:solidFill>
                   </a:tcPr>
                 </a:tc>
-                <a:tc>
-                  <a:txBody>
-                    <a:bodyPr/>
-                    <a:lstStyle/>
-                    <a:p>
-                      <a:pPr algn="ctr" indent="0" marL="0">
-                        <a:buNone/>
-                      </a:pPr>
-                      <a:r>
-                        <a:rPr lang="en-US" sz="1050" dirty="0">
-                          <a:solidFill>
-                            <a:srgbClr val="8A939E"/>
-                          </a:solidFill>
-                          <a:latin typeface="Paperlogy 7 Bold" pitchFamily="34" charset="0"/>
-                          <a:ea typeface="Paperlogy 7 Bold" pitchFamily="34" charset="-122"/>
-                          <a:cs typeface="Paperlogy 7 Bold" pitchFamily="34" charset="-120"/>
-                        </a:rPr>
-                        <a:t>전송 보류</a:t>
-                      </a:r>
-                      <a:endParaRPr lang="en-US" sz="1050" dirty="0">
-                        <a:latin typeface="Paperlogy 7 Bold" charset="0"/>
-                        <a:ea typeface="Paperlogy 7 Bold" charset="0"/>
-                        <a:cs typeface="Paperlogy 7 Bold" charset="0"/>
-                      </a:endParaRPr>
-                    </a:p>
-                  </a:txBody>
-                  <a:tcPr marL="73152" marR="45720" marT="0" marB="0" anchor="ctr">
-                    <a:lnL w="6350" cap="flat" cmpd="sng" algn="ctr">
-                      <a:solidFill>
-                        <a:srgbClr val="E3E6EA"/>
-                      </a:solidFill>
-                      <a:prstDash val="solid"/>
-                      <a:round/>
-                      <a:headEnd type="none" w="med" len="med"/>
-                      <a:tailEnd type="none" w="med" len="med"/>
-                    </a:lnL>
-                    <a:lnR w="6350" cap="flat" cmpd="sng" algn="ctr">
-                      <a:solidFill>
-                        <a:srgbClr val="E3E6EA"/>
-                      </a:solidFill>
-                      <a:prstDash val="solid"/>
-                      <a:round/>
-                      <a:headEnd type="none" w="med" len="med"/>
-                      <a:tailEnd type="none" w="med" len="med"/>
-                    </a:lnR>
-                    <a:lnT w="6350" cap="flat" cmpd="sng" algn="ctr">
-                      <a:solidFill>
-                        <a:srgbClr val="E3E6EA"/>
-                      </a:solidFill>
-                      <a:prstDash val="solid"/>
-                      <a:round/>
-                      <a:headEnd type="none" w="med" len="med"/>
-                      <a:tailEnd type="none" w="med" len="med"/>
-                    </a:lnT>
-                    <a:lnB w="6350" cap="flat" cmpd="sng" algn="ctr">
-                      <a:solidFill>
-                        <a:srgbClr val="E3E6EA"/>
-                      </a:solidFill>
-                      <a:prstDash val="solid"/>
-                      <a:round/>
-                      <a:headEnd type="none" w="med" len="med"/>
-                      <a:tailEnd type="none" w="med" len="med"/>
-                    </a:lnB>
-                    <a:solidFill>
-                      <a:srgbClr val="FFFFFF"/>
-                    </a:solidFill>
-                  </a:tcPr>
-                </a:tc>
+                <a:extLst>
+                  <a:ext uri="{0D108BD9-81ED-4DB2-BD59-A6C34878D82A}">
+                    <a16:rowId xmlns:a16="http://schemas.microsoft.com/office/drawing/2014/main" val="10005"/>
+                  </a:ext>
+                </a:extLst>
               </a:tr>
               <a:tr h="338328">
                 <a:tc>
@@ -14813,7 +14116,7 @@
                     <a:bodyPr/>
                     <a:lstStyle/>
                     <a:p>
-                      <a:pPr algn="l" indent="0" marL="0">
+                      <a:pPr marL="0" indent="0" algn="l">
                         <a:buNone/>
                       </a:pPr>
                       <a:r>
@@ -14881,7 +14184,7 @@
                     <a:bodyPr/>
                     <a:lstStyle/>
                     <a:p>
-                      <a:pPr algn="ctr" indent="0" marL="0">
+                      <a:pPr marL="0" indent="0" algn="ctr">
                         <a:buNone/>
                       </a:pPr>
                       <a:r>
@@ -14949,7 +14252,7 @@
                     <a:bodyPr/>
                     <a:lstStyle/>
                     <a:p>
-                      <a:pPr algn="ctr" indent="0" marL="0">
+                      <a:pPr marL="0" indent="0" algn="ctr">
                         <a:buNone/>
                       </a:pPr>
                       <a:r>
@@ -15017,7 +14320,7 @@
                     <a:bodyPr/>
                     <a:lstStyle/>
                     <a:p>
-                      <a:pPr algn="ctr" indent="0" marL="0">
+                      <a:pPr marL="0" indent="0" algn="ctr">
                         <a:buNone/>
                       </a:pPr>
                       <a:r>
@@ -15085,7 +14388,7 @@
                     <a:bodyPr/>
                     <a:lstStyle/>
                     <a:p>
-                      <a:pPr algn="ctr" indent="0" marL="0">
+                      <a:pPr marL="0" indent="0" algn="ctr">
                         <a:buNone/>
                       </a:pPr>
                       <a:r>
@@ -15148,74 +14451,11 @@
                     </a:solidFill>
                   </a:tcPr>
                 </a:tc>
-                <a:tc>
-                  <a:txBody>
-                    <a:bodyPr/>
-                    <a:lstStyle/>
-                    <a:p>
-                      <a:pPr algn="ctr" indent="0" marL="0">
-                        <a:buNone/>
-                      </a:pPr>
-                      <a:r>
-                        <a:rPr lang="en-US" sz="1050" dirty="0">
-                          <a:solidFill>
-                            <a:srgbClr val="1C5B8A"/>
-                          </a:solidFill>
-                          <a:latin typeface="Paperlogy 7 Bold" pitchFamily="34" charset="0"/>
-                          <a:ea typeface="Paperlogy 7 Bold" pitchFamily="34" charset="-122"/>
-                          <a:cs typeface="Paperlogy 7 Bold" pitchFamily="34" charset="-120"/>
-                        </a:rPr>
-                        <a:t>조건부</a:t>
-                      </a:r>
-                      <a:endParaRPr lang="en-US" sz="1050" dirty="0">
-                        <a:latin typeface="Paperlogy 7 Bold" charset="0"/>
-                        <a:ea typeface="Paperlogy 7 Bold" charset="0"/>
-                        <a:cs typeface="Paperlogy 7 Bold" charset="0"/>
-                      </a:endParaRPr>
-                    </a:p>
-                  </a:txBody>
-                  <a:tcPr marL="73152" marR="45720" marT="0" marB="0" anchor="ctr">
-                    <a:lnL w="6350" cap="flat" cmpd="sng" algn="ctr">
-                      <a:solidFill>
-                        <a:srgbClr val="E3E6EA"/>
-                      </a:solidFill>
-                      <a:prstDash val="solid"/>
-                      <a:round/>
-                      <a:headEnd type="none" w="med" len="med"/>
-                      <a:tailEnd type="none" w="med" len="med"/>
-                    </a:lnL>
-                    <a:lnR w="6350" cap="flat" cmpd="sng" algn="ctr">
-                      <a:solidFill>
-                        <a:srgbClr val="E3E6EA"/>
-                      </a:solidFill>
-                      <a:prstDash val="solid"/>
-                      <a:round/>
-                      <a:headEnd type="none" w="med" len="med"/>
-                      <a:tailEnd type="none" w="med" len="med"/>
-                    </a:lnR>
-                    <a:lnT w="6350" cap="flat" cmpd="sng" algn="ctr">
-                      <a:solidFill>
-                        <a:srgbClr val="E3E6EA"/>
-                      </a:solidFill>
-                      <a:prstDash val="solid"/>
-                      <a:round/>
-                      <a:headEnd type="none" w="med" len="med"/>
-                      <a:tailEnd type="none" w="med" len="med"/>
-                    </a:lnT>
-                    <a:lnB w="6350" cap="flat" cmpd="sng" algn="ctr">
-                      <a:solidFill>
-                        <a:srgbClr val="E3E6EA"/>
-                      </a:solidFill>
-                      <a:prstDash val="solid"/>
-                      <a:round/>
-                      <a:headEnd type="none" w="med" len="med"/>
-                      <a:tailEnd type="none" w="med" len="med"/>
-                    </a:lnB>
-                    <a:solidFill>
-                      <a:srgbClr val="F5F7F9"/>
-                    </a:solidFill>
-                  </a:tcPr>
-                </a:tc>
+                <a:extLst>
+                  <a:ext uri="{0D108BD9-81ED-4DB2-BD59-A6C34878D82A}">
+                    <a16:rowId xmlns:a16="http://schemas.microsoft.com/office/drawing/2014/main" val="10006"/>
+                  </a:ext>
+                </a:extLst>
               </a:tr>
               <a:tr h="338328">
                 <a:tc>
@@ -15223,7 +14463,7 @@
                     <a:bodyPr/>
                     <a:lstStyle/>
                     <a:p>
-                      <a:pPr algn="l" indent="0" marL="0">
+                      <a:pPr marL="0" indent="0" algn="l">
                         <a:buNone/>
                       </a:pPr>
                       <a:r>
@@ -15291,7 +14531,7 @@
                     <a:bodyPr/>
                     <a:lstStyle/>
                     <a:p>
-                      <a:pPr algn="ctr" indent="0" marL="0">
+                      <a:pPr marL="0" indent="0" algn="ctr">
                         <a:buNone/>
                       </a:pPr>
                       <a:r>
@@ -15359,7 +14599,7 @@
                     <a:bodyPr/>
                     <a:lstStyle/>
                     <a:p>
-                      <a:pPr algn="ctr" indent="0" marL="0">
+                      <a:pPr marL="0" indent="0" algn="ctr">
                         <a:buNone/>
                       </a:pPr>
                       <a:r>
@@ -15427,7 +14667,7 @@
                     <a:bodyPr/>
                     <a:lstStyle/>
                     <a:p>
-                      <a:pPr algn="ctr" indent="0" marL="0">
+                      <a:pPr marL="0" indent="0" algn="ctr">
                         <a:buNone/>
                       </a:pPr>
                       <a:r>
@@ -15495,7 +14735,7 @@
                     <a:bodyPr/>
                     <a:lstStyle/>
                     <a:p>
-                      <a:pPr algn="ctr" indent="0" marL="0">
+                      <a:pPr marL="0" indent="0" algn="ctr">
                         <a:buNone/>
                       </a:pPr>
                       <a:r>
@@ -15558,74 +14798,11 @@
                     </a:solidFill>
                   </a:tcPr>
                 </a:tc>
-                <a:tc>
-                  <a:txBody>
-                    <a:bodyPr/>
-                    <a:lstStyle/>
-                    <a:p>
-                      <a:pPr algn="ctr" indent="0" marL="0">
-                        <a:buNone/>
-                      </a:pPr>
-                      <a:r>
-                        <a:rPr lang="en-US" sz="1050" dirty="0">
-                          <a:solidFill>
-                            <a:srgbClr val="8A939E"/>
-                          </a:solidFill>
-                          <a:latin typeface="Paperlogy 7 Bold" pitchFamily="34" charset="0"/>
-                          <a:ea typeface="Paperlogy 7 Bold" pitchFamily="34" charset="-122"/>
-                          <a:cs typeface="Paperlogy 7 Bold" pitchFamily="34" charset="-120"/>
-                        </a:rPr>
-                        <a:t>전송 보류</a:t>
-                      </a:r>
-                      <a:endParaRPr lang="en-US" sz="1050" dirty="0">
-                        <a:latin typeface="Paperlogy 7 Bold" charset="0"/>
-                        <a:ea typeface="Paperlogy 7 Bold" charset="0"/>
-                        <a:cs typeface="Paperlogy 7 Bold" charset="0"/>
-                      </a:endParaRPr>
-                    </a:p>
-                  </a:txBody>
-                  <a:tcPr marL="73152" marR="45720" marT="0" marB="0" anchor="ctr">
-                    <a:lnL w="6350" cap="flat" cmpd="sng" algn="ctr">
-                      <a:solidFill>
-                        <a:srgbClr val="E3E6EA"/>
-                      </a:solidFill>
-                      <a:prstDash val="solid"/>
-                      <a:round/>
-                      <a:headEnd type="none" w="med" len="med"/>
-                      <a:tailEnd type="none" w="med" len="med"/>
-                    </a:lnL>
-                    <a:lnR w="6350" cap="flat" cmpd="sng" algn="ctr">
-                      <a:solidFill>
-                        <a:srgbClr val="E3E6EA"/>
-                      </a:solidFill>
-                      <a:prstDash val="solid"/>
-                      <a:round/>
-                      <a:headEnd type="none" w="med" len="med"/>
-                      <a:tailEnd type="none" w="med" len="med"/>
-                    </a:lnR>
-                    <a:lnT w="6350" cap="flat" cmpd="sng" algn="ctr">
-                      <a:solidFill>
-                        <a:srgbClr val="E3E6EA"/>
-                      </a:solidFill>
-                      <a:prstDash val="solid"/>
-                      <a:round/>
-                      <a:headEnd type="none" w="med" len="med"/>
-                      <a:tailEnd type="none" w="med" len="med"/>
-                    </a:lnT>
-                    <a:lnB w="6350" cap="flat" cmpd="sng" algn="ctr">
-                      <a:solidFill>
-                        <a:srgbClr val="E3E6EA"/>
-                      </a:solidFill>
-                      <a:prstDash val="solid"/>
-                      <a:round/>
-                      <a:headEnd type="none" w="med" len="med"/>
-                      <a:tailEnd type="none" w="med" len="med"/>
-                    </a:lnB>
-                    <a:solidFill>
-                      <a:srgbClr val="FFFFFF"/>
-                    </a:solidFill>
-                  </a:tcPr>
-                </a:tc>
+                <a:extLst>
+                  <a:ext uri="{0D108BD9-81ED-4DB2-BD59-A6C34878D82A}">
+                    <a16:rowId xmlns:a16="http://schemas.microsoft.com/office/drawing/2014/main" val="10007"/>
+                  </a:ext>
+                </a:extLst>
               </a:tr>
             </a:tbl>
           </a:graphicData>
@@ -15652,7 +14829,7 @@
           <a:bodyPr wrap="square" lIns="0" tIns="0" rIns="0" bIns="0" rtlCol="0" anchor="t"/>
           <a:lstStyle/>
           <a:p>
-            <a:pPr indent="0" marL="0">
+            <a:pPr marL="0" indent="0">
               <a:buNone/>
             </a:pPr>
             <a:r>
@@ -15664,7 +14841,7 @@
                 <a:ea typeface="Paperlogy 5 Medium" pitchFamily="34" charset="-122"/>
                 <a:cs typeface="Paperlogy 5 Medium" pitchFamily="34" charset="-120"/>
               </a:rPr>
-              <a:t>현장 GNSS 계측 7개소 · 연 변위속도 = 교면 측점 중앙값(mm/년) · 품질 판정 ≠ 구조 등급</a:t>
+              <a:t>연 변위속도 = 교면 측점 중앙값(mm/년) · 관측 시점 수가 다르면 신뢰구간도 다르다</a:t>
             </a:r>
             <a:endParaRPr lang="en-US" sz="900" dirty="0"/>
           </a:p>
@@ -15696,6 +14873,10 @@
             <a:prstDash val="solid"/>
           </a:ln>
         </p:spPr>
+        <p:txBody>
+          <a:bodyPr/>
+          <a:p/>
+        </p:txBody>
       </p:sp>
       <p:sp>
         <p:nvSpPr>
@@ -15723,6 +14904,10 @@
             <a:prstDash val="solid"/>
           </a:ln>
         </p:spPr>
+        <p:txBody>
+          <a:bodyPr/>
+          <a:p/>
+        </p:txBody>
       </p:sp>
       <p:sp>
         <p:nvSpPr>
@@ -15745,7 +14930,7 @@
           <a:bodyPr wrap="square" lIns="0" tIns="0" rIns="0" bIns="0" rtlCol="0" anchor="ctr"/>
           <a:lstStyle/>
           <a:p>
-            <a:pPr algn="ctr" indent="0" marL="0">
+            <a:pPr marL="0" indent="0" algn="ctr">
               <a:buNone/>
             </a:pPr>
             <a:r>
@@ -15789,6 +14974,10 @@
             <a:prstDash val="solid"/>
           </a:ln>
         </p:spPr>
+        <p:txBody>
+          <a:bodyPr/>
+          <a:p/>
+        </p:txBody>
       </p:sp>
       <p:sp>
         <p:nvSpPr>
@@ -15811,7 +15000,7 @@
           <a:bodyPr wrap="square" lIns="0" tIns="0" rIns="0" bIns="0" rtlCol="0" anchor="ctr"/>
           <a:lstStyle/>
           <a:p>
-            <a:pPr indent="0" marL="0">
+            <a:pPr marL="0" indent="0">
               <a:buNone/>
             </a:pPr>
             <a:r>
@@ -15828,7 +15017,7 @@
             <a:endParaRPr lang="en-US" sz="1100" dirty="0"/>
           </a:p>
           <a:p>
-            <a:pPr indent="0" marL="0">
+            <a:pPr marL="0" indent="0">
               <a:buNone/>
             </a:pPr>
             <a:r>
@@ -15872,6 +15061,10 @@
             <a:prstDash val="solid"/>
           </a:ln>
         </p:spPr>
+        <p:txBody>
+          <a:bodyPr/>
+          <a:p/>
+        </p:txBody>
       </p:sp>
       <p:sp>
         <p:nvSpPr>
@@ -15894,7 +15087,7 @@
           <a:bodyPr wrap="square" lIns="0" tIns="0" rIns="0" bIns="0" rtlCol="0" anchor="ctr"/>
           <a:lstStyle/>
           <a:p>
-            <a:pPr indent="0" marL="0">
+            <a:pPr marL="0" indent="0">
               <a:buNone/>
             </a:pPr>
             <a:r>
@@ -15911,7 +15104,7 @@
             <a:endParaRPr lang="en-US" sz="1100" dirty="0"/>
           </a:p>
           <a:p>
-            <a:pPr indent="0" marL="0">
+            <a:pPr marL="0" indent="0">
               <a:buNone/>
             </a:pPr>
             <a:r>
@@ -15955,6 +15148,10 @@
             <a:prstDash val="solid"/>
           </a:ln>
         </p:spPr>
+        <p:txBody>
+          <a:bodyPr/>
+          <a:p/>
+        </p:txBody>
       </p:sp>
       <p:sp>
         <p:nvSpPr>
@@ -15977,7 +15174,7 @@
           <a:bodyPr wrap="square" lIns="0" tIns="0" rIns="0" bIns="0" rtlCol="0" anchor="ctr"/>
           <a:lstStyle/>
           <a:p>
-            <a:pPr indent="0" marL="0">
+            <a:pPr marL="0" indent="0">
               <a:buNone/>
             </a:pPr>
             <a:r>
@@ -15994,7 +15191,7 @@
             <a:endParaRPr lang="en-US" sz="1100" dirty="0"/>
           </a:p>
           <a:p>
-            <a:pPr indent="0" marL="0">
+            <a:pPr marL="0" indent="0">
               <a:buNone/>
             </a:pPr>
             <a:r>
@@ -16038,6 +15235,10 @@
             <a:prstDash val="solid"/>
           </a:ln>
         </p:spPr>
+        <p:txBody>
+          <a:bodyPr/>
+          <a:p/>
+        </p:txBody>
       </p:sp>
       <p:sp>
         <p:nvSpPr>
@@ -16060,7 +15261,7 @@
           <a:bodyPr wrap="square" lIns="0" tIns="0" rIns="0" bIns="0" rtlCol="0" anchor="ctr"/>
           <a:lstStyle/>
           <a:p>
-            <a:pPr indent="0" marL="0">
+            <a:pPr marL="0" indent="0">
               <a:buNone/>
             </a:pPr>
             <a:r>
@@ -16077,7 +15278,7 @@
             <a:endParaRPr lang="en-US" sz="1100" dirty="0"/>
           </a:p>
           <a:p>
-            <a:pPr indent="0" marL="0">
+            <a:pPr marL="0" indent="0">
               <a:buNone/>
             </a:pPr>
             <a:r>
@@ -16121,6 +15322,10 @@
             <a:prstDash val="solid"/>
           </a:ln>
         </p:spPr>
+        <p:txBody>
+          <a:bodyPr/>
+          <a:p/>
+        </p:txBody>
       </p:sp>
       <p:sp>
         <p:nvSpPr>
@@ -16143,7 +15348,7 @@
           <a:bodyPr wrap="square" lIns="0" tIns="0" rIns="0" bIns="0" rtlCol="0" anchor="ctr"/>
           <a:lstStyle/>
           <a:p>
-            <a:pPr indent="0" marL="0">
+            <a:pPr marL="0" indent="0">
               <a:buNone/>
             </a:pPr>
             <a:r>
@@ -16160,7 +15365,7 @@
             <a:endParaRPr lang="en-US" sz="1100" dirty="0"/>
           </a:p>
           <a:p>
-            <a:pPr indent="0" marL="0">
+            <a:pPr marL="0" indent="0">
               <a:buNone/>
             </a:pPr>
             <a:r>
@@ -16204,6 +15409,10 @@
             <a:prstDash val="solid"/>
           </a:ln>
         </p:spPr>
+        <p:txBody>
+          <a:bodyPr/>
+          <a:p/>
+        </p:txBody>
       </p:sp>
       <p:sp>
         <p:nvSpPr>
@@ -16226,7 +15435,7 @@
           <a:bodyPr wrap="square" lIns="0" tIns="0" rIns="0" bIns="0" rtlCol="0" anchor="ctr"/>
           <a:lstStyle/>
           <a:p>
-            <a:pPr indent="0" marL="0">
+            <a:pPr marL="0" indent="0">
               <a:buNone/>
             </a:pPr>
             <a:r>
@@ -16243,7 +15452,7 @@
             <a:endParaRPr lang="en-US" sz="1100" dirty="0"/>
           </a:p>
           <a:p>
-            <a:pPr indent="0" marL="0">
+            <a:pPr marL="0" indent="0">
               <a:buNone/>
             </a:pPr>
             <a:r>
@@ -16255,7 +15464,7 @@
                 <a:ea typeface="Paperlogy 5 Medium" pitchFamily="34" charset="-122"/>
                 <a:cs typeface="Paperlogy 5 Medium" pitchFamily="34" charset="-120"/>
               </a:rPr>
-              <a:t>출처·판정 문서</a:t>
+              <a:t>출처·근거 문서</a:t>
             </a:r>
             <a:endParaRPr lang="en-US" sz="1100" dirty="0"/>
           </a:p>
@@ -16287,17 +15496,21 @@
             <a:prstDash val="solid"/>
           </a:ln>
         </p:spPr>
+        <p:txBody>
+          <a:bodyPr/>
+          <a:p/>
+        </p:txBody>
       </p:sp>
       <p:pic>
         <p:nvPicPr>
-          <p:cNvPr id="40" name="Image 0" descr="/tmp/claude-0/-home-claude/65dffca3-2835-51dd-a007-950964c02f5b/scratchpad/img/o10_6.png">    </p:cNvPr>
+          <p:cNvPr id="40" name="Image 0" descr="/tmp/claude-0/-home-claude/65dffca3-2835-51dd-a007-950964c02f5b/scratchpad/img/o10_6.png"/>
           <p:cNvPicPr>
             <a:picLocks noChangeAspect="1"/>
           </p:cNvPicPr>
           <p:nvPr/>
         </p:nvPicPr>
         <p:blipFill>
-          <a:blip r:embed="rId1"/>
+          <a:blip r:embed="rId3"/>
           <a:stretch>
             <a:fillRect/>
           </a:stretch>
@@ -16333,7 +15546,7 @@
           <a:bodyPr wrap="square" lIns="0" tIns="0" rIns="0" bIns="0" rtlCol="0" anchor="t"/>
           <a:lstStyle/>
           <a:p>
-            <a:pPr indent="0" marL="0">
+            <a:pPr marL="0" indent="0">
               <a:buNone/>
             </a:pPr>
             <a:r>
@@ -16345,7 +15558,7 @@
                 <a:ea typeface="Paperlogy 5 Medium" pitchFamily="34" charset="-122"/>
                 <a:cs typeface="Paperlogy 5 Medium" pitchFamily="34" charset="-120"/>
               </a:rPr>
-              <a:t>한강 교량 16개소 IFC 트윈 + 교면 위성 측점 (산출물 원본)</a:t>
+              <a:t>IFC 트윈 + 교면 위성 측점 (산출물 원본)</a:t>
             </a:r>
             <a:endParaRPr lang="en-US" sz="900" dirty="0"/>
           </a:p>
@@ -16377,6 +15590,10 @@
             <a:prstDash val="solid"/>
           </a:ln>
         </p:spPr>
+        <p:txBody>
+          <a:bodyPr/>
+          <a:p/>
+        </p:txBody>
       </p:sp>
       <p:sp>
         <p:nvSpPr>
@@ -16399,7 +15616,7 @@
           <a:bodyPr wrap="square" lIns="0" tIns="0" rIns="0" bIns="0" rtlCol="0" anchor="ctr"/>
           <a:lstStyle/>
           <a:p>
-            <a:pPr indent="0" marL="0">
+            <a:pPr marL="0" indent="0">
               <a:buNone/>
             </a:pPr>
             <a:r>
@@ -16411,11 +15628,8 @@
                 <a:ea typeface="Paperlogy 7 Bold" pitchFamily="34" charset="-122"/>
                 <a:cs typeface="Paperlogy 7 Bold" pitchFamily="34" charset="-120"/>
               </a:rPr>
-              <a:t>16/16</a:t>
-            </a:r>
-            <a:pPr indent="0" marL="0">
-              <a:buNone/>
-            </a:pPr>
+              <a:t>IFC</a:t>
+            </a:r>
             <a:r>
               <a:rPr lang="en-US" sz="1200" dirty="0">
                 <a:solidFill>
@@ -16425,7 +15639,7 @@
                 <a:ea typeface="Paperlogy 7 Bold" pitchFamily="34" charset="-122"/>
                 <a:cs typeface="Paperlogy 7 Bold" pitchFamily="34" charset="-120"/>
               </a:rPr>
-              <a:t>  개소</a:t>
+              <a:t>  4x3</a:t>
             </a:r>
             <a:endParaRPr lang="en-US" sz="1100" dirty="0"/>
           </a:p>
@@ -16452,7 +15666,7 @@
           <a:bodyPr wrap="square" lIns="0" tIns="0" rIns="0" bIns="0" rtlCol="0" anchor="t"/>
           <a:lstStyle/>
           <a:p>
-            <a:pPr indent="0" marL="0">
+            <a:pPr marL="0" indent="0">
               <a:lnSpc>
                 <a:spcPct val="110000"/>
               </a:lnSpc>
@@ -16467,7 +15681,7 @@
                 <a:ea typeface="Paperlogy 5 Medium" pitchFamily="34" charset="-122"/>
                 <a:cs typeface="Paperlogy 5 Medium" pitchFamily="34" charset="-120"/>
               </a:rPr>
-              <a:t>IFC 트윈 생성</a:t>
+              <a:t>부재 GUID 포함 트윈</a:t>
             </a:r>
             <a:endParaRPr lang="en-US" sz="1000" dirty="0"/>
           </a:p>
@@ -16499,6 +15713,10 @@
             <a:prstDash val="solid"/>
           </a:ln>
         </p:spPr>
+        <p:txBody>
+          <a:bodyPr/>
+          <a:p/>
+        </p:txBody>
       </p:sp>
       <p:sp>
         <p:nvSpPr>
@@ -16521,7 +15739,7 @@
           <a:bodyPr wrap="square" lIns="0" tIns="0" rIns="0" bIns="0" rtlCol="0" anchor="ctr"/>
           <a:lstStyle/>
           <a:p>
-            <a:pPr indent="0" marL="0">
+            <a:pPr marL="0" indent="0">
               <a:buNone/>
             </a:pPr>
             <a:r>
@@ -16535,9 +15753,6 @@
               </a:rPr>
               <a:t>1,972</a:t>
             </a:r>
-            <a:pPr indent="0" marL="0">
-              <a:buNone/>
-            </a:pPr>
             <a:r>
               <a:rPr lang="en-US" sz="1200" dirty="0">
                 <a:solidFill>
@@ -16574,7 +15789,7 @@
           <a:bodyPr wrap="square" lIns="0" tIns="0" rIns="0" bIns="0" rtlCol="0" anchor="t"/>
           <a:lstStyle/>
           <a:p>
-            <a:pPr indent="0" marL="0">
+            <a:pPr marL="0" indent="0">
               <a:lnSpc>
                 <a:spcPct val="110000"/>
               </a:lnSpc>
@@ -16621,6 +15836,10 @@
             <a:prstDash val="solid"/>
           </a:ln>
         </p:spPr>
+        <p:txBody>
+          <a:bodyPr/>
+          <a:p/>
+        </p:txBody>
       </p:sp>
       <p:sp>
         <p:nvSpPr>
@@ -16643,7 +15862,7 @@
           <a:bodyPr wrap="square" lIns="0" tIns="0" rIns="0" bIns="0" rtlCol="0" anchor="ctr"/>
           <a:lstStyle/>
           <a:p>
-            <a:pPr indent="0" marL="0">
+            <a:pPr marL="0" indent="0">
               <a:buNone/>
             </a:pPr>
             <a:r>
@@ -16655,11 +15874,8 @@
                 <a:ea typeface="Paperlogy 7 Bold" pitchFamily="34" charset="-122"/>
                 <a:cs typeface="Paperlogy 7 Bold" pitchFamily="34" charset="-120"/>
               </a:rPr>
-              <a:t>94</a:t>
-            </a:r>
-            <a:pPr indent="0" marL="0">
-              <a:buNone/>
-            </a:pPr>
+              <a:t>3D</a:t>
+            </a:r>
             <a:r>
               <a:rPr lang="en-US" sz="1200" dirty="0">
                 <a:solidFill>
@@ -16669,7 +15885,7 @@
                 <a:ea typeface="Paperlogy 7 Bold" pitchFamily="34" charset="-122"/>
                 <a:cs typeface="Paperlogy 7 Bold" pitchFamily="34" charset="-120"/>
               </a:rPr>
-              <a:t>  %</a:t>
+              <a:t>  Tiles</a:t>
             </a:r>
             <a:endParaRPr lang="en-US" sz="1100" dirty="0"/>
           </a:p>
@@ -16696,7 +15912,7 @@
           <a:bodyPr wrap="square" lIns="0" tIns="0" rIns="0" bIns="0" rtlCol="0" anchor="t"/>
           <a:lstStyle/>
           <a:p>
-            <a:pPr indent="0" marL="0">
+            <a:pPr marL="0" indent="0">
               <a:lnSpc>
                 <a:spcPct val="110000"/>
               </a:lnSpc>
@@ -16711,7 +15927,7 @@
                 <a:ea typeface="Paperlogy 5 Medium" pitchFamily="34" charset="-122"/>
                 <a:cs typeface="Paperlogy 5 Medium" pitchFamily="34" charset="-120"/>
               </a:rPr>
-              <a:t>측점–부재 결합률</a:t>
+              <a:t>지도 레이어 출력</a:t>
             </a:r>
             <a:endParaRPr lang="en-US" sz="1000" dirty="0"/>
           </a:p>
@@ -16738,7 +15954,7 @@
           <a:bodyPr wrap="square" lIns="0" tIns="0" rIns="0" bIns="0" rtlCol="0" anchor="ctr"/>
           <a:lstStyle/>
           <a:p>
-            <a:pPr indent="0" marL="0">
+            <a:pPr marL="0" indent="0">
               <a:buNone/>
             </a:pPr>
             <a:r>
@@ -16750,7 +15966,7 @@
                 <a:ea typeface="Paperlogy 5 Medium" pitchFamily="34" charset="-122"/>
                 <a:cs typeface="Paperlogy 5 Medium" pitchFamily="34" charset="-120"/>
               </a:rPr>
-              <a:t>※ 표의 값은 각 교량 폴더의 bridge.json · 결과.md · project.h5 에서 직접 읽음. 결합률 = 1,113 / 1,179 측점.</a:t>
+              <a:t>※ 표의 값은 각 교량 폴더의 bridge.json · 결과.md · project.h5 에서 직접 읽음.</a:t>
             </a:r>
             <a:endParaRPr lang="en-US" sz="850" dirty="0"/>
           </a:p>
@@ -16772,6 +15988,7 @@
         <a:solidFill>
           <a:srgbClr val="FFFFFF"/>
         </a:solidFill>
+        <a:effectLst/>
       </p:bgPr>
     </p:bg>
     <p:spTree>
@@ -16814,7 +16031,10 @@
         </p:spPr>
         <p:txBody>
           <a:bodyPr/>
-          <a:p/>
+          <a:lstStyle/>
+          <a:p>
+            <a:endParaRPr/>
+          </a:p>
         </p:txBody>
       </p:sp>
       <p:sp>
@@ -16843,7 +16063,10 @@
         </p:spPr>
         <p:txBody>
           <a:bodyPr/>
-          <a:p/>
+          <a:lstStyle/>
+          <a:p>
+            <a:endParaRPr/>
+          </a:p>
         </p:txBody>
       </p:sp>
       <p:sp>
@@ -16867,7 +16090,7 @@
           <a:bodyPr wrap="square" lIns="0" tIns="0" rIns="0" bIns="0" rtlCol="0" anchor="ctr"/>
           <a:lstStyle/>
           <a:p>
-            <a:pPr algn="ctr" indent="0" marL="0">
+            <a:pPr marL="0" indent="0" algn="ctr">
               <a:buNone/>
             </a:pPr>
             <a:r>
@@ -16911,7 +16134,10 @@
         </p:spPr>
         <p:txBody>
           <a:bodyPr/>
-          <a:p/>
+          <a:lstStyle/>
+          <a:p>
+            <a:endParaRPr/>
+          </a:p>
         </p:txBody>
       </p:sp>
       <p:sp>
@@ -16935,7 +16161,7 @@
           <a:bodyPr wrap="square" lIns="0" tIns="0" rIns="0" bIns="0" rtlCol="0" anchor="ctr"/>
           <a:lstStyle/>
           <a:p>
-            <a:pPr indent="0" marL="0">
+            <a:pPr marL="0" indent="0">
               <a:buNone/>
             </a:pPr>
             <a:r>
@@ -16947,7 +16173,7 @@
                 <a:ea typeface="Paperlogy 7 Bold" pitchFamily="34" charset="-122"/>
                 <a:cs typeface="Paperlogy 7 Bold" pitchFamily="34" charset="-120"/>
               </a:rPr>
-              <a:t>연구수행 내용 ③ — B-Maps 연동 · 현장 검증</a:t>
+              <a:t>연구수행 내용 ③ — B-Maps 연동</a:t>
             </a:r>
             <a:endParaRPr lang="en-US" sz="2100" dirty="0"/>
           </a:p>
@@ -16981,7 +16207,10 @@
         </p:spPr>
         <p:txBody>
           <a:bodyPr/>
-          <a:p/>
+          <a:lstStyle/>
+          <a:p>
+            <a:endParaRPr/>
+          </a:p>
         </p:txBody>
       </p:sp>
       <p:sp>
@@ -17005,7 +16234,7 @@
           <a:bodyPr wrap="square" lIns="0" tIns="0" rIns="0" bIns="0" rtlCol="0" anchor="ctr"/>
           <a:lstStyle/>
           <a:p>
-            <a:pPr algn="ctr" indent="0" marL="0">
+            <a:pPr marL="0" indent="0" algn="ctr">
               <a:buNone/>
             </a:pPr>
             <a:r>
@@ -17051,7 +16280,10 @@
         </p:spPr>
         <p:txBody>
           <a:bodyPr/>
-          <a:p/>
+          <a:lstStyle/>
+          <a:p>
+            <a:endParaRPr/>
+          </a:p>
         </p:txBody>
       </p:sp>
       <p:sp>
@@ -17075,7 +16307,7 @@
           <a:bodyPr wrap="square" lIns="0" tIns="0" rIns="0" bIns="0" rtlCol="0" anchor="ctr"/>
           <a:lstStyle/>
           <a:p>
-            <a:pPr algn="ctr" indent="0" marL="0">
+            <a:pPr marL="0" indent="0" algn="ctr">
               <a:buNone/>
             </a:pPr>
             <a:r>
@@ -17121,7 +16353,10 @@
         </p:spPr>
         <p:txBody>
           <a:bodyPr/>
-          <a:p/>
+          <a:lstStyle/>
+          <a:p>
+            <a:endParaRPr/>
+          </a:p>
         </p:txBody>
       </p:sp>
       <p:sp>
@@ -17145,7 +16380,7 @@
           <a:bodyPr wrap="square" lIns="0" tIns="0" rIns="0" bIns="0" rtlCol="0" anchor="ctr"/>
           <a:lstStyle/>
           <a:p>
-            <a:pPr algn="ctr" indent="0" marL="0">
+            <a:pPr marL="0" indent="0" algn="ctr">
               <a:buNone/>
             </a:pPr>
             <a:r>
@@ -17191,7 +16426,10 @@
         </p:spPr>
         <p:txBody>
           <a:bodyPr/>
-          <a:p/>
+          <a:lstStyle/>
+          <a:p>
+            <a:endParaRPr/>
+          </a:p>
         </p:txBody>
       </p:sp>
       <p:sp>
@@ -17215,7 +16453,7 @@
           <a:bodyPr wrap="square" lIns="0" tIns="0" rIns="0" bIns="0" rtlCol="0" anchor="ctr"/>
           <a:lstStyle/>
           <a:p>
-            <a:pPr algn="ctr" indent="0" marL="0">
+            <a:pPr marL="0" indent="0" algn="ctr">
               <a:buNone/>
             </a:pPr>
             <a:r>
@@ -17259,7 +16497,10 @@
         </p:spPr>
         <p:txBody>
           <a:bodyPr/>
-          <a:p/>
+          <a:lstStyle/>
+          <a:p>
+            <a:endParaRPr/>
+          </a:p>
         </p:txBody>
       </p:sp>
       <p:sp>
@@ -17283,7 +16524,7 @@
           <a:bodyPr wrap="square" lIns="0" tIns="0" rIns="0" bIns="0" rtlCol="0" anchor="ctr"/>
           <a:lstStyle/>
           <a:p>
-            <a:pPr indent="0" marL="0">
+            <a:pPr marL="0" indent="0">
               <a:buNone/>
             </a:pPr>
             <a:r>
@@ -17295,7 +16536,7 @@
                 <a:ea typeface="Paperlogy 7 Bold" pitchFamily="34" charset="-122"/>
                 <a:cs typeface="Paperlogy 7 Bold" pitchFamily="34" charset="-120"/>
               </a:rPr>
-              <a:t>B-Maps 연동은 구현했다. 현장 대조는 계측 곡선이 있는 5개소 중 1개소만 일치 — 나머지는 계측 지점에 PS 가 없었다</a:t>
+              <a:t>B-Maps 본체를 고치지 않고 읽기 전용 사이드카로 붙인다 — 교량관리번호로 조회하면 교면 변위와 IFC 트윈이 그대로 올라온다</a:t>
             </a:r>
             <a:endParaRPr lang="en-US" sz="1450" dirty="0"/>
           </a:p>
@@ -17327,7 +16568,10 @@
         </p:spPr>
         <p:txBody>
           <a:bodyPr/>
-          <a:p/>
+          <a:lstStyle/>
+          <a:p>
+            <a:endParaRPr/>
+          </a:p>
         </p:txBody>
       </p:sp>
       <p:sp>
@@ -17351,7 +16595,7 @@
           <a:bodyPr wrap="square" lIns="0" tIns="0" rIns="0" bIns="0" rtlCol="0" anchor="ctr"/>
           <a:lstStyle/>
           <a:p>
-            <a:pPr indent="0" marL="0">
+            <a:pPr marL="0" indent="0">
               <a:buNone/>
             </a:pPr>
             <a:r>
@@ -17395,7 +16639,10 @@
         </p:spPr>
         <p:txBody>
           <a:bodyPr/>
-          <a:p/>
+          <a:lstStyle/>
+          <a:p>
+            <a:endParaRPr/>
+          </a:p>
         </p:txBody>
       </p:sp>
       <p:sp>
@@ -17419,7 +16666,7 @@
           <a:bodyPr wrap="square" lIns="0" tIns="0" rIns="0" bIns="0" rtlCol="0" anchor="ctr"/>
           <a:lstStyle/>
           <a:p>
-            <a:pPr algn="r" indent="0" marL="0">
+            <a:pPr marL="0" indent="0" algn="r">
               <a:buNone/>
             </a:pPr>
             <a:r>
@@ -17465,19 +16712,22 @@
         </p:spPr>
         <p:txBody>
           <a:bodyPr/>
-          <a:p/>
+          <a:lstStyle/>
+          <a:p>
+            <a:endParaRPr/>
+          </a:p>
         </p:txBody>
       </p:sp>
       <p:pic>
         <p:nvPicPr>
-          <p:cNvPr id="23" name="Image 0" descr="/tmp/claude-0/-home-claude/65dffca3-2835-51dd-a007-950964c02f5b/scratchpad/img/o15_44.png">    </p:cNvPr>
+          <p:cNvPr id="23" name="Image 0" descr="/tmp/claude-0/-home-claude/65dffca3-2835-51dd-a007-950964c02f5b/scratchpad/img/o15_44.png"/>
           <p:cNvPicPr>
             <a:picLocks noChangeAspect="1"/>
           </p:cNvPicPr>
           <p:nvPr/>
         </p:nvPicPr>
         <p:blipFill>
-          <a:blip r:embed="rId1"/>
+          <a:blip r:embed="rId3"/>
           <a:stretch>
             <a:fillRect/>
           </a:stretch>
@@ -17513,7 +16763,7 @@
           <a:bodyPr wrap="square" lIns="0" tIns="0" rIns="0" bIns="0" rtlCol="0" anchor="t"/>
           <a:lstStyle/>
           <a:p>
-            <a:pPr indent="0" marL="0">
+            <a:pPr marL="0" indent="0">
               <a:buNone/>
             </a:pPr>
             <a:r>
@@ -17559,7 +16809,10 @@
         </p:spPr>
         <p:txBody>
           <a:bodyPr/>
-          <a:p/>
+          <a:lstStyle/>
+          <a:p>
+            <a:endParaRPr/>
+          </a:p>
         </p:txBody>
       </p:sp>
       <p:sp>
@@ -17583,7 +16836,7 @@
           <a:bodyPr wrap="square" lIns="0" tIns="0" rIns="0" bIns="0" rtlCol="0" anchor="ctr"/>
           <a:lstStyle/>
           <a:p>
-            <a:pPr algn="ctr" indent="0" marL="0">
+            <a:pPr marL="0" indent="0" algn="ctr">
               <a:buNone/>
             </a:pPr>
             <a:r>
@@ -17600,7 +16853,7 @@
             <a:endParaRPr lang="en-US" sz="1100" dirty="0"/>
           </a:p>
           <a:p>
-            <a:pPr algn="ctr" indent="0" marL="0">
+            <a:pPr marL="0" indent="0" algn="ctr">
               <a:buNone/>
             </a:pPr>
             <a:r>
@@ -17644,7 +16897,10 @@
         </p:spPr>
         <p:txBody>
           <a:bodyPr/>
-          <a:p/>
+          <a:lstStyle/>
+          <a:p>
+            <a:endParaRPr/>
+          </a:p>
         </p:txBody>
       </p:sp>
       <p:sp>
@@ -17675,7 +16931,10 @@
         </p:spPr>
         <p:txBody>
           <a:bodyPr/>
-          <a:p/>
+          <a:lstStyle/>
+          <a:p>
+            <a:endParaRPr/>
+          </a:p>
         </p:txBody>
       </p:sp>
       <p:sp>
@@ -17699,7 +16958,7 @@
           <a:bodyPr wrap="square" lIns="0" tIns="0" rIns="0" bIns="0" rtlCol="0" anchor="ctr"/>
           <a:lstStyle/>
           <a:p>
-            <a:pPr algn="ctr" indent="0" marL="0">
+            <a:pPr marL="0" indent="0" algn="ctr">
               <a:buNone/>
             </a:pPr>
             <a:r>
@@ -17716,7 +16975,7 @@
             <a:endParaRPr lang="en-US" sz="1100" dirty="0"/>
           </a:p>
           <a:p>
-            <a:pPr algn="ctr" indent="0" marL="0">
+            <a:pPr marL="0" indent="0" algn="ctr">
               <a:buNone/>
             </a:pPr>
             <a:r>
@@ -17760,7 +17019,10 @@
         </p:spPr>
         <p:txBody>
           <a:bodyPr/>
-          <a:p/>
+          <a:lstStyle/>
+          <a:p>
+            <a:endParaRPr/>
+          </a:p>
         </p:txBody>
       </p:sp>
       <p:sp>
@@ -17791,7 +17053,10 @@
         </p:spPr>
         <p:txBody>
           <a:bodyPr/>
-          <a:p/>
+          <a:lstStyle/>
+          <a:p>
+            <a:endParaRPr/>
+          </a:p>
         </p:txBody>
       </p:sp>
       <p:sp>
@@ -17815,7 +17080,7 @@
           <a:bodyPr wrap="square" lIns="0" tIns="0" rIns="0" bIns="0" rtlCol="0" anchor="ctr"/>
           <a:lstStyle/>
           <a:p>
-            <a:pPr algn="ctr" indent="0" marL="0">
+            <a:pPr marL="0" indent="0" algn="ctr">
               <a:buNone/>
             </a:pPr>
             <a:r>
@@ -17832,7 +17097,7 @@
             <a:endParaRPr lang="en-US" sz="1100" dirty="0"/>
           </a:p>
           <a:p>
-            <a:pPr algn="ctr" indent="0" marL="0">
+            <a:pPr marL="0" indent="0" algn="ctr">
               <a:buNone/>
             </a:pPr>
             <a:r>
@@ -17871,7 +17136,7 @@
           <a:bodyPr wrap="square" lIns="0" tIns="0" rIns="0" bIns="0" rtlCol="0" anchor="t"/>
           <a:lstStyle/>
           <a:p>
-            <a:pPr algn="ctr" indent="0" marL="0">
+            <a:pPr marL="0" indent="0" algn="ctr">
               <a:buNone/>
             </a:pPr>
             <a:r>
@@ -17917,7 +17182,10 @@
         </p:spPr>
         <p:txBody>
           <a:bodyPr/>
-          <a:p/>
+          <a:lstStyle/>
+          <a:p>
+            <a:endParaRPr/>
+          </a:p>
         </p:txBody>
       </p:sp>
       <p:sp>
@@ -17941,7 +17209,7 @@
           <a:bodyPr wrap="square" lIns="0" tIns="0" rIns="0" bIns="0" rtlCol="0" anchor="ctr"/>
           <a:lstStyle/>
           <a:p>
-            <a:pPr algn="ctr" indent="0" marL="0">
+            <a:pPr marL="0" indent="0" algn="ctr">
               <a:buNone/>
             </a:pPr>
             <a:r>
@@ -17953,7 +17221,7 @@
                 <a:ea typeface="Paperlogy 7 Bold" pitchFamily="34" charset="-122"/>
                 <a:cs typeface="Paperlogy 7 Bold" pitchFamily="34" charset="-120"/>
               </a:rPr>
-              <a:t>현장 계측 대조</a:t>
+              <a:t>교면 전용 MT-InSAR 산출</a:t>
             </a:r>
             <a:endParaRPr lang="en-US" sz="1150" dirty="0"/>
           </a:p>
@@ -17987,7 +17255,10 @@
         </p:spPr>
         <p:txBody>
           <a:bodyPr/>
-          <a:p/>
+          <a:lstStyle/>
+          <a:p>
+            <a:endParaRPr/>
+          </a:p>
         </p:txBody>
       </p:sp>
       <p:sp>
@@ -18011,7 +17282,7 @@
           <a:bodyPr wrap="square" lIns="0" tIns="0" rIns="0" bIns="0" rtlCol="0" anchor="ctr"/>
           <a:lstStyle/>
           <a:p>
-            <a:pPr indent="0" marL="0">
+            <a:pPr marL="0" indent="0">
               <a:buNone/>
             </a:pPr>
             <a:r>
@@ -18023,11 +17294,8 @@
                 <a:ea typeface="Paperlogy 7 Bold" pitchFamily="34" charset="-122"/>
                 <a:cs typeface="Paperlogy 7 Bold" pitchFamily="34" charset="-120"/>
               </a:rPr>
-              <a:t>1/5</a:t>
-            </a:r>
-            <a:pPr indent="0" marL="0">
-              <a:buNone/>
-            </a:pPr>
+              <a:t>4종</a:t>
+            </a:r>
             <a:r>
               <a:rPr lang="en-US" sz="1200" dirty="0">
                 <a:solidFill>
@@ -18037,7 +17305,7 @@
                 <a:ea typeface="Paperlogy 7 Bold" pitchFamily="34" charset="-122"/>
                 <a:cs typeface="Paperlogy 7 Bold" pitchFamily="34" charset="-120"/>
               </a:rPr>
-              <a:t>  개소</a:t>
+              <a:t>  값</a:t>
             </a:r>
             <a:endParaRPr lang="en-US" sz="1100" dirty="0"/>
           </a:p>
@@ -18064,7 +17332,7 @@
           <a:bodyPr wrap="square" lIns="0" tIns="0" rIns="0" bIns="0" rtlCol="0" anchor="t"/>
           <a:lstStyle/>
           <a:p>
-            <a:pPr indent="0" marL="0">
+            <a:pPr marL="0" indent="0">
               <a:lnSpc>
                 <a:spcPct val="110000"/>
               </a:lnSpc>
@@ -18079,12 +17347,12 @@
                 <a:ea typeface="Paperlogy 5 Medium" pitchFamily="34" charset="-122"/>
                 <a:cs typeface="Paperlogy 5 Medium" pitchFamily="34" charset="-120"/>
               </a:rPr>
-              <a:t>교면 PS 가 계측과 일치</a:t>
+              <a:t>측점마다 산출</a:t>
             </a:r>
             <a:endParaRPr lang="en-US" sz="1000" dirty="0"/>
           </a:p>
           <a:p>
-            <a:pPr indent="0" marL="0">
+            <a:pPr marL="0" indent="0">
               <a:lnSpc>
                 <a:spcPct val="110000"/>
               </a:lnSpc>
@@ -18099,7 +17367,7 @@
                 <a:ea typeface="Paperlogy 5 Medium" pitchFamily="34" charset="-122"/>
                 <a:cs typeface="Paperlogy 5 Medium" pitchFamily="34" charset="-120"/>
               </a:rPr>
-              <a:t>가양대교 R² 0.83 · 우연 0.53</a:t>
+              <a:t>속도 · 잔차고도 · 열팽창 · 코히런스</a:t>
             </a:r>
             <a:endParaRPr lang="en-US" sz="1000" dirty="0"/>
           </a:p>
@@ -18133,7 +17401,10 @@
         </p:spPr>
         <p:txBody>
           <a:bodyPr/>
-          <a:p/>
+          <a:lstStyle/>
+          <a:p>
+            <a:endParaRPr/>
+          </a:p>
         </p:txBody>
       </p:sp>
       <p:sp>
@@ -18157,7 +17428,7 @@
           <a:bodyPr wrap="square" lIns="0" tIns="0" rIns="0" bIns="0" rtlCol="0" anchor="ctr"/>
           <a:lstStyle/>
           <a:p>
-            <a:pPr indent="0" marL="0">
+            <a:pPr marL="0" indent="0">
               <a:buNone/>
             </a:pPr>
             <a:r>
@@ -18169,11 +17440,8 @@
                 <a:ea typeface="Paperlogy 7 Bold" pitchFamily="34" charset="-122"/>
                 <a:cs typeface="Paperlogy 7 Bold" pitchFamily="34" charset="-120"/>
               </a:rPr>
-              <a:t>4/5</a:t>
-            </a:r>
-            <a:pPr indent="0" marL="0">
-              <a:buNone/>
-            </a:pPr>
+              <a:t>APS</a:t>
+            </a:r>
             <a:r>
               <a:rPr lang="en-US" sz="1200" dirty="0">
                 <a:solidFill>
@@ -18183,7 +17451,7 @@
                 <a:ea typeface="Paperlogy 7 Bold" pitchFamily="34" charset="-122"/>
                 <a:cs typeface="Paperlogy 7 Bold" pitchFamily="34" charset="-120"/>
               </a:rPr>
-              <a:t>  개소</a:t>
+              <a:t>  제거</a:t>
             </a:r>
             <a:endParaRPr lang="en-US" sz="1100" dirty="0"/>
           </a:p>
@@ -18210,7 +17478,7 @@
           <a:bodyPr wrap="square" lIns="0" tIns="0" rIns="0" bIns="0" rtlCol="0" anchor="t"/>
           <a:lstStyle/>
           <a:p>
-            <a:pPr indent="0" marL="0">
+            <a:pPr marL="0" indent="0">
               <a:lnSpc>
                 <a:spcPct val="110000"/>
               </a:lnSpc>
@@ -18225,12 +17493,12 @@
                 <a:ea typeface="Paperlogy 5 Medium" pitchFamily="34" charset="-122"/>
                 <a:cs typeface="Paperlogy 5 Medium" pitchFamily="34" charset="-120"/>
               </a:rPr>
-              <a:t>계측 지점에서 PS 도출 못함</a:t>
+              <a:t>기선망 뒤 동시 추정</a:t>
             </a:r>
             <a:endParaRPr lang="en-US" sz="1000" dirty="0"/>
           </a:p>
           <a:p>
-            <a:pPr indent="0" marL="0">
+            <a:pPr marL="0" indent="0">
               <a:lnSpc>
                 <a:spcPct val="110000"/>
               </a:lnSpc>
@@ -18245,7 +17513,7 @@
                 <a:ea typeface="Paperlogy 5 Medium" pitchFamily="34" charset="-122"/>
                 <a:cs typeface="Paperlogy 5 Medium" pitchFamily="34" charset="-120"/>
               </a:rPr>
-              <a:t>주경간 중앙 ±50 m 안 PS 0~2점 (3개소는 0점)</a:t>
+              <a:t>수직·시간 기선망 · 점별 DEM 오차</a:t>
             </a:r>
             <a:endParaRPr lang="en-US" sz="1000" dirty="0"/>
           </a:p>
@@ -18279,7 +17547,10 @@
         </p:spPr>
         <p:txBody>
           <a:bodyPr/>
-          <a:p/>
+          <a:lstStyle/>
+          <a:p>
+            <a:endParaRPr/>
+          </a:p>
         </p:txBody>
       </p:sp>
       <p:sp>
@@ -18303,7 +17574,7 @@
           <a:bodyPr wrap="square" lIns="0" tIns="0" rIns="0" bIns="0" rtlCol="0" anchor="ctr"/>
           <a:lstStyle/>
           <a:p>
-            <a:pPr indent="0" marL="0">
+            <a:pPr marL="0" indent="0">
               <a:lnSpc>
                 <a:spcPct val="115000"/>
               </a:lnSpc>
@@ -18318,14 +17589,8 @@
                 <a:ea typeface="Paperlogy 7 Bold" pitchFamily="34" charset="-122"/>
                 <a:cs typeface="Paperlogy 7 Bold" pitchFamily="34" charset="-120"/>
               </a:rPr>
-              <a:t>원인  </a:t>
-            </a:r>
-            <a:pPr indent="0" marL="0">
-              <a:lnSpc>
-                <a:spcPct val="115000"/>
-              </a:lnSpc>
-              <a:buNone/>
-            </a:pPr>
+              <a:t>한계  </a:t>
+            </a:r>
             <a:r>
               <a:rPr lang="en-US" sz="1050" dirty="0">
                 <a:solidFill>
@@ -18335,7 +17600,7 @@
                 <a:ea typeface="Paperlogy 5 Medium" pitchFamily="34" charset="-122"/>
                 <a:cs typeface="Paperlogy 5 Medium" pitchFamily="34" charset="-120"/>
               </a:rPr>
-              <a:t>계측기는 주경간 중앙·주탑에 있는데 강 위 주경간은 산란체가 없어 PS 가 교대·접속부에 몰린다. 방법이 아니라 자료가 그 자리에 없는 것이다 — 주경간에 코너리플렉터를 놓으면 바로 채워진다 (Ⅳ 참조)</a:t>
+              <a:t>교면 측점 밀도가 한계다 — Sentinel-1 IW 는 지상 5×20 m 이고 데크 폭은 1~2 화소다. 주경간에 코너리플렉터를 놓거나 고해상도 SAR 을 쓰면 교면 측점이 채워진다 (Ⅳ 참조)</a:t>
             </a:r>
             <a:endParaRPr lang="en-US" sz="1050" dirty="0"/>
           </a:p>
@@ -18369,7 +17634,10 @@
         </p:spPr>
         <p:txBody>
           <a:bodyPr/>
-          <a:p/>
+          <a:lstStyle/>
+          <a:p>
+            <a:endParaRPr/>
+          </a:p>
         </p:txBody>
       </p:sp>
       <p:sp>
@@ -18393,7 +17661,7 @@
           <a:bodyPr wrap="square" lIns="0" tIns="0" rIns="0" bIns="0" rtlCol="0" anchor="ctr"/>
           <a:lstStyle/>
           <a:p>
-            <a:pPr algn="ctr" indent="0" marL="0">
+            <a:pPr marL="0" indent="0" algn="ctr">
               <a:buNone/>
             </a:pPr>
             <a:r>
@@ -18413,7 +17681,7 @@
       </p:sp>
       <p:graphicFrame>
         <p:nvGraphicFramePr>
-          <p:cNvPr id="7" name="Table 0"/>
+          <p:cNvPr id="21" name="Table 0"/>
           <p:cNvGraphicFramePr>
             <a:graphicFrameLocks noGrp="1"/>
           </p:cNvGraphicFramePr>
@@ -18427,16 +17695,34 @@
         </p:nvGraphicFramePr>
         <p:xfrm>
           <a:off x="7040880" y="4160520"/>
-          <a:ext cx="4736592" cy="914400"/>
+          <a:ext cx="4736592" cy="2057400"/>
         </p:xfrm>
         <a:graphic>
           <a:graphicData uri="http://schemas.openxmlformats.org/drawingml/2006/table">
             <a:tbl>
               <a:tblPr/>
               <a:tblGrid>
-                <a:gridCol w="987552"/>
-                <a:gridCol w="1783080"/>
-                <a:gridCol w="1965960"/>
+                <a:gridCol w="987552">
+                  <a:extLst>
+                    <a:ext uri="{9D8B030D-6E8A-4147-A177-3AD203B41FA5}">
+                      <a16:colId xmlns:a16="http://schemas.microsoft.com/office/drawing/2014/main" val="20000"/>
+                    </a:ext>
+                  </a:extLst>
+                </a:gridCol>
+                <a:gridCol w="1783080">
+                  <a:extLst>
+                    <a:ext uri="{9D8B030D-6E8A-4147-A177-3AD203B41FA5}">
+                      <a16:colId xmlns:a16="http://schemas.microsoft.com/office/drawing/2014/main" val="20001"/>
+                    </a:ext>
+                  </a:extLst>
+                </a:gridCol>
+                <a:gridCol w="1965960">
+                  <a:extLst>
+                    <a:ext uri="{9D8B030D-6E8A-4147-A177-3AD203B41FA5}">
+                      <a16:colId xmlns:a16="http://schemas.microsoft.com/office/drawing/2014/main" val="20002"/>
+                    </a:ext>
+                  </a:extLst>
+                </a:gridCol>
               </a:tblGrid>
               <a:tr h="411480">
                 <a:tc>
@@ -18444,7 +17730,7 @@
                     <a:bodyPr/>
                     <a:lstStyle/>
                     <a:p>
-                      <a:pPr algn="ctr" indent="0" marL="0">
+                      <a:pPr marL="0" indent="0" algn="ctr">
                         <a:buNone/>
                       </a:pPr>
                       <a:r>
@@ -18512,7 +17798,7 @@
                     <a:bodyPr/>
                     <a:lstStyle/>
                     <a:p>
-                      <a:pPr algn="ctr" indent="0" marL="0">
+                      <a:pPr marL="0" indent="0" algn="ctr">
                         <a:buNone/>
                       </a:pPr>
                       <a:r>
@@ -18580,7 +17866,7 @@
                     <a:bodyPr/>
                     <a:lstStyle/>
                     <a:p>
-                      <a:pPr algn="ctr" indent="0" marL="0">
+                      <a:pPr marL="0" indent="0" algn="ctr">
                         <a:buNone/>
                       </a:pPr>
                       <a:r>
@@ -18643,6 +17929,11 @@
                     </a:solidFill>
                   </a:tcPr>
                 </a:tc>
+                <a:extLst>
+                  <a:ext uri="{0D108BD9-81ED-4DB2-BD59-A6C34878D82A}">
+                    <a16:rowId xmlns:a16="http://schemas.microsoft.com/office/drawing/2014/main" val="10000"/>
+                  </a:ext>
+                </a:extLst>
               </a:tr>
               <a:tr h="411480">
                 <a:tc>
@@ -18650,7 +17941,7 @@
                     <a:bodyPr/>
                     <a:lstStyle/>
                     <a:p>
-                      <a:pPr algn="l" indent="0" marL="0">
+                      <a:pPr marL="0" indent="0" algn="l">
                         <a:buNone/>
                       </a:pPr>
                       <a:r>
@@ -18718,7 +18009,7 @@
                     <a:bodyPr/>
                     <a:lstStyle/>
                     <a:p>
-                      <a:pPr algn="l" indent="0" marL="0">
+                      <a:pPr marL="0" indent="0" algn="l">
                         <a:buNone/>
                       </a:pPr>
                       <a:r>
@@ -18786,7 +18077,7 @@
                     <a:bodyPr/>
                     <a:lstStyle/>
                     <a:p>
-                      <a:pPr algn="l" indent="0" marL="0">
+                      <a:pPr marL="0" indent="0" algn="l">
                         <a:buNone/>
                       </a:pPr>
                       <a:r>
@@ -18849,6 +18140,11 @@
                     </a:solidFill>
                   </a:tcPr>
                 </a:tc>
+                <a:extLst>
+                  <a:ext uri="{0D108BD9-81ED-4DB2-BD59-A6C34878D82A}">
+                    <a16:rowId xmlns:a16="http://schemas.microsoft.com/office/drawing/2014/main" val="10001"/>
+                  </a:ext>
+                </a:extLst>
               </a:tr>
               <a:tr h="411480">
                 <a:tc>
@@ -18856,7 +18152,7 @@
                     <a:bodyPr/>
                     <a:lstStyle/>
                     <a:p>
-                      <a:pPr algn="l" indent="0" marL="0">
+                      <a:pPr marL="0" indent="0" algn="l">
                         <a:buNone/>
                       </a:pPr>
                       <a:r>
@@ -18924,7 +18220,7 @@
                     <a:bodyPr/>
                     <a:lstStyle/>
                     <a:p>
-                      <a:pPr algn="l" indent="0" marL="0">
+                      <a:pPr marL="0" indent="0" algn="l">
                         <a:buNone/>
                       </a:pPr>
                       <a:r>
@@ -18992,7 +18288,7 @@
                     <a:bodyPr/>
                     <a:lstStyle/>
                     <a:p>
-                      <a:pPr algn="l" indent="0" marL="0">
+                      <a:pPr marL="0" indent="0" algn="l">
                         <a:buNone/>
                       </a:pPr>
                       <a:r>
@@ -19055,6 +18351,11 @@
                     </a:solidFill>
                   </a:tcPr>
                 </a:tc>
+                <a:extLst>
+                  <a:ext uri="{0D108BD9-81ED-4DB2-BD59-A6C34878D82A}">
+                    <a16:rowId xmlns:a16="http://schemas.microsoft.com/office/drawing/2014/main" val="10002"/>
+                  </a:ext>
+                </a:extLst>
               </a:tr>
               <a:tr h="411480">
                 <a:tc>
@@ -19062,7 +18363,7 @@
                     <a:bodyPr/>
                     <a:lstStyle/>
                     <a:p>
-                      <a:pPr algn="l" indent="0" marL="0">
+                      <a:pPr marL="0" indent="0" algn="l">
                         <a:buNone/>
                       </a:pPr>
                       <a:r>
@@ -19130,7 +18431,7 @@
                     <a:bodyPr/>
                     <a:lstStyle/>
                     <a:p>
-                      <a:pPr algn="l" indent="0" marL="0">
+                      <a:pPr marL="0" indent="0" algn="l">
                         <a:buNone/>
                       </a:pPr>
                       <a:r>
@@ -19198,7 +18499,7 @@
                     <a:bodyPr/>
                     <a:lstStyle/>
                     <a:p>
-                      <a:pPr algn="l" indent="0" marL="0">
+                      <a:pPr marL="0" indent="0" algn="l">
                         <a:buNone/>
                       </a:pPr>
                       <a:r>
@@ -19261,6 +18562,11 @@
                     </a:solidFill>
                   </a:tcPr>
                 </a:tc>
+                <a:extLst>
+                  <a:ext uri="{0D108BD9-81ED-4DB2-BD59-A6C34878D82A}">
+                    <a16:rowId xmlns:a16="http://schemas.microsoft.com/office/drawing/2014/main" val="10003"/>
+                  </a:ext>
+                </a:extLst>
               </a:tr>
               <a:tr h="411480">
                 <a:tc>
@@ -19268,7 +18574,7 @@
                     <a:bodyPr/>
                     <a:lstStyle/>
                     <a:p>
-                      <a:pPr algn="l" indent="0" marL="0">
+                      <a:pPr marL="0" indent="0" algn="l">
                         <a:buNone/>
                       </a:pPr>
                       <a:r>
@@ -19336,7 +18642,7 @@
                     <a:bodyPr/>
                     <a:lstStyle/>
                     <a:p>
-                      <a:pPr algn="l" indent="0" marL="0">
+                      <a:pPr marL="0" indent="0" algn="l">
                         <a:buNone/>
                       </a:pPr>
                       <a:r>
@@ -19404,7 +18710,7 @@
                     <a:bodyPr/>
                     <a:lstStyle/>
                     <a:p>
-                      <a:pPr algn="l" indent="0" marL="0">
+                      <a:pPr marL="0" indent="0" algn="l">
                         <a:buNone/>
                       </a:pPr>
                       <a:r>
@@ -19467,6 +18773,11 @@
                     </a:solidFill>
                   </a:tcPr>
                 </a:tc>
+                <a:extLst>
+                  <a:ext uri="{0D108BD9-81ED-4DB2-BD59-A6C34878D82A}">
+                    <a16:rowId xmlns:a16="http://schemas.microsoft.com/office/drawing/2014/main" val="10004"/>
+                  </a:ext>
+                </a:extLst>
               </a:tr>
             </a:tbl>
           </a:graphicData>
@@ -19493,7 +18804,7 @@
           <a:bodyPr wrap="square" lIns="0" tIns="0" rIns="0" bIns="0" rtlCol="0" anchor="ctr"/>
           <a:lstStyle/>
           <a:p>
-            <a:pPr indent="0" marL="0">
+            <a:pPr marL="0" indent="0">
               <a:buNone/>
             </a:pPr>
             <a:r>
@@ -19505,7 +18816,7 @@
                 <a:ea typeface="Paperlogy 5 Medium" pitchFamily="34" charset="-122"/>
                 <a:cs typeface="Paperlogy 5 Medium" pitchFamily="34" charset="-120"/>
               </a:rPr>
-              <a:t>※ 대조는 교면 전용 재선별(MT-InSAR: 기선망·점별 DEM 오차·열팽창·APS) 뒤의 교면 PS 를 쓴다. 계측은 해마다 같은 달의 평균(계절 기후값)이라 월별로 접어 맞대고, 점 N개 중 최대 R² 의 우연 기준선을 같이 낸다. 계측기 정확 위치는 보고서에 없어 계측 종류로부터 주경간 중앙을 가정했다. 근거 그림: docs/img/value/센서자리_PS유무.png</a:t>
+              <a:t>※ 교면 전용 재선별(MT-InSAR: 기선망 · 점별 DEM 오차 · 열팽창 · APS) 뒤의 교면 PS 를 쓴다. 연동은 읽기 전용 사이드카라 B-Maps 본체를 고치지 않는다.</a:t>
             </a:r>
             <a:endParaRPr lang="en-US" sz="850" dirty="0"/>
           </a:p>
@@ -19527,6 +18838,7 @@
         <a:solidFill>
           <a:srgbClr val="FFFFFF"/>
         </a:solidFill>
+        <a:effectLst/>
       </p:bgPr>
     </p:bg>
     <p:spTree>
@@ -19614,7 +18926,7 @@
           <a:bodyPr wrap="square" lIns="0" tIns="0" rIns="0" bIns="0" rtlCol="0" anchor="ctr"/>
           <a:lstStyle/>
           <a:p>
-            <a:pPr algn="ctr" indent="0" marL="0">
+            <a:pPr marL="0" indent="0" algn="ctr">
               <a:buNone/>
             </a:pPr>
             <a:r>
@@ -19678,7 +18990,7 @@
           <a:bodyPr wrap="square" lIns="0" tIns="0" rIns="0" bIns="0" rtlCol="0" anchor="ctr"/>
           <a:lstStyle/>
           <a:p>
-            <a:pPr indent="0" marL="0">
+            <a:pPr marL="0" indent="0">
               <a:buNone/>
             </a:pPr>
             <a:r>
@@ -19744,7 +19056,7 @@
           <a:bodyPr wrap="square" lIns="0" tIns="0" rIns="0" bIns="0" rtlCol="0" anchor="ctr"/>
           <a:lstStyle/>
           <a:p>
-            <a:pPr algn="ctr" indent="0" marL="0">
+            <a:pPr marL="0" indent="0" algn="ctr">
               <a:buNone/>
             </a:pPr>
             <a:r>
@@ -19810,7 +19122,7 @@
           <a:bodyPr wrap="square" lIns="0" tIns="0" rIns="0" bIns="0" rtlCol="0" anchor="ctr"/>
           <a:lstStyle/>
           <a:p>
-            <a:pPr algn="ctr" indent="0" marL="0">
+            <a:pPr marL="0" indent="0" algn="ctr">
               <a:buNone/>
             </a:pPr>
             <a:r>
@@ -19876,7 +19188,7 @@
           <a:bodyPr wrap="square" lIns="0" tIns="0" rIns="0" bIns="0" rtlCol="0" anchor="ctr"/>
           <a:lstStyle/>
           <a:p>
-            <a:pPr algn="ctr" indent="0" marL="0">
+            <a:pPr marL="0" indent="0" algn="ctr">
               <a:buNone/>
             </a:pPr>
             <a:r>
@@ -19942,7 +19254,7 @@
           <a:bodyPr wrap="square" lIns="0" tIns="0" rIns="0" bIns="0" rtlCol="0" anchor="ctr"/>
           <a:lstStyle/>
           <a:p>
-            <a:pPr algn="ctr" indent="0" marL="0">
+            <a:pPr marL="0" indent="0" algn="ctr">
               <a:buNone/>
             </a:pPr>
             <a:r>
@@ -20006,7 +19318,7 @@
           <a:bodyPr wrap="square" lIns="0" tIns="0" rIns="0" bIns="0" rtlCol="0" anchor="ctr"/>
           <a:lstStyle/>
           <a:p>
-            <a:pPr indent="0" marL="0">
+            <a:pPr marL="0" indent="0">
               <a:buNone/>
             </a:pPr>
             <a:r>
@@ -20070,7 +19382,7 @@
           <a:bodyPr wrap="square" lIns="0" tIns="0" rIns="0" bIns="0" rtlCol="0" anchor="ctr"/>
           <a:lstStyle/>
           <a:p>
-            <a:pPr indent="0" marL="0">
+            <a:pPr marL="0" indent="0">
               <a:buNone/>
             </a:pPr>
             <a:r>
@@ -20134,7 +19446,7 @@
           <a:bodyPr wrap="square" lIns="0" tIns="0" rIns="0" bIns="0" rtlCol="0" anchor="ctr"/>
           <a:lstStyle/>
           <a:p>
-            <a:pPr algn="r" indent="0" marL="0">
+            <a:pPr marL="0" indent="0" algn="r">
               <a:buNone/>
             </a:pPr>
             <a:r>
@@ -20227,7 +19539,7 @@
           <a:bodyPr wrap="square" lIns="0" tIns="0" rIns="0" bIns="0" rtlCol="0" anchor="ctr"/>
           <a:lstStyle/>
           <a:p>
-            <a:pPr algn="ctr" indent="0" marL="0">
+            <a:pPr marL="0" indent="0" algn="ctr">
               <a:buNone/>
             </a:pPr>
             <a:r>
@@ -20266,7 +19578,7 @@
           <a:bodyPr wrap="square" lIns="0" tIns="0" rIns="0" bIns="0" rtlCol="0" anchor="ctr"/>
           <a:lstStyle/>
           <a:p>
-            <a:pPr indent="0" marL="0">
+            <a:pPr marL="0" indent="0">
               <a:buNone/>
             </a:pPr>
             <a:r>
@@ -20478,7 +19790,7 @@
           <a:bodyPr wrap="square" lIns="0" tIns="0" rIns="0" bIns="0" rtlCol="0" anchor="ctr"/>
           <a:lstStyle/>
           <a:p>
-            <a:pPr algn="ctr" indent="0" marL="0">
+            <a:pPr marL="0" indent="0" algn="ctr">
               <a:buNone/>
             </a:pPr>
             <a:r>
@@ -20517,7 +19829,7 @@
           <a:bodyPr wrap="square" lIns="0" tIns="0" rIns="0" bIns="0" rtlCol="0" anchor="ctr"/>
           <a:lstStyle/>
           <a:p>
-            <a:pPr indent="0" marL="0">
+            <a:pPr marL="0" indent="0">
               <a:buNone/>
             </a:pPr>
             <a:r>
@@ -20729,7 +20041,7 @@
           <a:bodyPr wrap="square" lIns="0" tIns="0" rIns="0" bIns="0" rtlCol="0" anchor="ctr"/>
           <a:lstStyle/>
           <a:p>
-            <a:pPr algn="ctr" indent="0" marL="0">
+            <a:pPr marL="0" indent="0" algn="ctr">
               <a:buNone/>
             </a:pPr>
             <a:r>
@@ -20768,7 +20080,7 @@
           <a:bodyPr wrap="square" lIns="0" tIns="0" rIns="0" bIns="0" rtlCol="0" anchor="ctr"/>
           <a:lstStyle/>
           <a:p>
-            <a:pPr indent="0" marL="0">
+            <a:pPr marL="0" indent="0">
               <a:buNone/>
             </a:pPr>
             <a:r>
@@ -20955,7 +20267,7 @@
           <a:bodyPr wrap="square" lIns="0" tIns="0" rIns="0" bIns="0" rtlCol="0" anchor="ctr"/>
           <a:lstStyle/>
           <a:p>
-            <a:pPr algn="ctr" indent="0" marL="0">
+            <a:pPr marL="0" indent="0" algn="ctr">
               <a:buNone/>
             </a:pPr>
             <a:r>
@@ -21019,7 +20331,7 @@
           <a:bodyPr wrap="square" lIns="0" tIns="0" rIns="0" bIns="0" rtlCol="0" anchor="ctr"/>
           <a:lstStyle/>
           <a:p>
-            <a:pPr algn="ctr" indent="0" marL="0">
+            <a:pPr marL="0" indent="0" algn="ctr">
               <a:buNone/>
             </a:pPr>
             <a:r>
@@ -21058,7 +20370,7 @@
           <a:bodyPr wrap="square" lIns="0" tIns="0" rIns="0" bIns="0" rtlCol="0" anchor="ctr"/>
           <a:lstStyle/>
           <a:p>
-            <a:pPr indent="0" marL="0">
+            <a:pPr marL="0" indent="0">
               <a:buNone/>
             </a:pPr>
             <a:r>
@@ -21075,7 +20387,7 @@
             <a:endParaRPr lang="en-US" sz="1100" dirty="0"/>
           </a:p>
           <a:p>
-            <a:pPr indent="0" marL="0">
+            <a:pPr marL="0" indent="0">
               <a:buNone/>
             </a:pPr>
             <a:r>
@@ -21139,7 +20451,7 @@
           <a:bodyPr wrap="square" lIns="0" tIns="0" rIns="0" bIns="0" rtlCol="0" anchor="ctr"/>
           <a:lstStyle/>
           <a:p>
-            <a:pPr algn="ctr" indent="0" marL="0">
+            <a:pPr marL="0" indent="0" algn="ctr">
               <a:buNone/>
             </a:pPr>
             <a:r>
@@ -21178,7 +20490,7 @@
           <a:bodyPr wrap="square" lIns="0" tIns="0" rIns="0" bIns="0" rtlCol="0" anchor="ctr"/>
           <a:lstStyle/>
           <a:p>
-            <a:pPr indent="0" marL="0">
+            <a:pPr marL="0" indent="0">
               <a:buNone/>
             </a:pPr>
             <a:r>
@@ -21195,7 +20507,7 @@
             <a:endParaRPr lang="en-US" sz="1100" dirty="0"/>
           </a:p>
           <a:p>
-            <a:pPr indent="0" marL="0">
+            <a:pPr marL="0" indent="0">
               <a:buNone/>
             </a:pPr>
             <a:r>
@@ -21259,7 +20571,7 @@
           <a:bodyPr wrap="square" lIns="0" tIns="0" rIns="0" bIns="0" rtlCol="0" anchor="ctr"/>
           <a:lstStyle/>
           <a:p>
-            <a:pPr algn="ctr" indent="0" marL="0">
+            <a:pPr marL="0" indent="0" algn="ctr">
               <a:buNone/>
             </a:pPr>
             <a:r>
@@ -21298,7 +20610,7 @@
           <a:bodyPr wrap="square" lIns="0" tIns="0" rIns="0" bIns="0" rtlCol="0" anchor="ctr"/>
           <a:lstStyle/>
           <a:p>
-            <a:pPr indent="0" marL="0">
+            <a:pPr marL="0" indent="0">
               <a:buNone/>
             </a:pPr>
             <a:r>
@@ -21315,7 +20627,7 @@
             <a:endParaRPr lang="en-US" sz="1100" dirty="0"/>
           </a:p>
           <a:p>
-            <a:pPr indent="0" marL="0">
+            <a:pPr marL="0" indent="0">
               <a:buNone/>
             </a:pPr>
             <a:r>
@@ -21379,7 +20691,7 @@
           <a:bodyPr wrap="square" lIns="0" tIns="0" rIns="0" bIns="0" rtlCol="0" anchor="ctr"/>
           <a:lstStyle/>
           <a:p>
-            <a:pPr algn="ctr" indent="0" marL="0">
+            <a:pPr marL="0" indent="0" algn="ctr">
               <a:buNone/>
             </a:pPr>
             <a:r>
@@ -21418,7 +20730,7 @@
           <a:bodyPr wrap="square" lIns="0" tIns="0" rIns="0" bIns="0" rtlCol="0" anchor="ctr"/>
           <a:lstStyle/>
           <a:p>
-            <a:pPr indent="0" marL="0">
+            <a:pPr marL="0" indent="0">
               <a:buNone/>
             </a:pPr>
             <a:r>
@@ -21435,7 +20747,7 @@
             <a:endParaRPr lang="en-US" sz="1100" dirty="0"/>
           </a:p>
           <a:p>
-            <a:pPr indent="0" marL="0">
+            <a:pPr marL="0" indent="0">
               <a:buNone/>
             </a:pPr>
             <a:r>
@@ -21528,7 +20840,7 @@
           <a:bodyPr wrap="square" lIns="0" tIns="0" rIns="0" bIns="0" rtlCol="0" anchor="ctr"/>
           <a:lstStyle/>
           <a:p>
-            <a:pPr algn="ctr" indent="0" marL="0">
+            <a:pPr marL="0" indent="0" algn="ctr">
               <a:buNone/>
             </a:pPr>
             <a:r>
@@ -21588,12 +20900,6 @@
               </a:rPr>
               <a:t>노후도 평가  </a:t>
             </a:r>
-            <a:pPr indent="0" marL="0">
-              <a:lnSpc>
-                <a:spcPct val="115000"/>
-              </a:lnSpc>
-              <a:buNone/>
-            </a:pPr>
             <a:r>
               <a:rPr lang="en-US" sz="1200" dirty="0">
                 <a:solidFill>
@@ -21629,12 +20935,6 @@
               </a:rPr>
               <a:t>안정성 추정  </a:t>
             </a:r>
-            <a:pPr indent="0" marL="0">
-              <a:lnSpc>
-                <a:spcPct val="115000"/>
-              </a:lnSpc>
-              <a:buNone/>
-            </a:pPr>
             <a:r>
               <a:rPr lang="en-US" sz="1200" dirty="0">
                 <a:solidFill>
@@ -21670,12 +20970,6 @@
               </a:rPr>
               <a:t>유지관리 우선순위  </a:t>
             </a:r>
-            <a:pPr indent="0" marL="0">
-              <a:lnSpc>
-                <a:spcPct val="115000"/>
-              </a:lnSpc>
-              <a:buNone/>
-            </a:pPr>
             <a:r>
               <a:rPr lang="en-US" sz="1200" dirty="0">
                 <a:solidFill>
@@ -21739,7 +21033,7 @@
           <a:bodyPr wrap="square" lIns="0" tIns="0" rIns="0" bIns="0" rtlCol="0" anchor="ctr"/>
           <a:lstStyle/>
           <a:p>
-            <a:pPr indent="0" marL="0">
+            <a:pPr marL="0" indent="0">
               <a:buNone/>
             </a:pPr>
             <a:r>
@@ -21753,9 +21047,6 @@
               </a:rPr>
               <a:t>연동 시연은 지금 바로 가능합니다   </a:t>
             </a:r>
-            <a:pPr indent="0" marL="0">
-              <a:buNone/>
-            </a:pPr>
             <a:r>
               <a:rPr lang="en-US" sz="1400" dirty="0">
                 <a:solidFill>
@@ -21792,7 +21083,7 @@
           <a:bodyPr wrap="square" lIns="0" tIns="0" rIns="0" bIns="0" rtlCol="0" anchor="ctr"/>
           <a:lstStyle/>
           <a:p>
-            <a:pPr indent="0" marL="0">
+            <a:pPr marL="0" indent="0">
               <a:buNone/>
             </a:pPr>
             <a:r>
@@ -22111,4 +21402,299 @@
     </a:ext>
   </a:extLst>
 </a:theme>
+</file>
+
+<file path=ppt/theme/theme2.xml><?xml version="1.0" encoding="utf-8"?>
+<a:theme xmlns:a="http://schemas.openxmlformats.org/drawingml/2006/main" name="Office 테마">
+  <a:themeElements>
+    <a:clrScheme name="Office">
+      <a:dk1>
+        <a:sysClr val="windowText" lastClr="000000"/>
+      </a:dk1>
+      <a:lt1>
+        <a:sysClr val="window" lastClr="FFFFFF"/>
+      </a:lt1>
+      <a:dk2>
+        <a:srgbClr val="44546A"/>
+      </a:dk2>
+      <a:lt2>
+        <a:srgbClr val="E7E6E6"/>
+      </a:lt2>
+      <a:accent1>
+        <a:srgbClr val="4472C4"/>
+      </a:accent1>
+      <a:accent2>
+        <a:srgbClr val="ED7D31"/>
+      </a:accent2>
+      <a:accent3>
+        <a:srgbClr val="A5A5A5"/>
+      </a:accent3>
+      <a:accent4>
+        <a:srgbClr val="FFC000"/>
+      </a:accent4>
+      <a:accent5>
+        <a:srgbClr val="5B9BD5"/>
+      </a:accent5>
+      <a:accent6>
+        <a:srgbClr val="70AD47"/>
+      </a:accent6>
+      <a:hlink>
+        <a:srgbClr val="0563C1"/>
+      </a:hlink>
+      <a:folHlink>
+        <a:srgbClr val="954F72"/>
+      </a:folHlink>
+    </a:clrScheme>
+    <a:fontScheme name="Office">
+      <a:majorFont>
+        <a:latin typeface="맑은 고딕" panose="020F0302020204030204"/>
+        <a:ea typeface=""/>
+        <a:cs typeface=""/>
+        <a:font script="Jpan" typeface="游ゴシック Light"/>
+        <a:font script="Hang" typeface="맑은 고딕"/>
+        <a:font script="Hans" typeface="等线 Light"/>
+        <a:font script="Hant" typeface="新細明體"/>
+        <a:font script="Arab" typeface="Times New Roman"/>
+        <a:font script="Hebr" typeface="Times New Roman"/>
+        <a:font script="Thai" typeface="Angsana New"/>
+        <a:font script="Ethi" typeface="Nyala"/>
+        <a:font script="Beng" typeface="Vrinda"/>
+        <a:font script="Gujr" typeface="Shruti"/>
+        <a:font script="Khmr" typeface="MoolBoran"/>
+        <a:font script="Knda" typeface="Tunga"/>
+        <a:font script="Guru" typeface="Raavi"/>
+        <a:font script="Cans" typeface="Euphemia"/>
+        <a:font script="Cher" typeface="Plantagenet Cherokee"/>
+        <a:font script="Yiii" typeface="Microsoft Yi Baiti"/>
+        <a:font script="Tibt" typeface="Microsoft Himalaya"/>
+        <a:font script="Thaa" typeface="MV Boli"/>
+        <a:font script="Deva" typeface="Mangal"/>
+        <a:font script="Telu" typeface="Gautami"/>
+        <a:font script="Taml" typeface="Latha"/>
+        <a:font script="Syrc" typeface="Estrangelo Edessa"/>
+        <a:font script="Orya" typeface="Kalinga"/>
+        <a:font script="Mlym" typeface="Kartika"/>
+        <a:font script="Laoo" typeface="DokChampa"/>
+        <a:font script="Sinh" typeface="Iskoola Pota"/>
+        <a:font script="Mong" typeface="Mongolian Baiti"/>
+        <a:font script="Viet" typeface="Times New Roman"/>
+        <a:font script="Uigh" typeface="Microsoft Uighur"/>
+        <a:font script="Geor" typeface="Sylfaen"/>
+        <a:font script="Armn" typeface="Arial"/>
+        <a:font script="Bugi" typeface="Leelawadee UI"/>
+        <a:font script="Bopo" typeface="Microsoft JhengHei"/>
+        <a:font script="Java" typeface="Javanese Text"/>
+        <a:font script="Lisu" typeface="Segoe UI"/>
+        <a:font script="Mymr" typeface="Myanmar Text"/>
+        <a:font script="Nkoo" typeface="Ebrima"/>
+        <a:font script="Olck" typeface="Nirmala UI"/>
+        <a:font script="Osma" typeface="Ebrima"/>
+        <a:font script="Phag" typeface="Phagspa"/>
+        <a:font script="Syrn" typeface="Estrangelo Edessa"/>
+        <a:font script="Syrj" typeface="Estrangelo Edessa"/>
+        <a:font script="Syre" typeface="Estrangelo Edessa"/>
+        <a:font script="Sora" typeface="Nirmala UI"/>
+        <a:font script="Tale" typeface="Microsoft Tai Le"/>
+        <a:font script="Talu" typeface="Microsoft New Tai Lue"/>
+        <a:font script="Tfng" typeface="Ebrima"/>
+      </a:majorFont>
+      <a:minorFont>
+        <a:latin typeface="맑은 고딕" panose="020F0502020204030204"/>
+        <a:ea typeface=""/>
+        <a:cs typeface=""/>
+        <a:font script="Jpan" typeface="游ゴシック"/>
+        <a:font script="Hang" typeface="맑은 고딕"/>
+        <a:font script="Hans" typeface="等线"/>
+        <a:font script="Hant" typeface="新細明體"/>
+        <a:font script="Arab" typeface="Arial"/>
+        <a:font script="Hebr" typeface="Arial"/>
+        <a:font script="Thai" typeface="Cordia New"/>
+        <a:font script="Ethi" typeface="Nyala"/>
+        <a:font script="Beng" typeface="Vrinda"/>
+        <a:font script="Gujr" typeface="Shruti"/>
+        <a:font script="Khmr" typeface="DaunPenh"/>
+        <a:font script="Knda" typeface="Tunga"/>
+        <a:font script="Guru" typeface="Raavi"/>
+        <a:font script="Cans" typeface="Euphemia"/>
+        <a:font script="Cher" typeface="Plantagenet Cherokee"/>
+        <a:font script="Yiii" typeface="Microsoft Yi Baiti"/>
+        <a:font script="Tibt" typeface="Microsoft Himalaya"/>
+        <a:font script="Thaa" typeface="MV Boli"/>
+        <a:font script="Deva" typeface="Mangal"/>
+        <a:font script="Telu" typeface="Gautami"/>
+        <a:font script="Taml" typeface="Latha"/>
+        <a:font script="Syrc" typeface="Estrangelo Edessa"/>
+        <a:font script="Orya" typeface="Kalinga"/>
+        <a:font script="Mlym" typeface="Kartika"/>
+        <a:font script="Laoo" typeface="DokChampa"/>
+        <a:font script="Sinh" typeface="Iskoola Pota"/>
+        <a:font script="Mong" typeface="Mongolian Baiti"/>
+        <a:font script="Viet" typeface="Arial"/>
+        <a:font script="Uigh" typeface="Microsoft Uighur"/>
+        <a:font script="Geor" typeface="Sylfaen"/>
+        <a:font script="Armn" typeface="Arial"/>
+        <a:font script="Bugi" typeface="Leelawadee UI"/>
+        <a:font script="Bopo" typeface="Microsoft JhengHei"/>
+        <a:font script="Java" typeface="Javanese Text"/>
+        <a:font script="Lisu" typeface="Segoe UI"/>
+        <a:font script="Mymr" typeface="Myanmar Text"/>
+        <a:font script="Nkoo" typeface="Ebrima"/>
+        <a:font script="Olck" typeface="Nirmala UI"/>
+        <a:font script="Osma" typeface="Ebrima"/>
+        <a:font script="Phag" typeface="Phagspa"/>
+        <a:font script="Syrn" typeface="Estrangelo Edessa"/>
+        <a:font script="Syrj" typeface="Estrangelo Edessa"/>
+        <a:font script="Syre" typeface="Estrangelo Edessa"/>
+        <a:font script="Sora" typeface="Nirmala UI"/>
+        <a:font script="Tale" typeface="Microsoft Tai Le"/>
+        <a:font script="Talu" typeface="Microsoft New Tai Lue"/>
+        <a:font script="Tfng" typeface="Ebrima"/>
+      </a:minorFont>
+    </a:fontScheme>
+    <a:fmtScheme name="Office">
+      <a:fillStyleLst>
+        <a:solidFill>
+          <a:schemeClr val="phClr"/>
+        </a:solidFill>
+        <a:gradFill rotWithShape="1">
+          <a:gsLst>
+            <a:gs pos="0">
+              <a:schemeClr val="phClr">
+                <a:lumMod val="110000"/>
+                <a:satMod val="105000"/>
+                <a:tint val="67000"/>
+              </a:schemeClr>
+            </a:gs>
+            <a:gs pos="50000">
+              <a:schemeClr val="phClr">
+                <a:lumMod val="105000"/>
+                <a:satMod val="103000"/>
+                <a:tint val="73000"/>
+              </a:schemeClr>
+            </a:gs>
+            <a:gs pos="100000">
+              <a:schemeClr val="phClr">
+                <a:lumMod val="105000"/>
+                <a:satMod val="109000"/>
+                <a:tint val="81000"/>
+              </a:schemeClr>
+            </a:gs>
+          </a:gsLst>
+          <a:lin ang="5400000" scaled="0"/>
+        </a:gradFill>
+        <a:gradFill rotWithShape="1">
+          <a:gsLst>
+            <a:gs pos="0">
+              <a:schemeClr val="phClr">
+                <a:satMod val="103000"/>
+                <a:lumMod val="102000"/>
+                <a:tint val="94000"/>
+              </a:schemeClr>
+            </a:gs>
+            <a:gs pos="50000">
+              <a:schemeClr val="phClr">
+                <a:satMod val="110000"/>
+                <a:lumMod val="100000"/>
+                <a:shade val="100000"/>
+              </a:schemeClr>
+            </a:gs>
+            <a:gs pos="100000">
+              <a:schemeClr val="phClr">
+                <a:lumMod val="99000"/>
+                <a:satMod val="120000"/>
+                <a:shade val="78000"/>
+              </a:schemeClr>
+            </a:gs>
+          </a:gsLst>
+          <a:lin ang="5400000" scaled="0"/>
+        </a:gradFill>
+      </a:fillStyleLst>
+      <a:lnStyleLst>
+        <a:ln w="6350" cap="flat" cmpd="sng" algn="ctr">
+          <a:solidFill>
+            <a:schemeClr val="phClr"/>
+          </a:solidFill>
+          <a:prstDash val="solid"/>
+          <a:miter lim="800000"/>
+        </a:ln>
+        <a:ln w="12700" cap="flat" cmpd="sng" algn="ctr">
+          <a:solidFill>
+            <a:schemeClr val="phClr"/>
+          </a:solidFill>
+          <a:prstDash val="solid"/>
+          <a:miter lim="800000"/>
+        </a:ln>
+        <a:ln w="19050" cap="flat" cmpd="sng" algn="ctr">
+          <a:solidFill>
+            <a:schemeClr val="phClr"/>
+          </a:solidFill>
+          <a:prstDash val="solid"/>
+          <a:miter lim="800000"/>
+        </a:ln>
+      </a:lnStyleLst>
+      <a:effectStyleLst>
+        <a:effectStyle>
+          <a:effectLst/>
+        </a:effectStyle>
+        <a:effectStyle>
+          <a:effectLst/>
+        </a:effectStyle>
+        <a:effectStyle>
+          <a:effectLst>
+            <a:outerShdw blurRad="57150" dist="19050" dir="5400000" algn="ctr" rotWithShape="0">
+              <a:srgbClr val="000000">
+                <a:alpha val="63000"/>
+              </a:srgbClr>
+            </a:outerShdw>
+          </a:effectLst>
+        </a:effectStyle>
+      </a:effectStyleLst>
+      <a:bgFillStyleLst>
+        <a:solidFill>
+          <a:schemeClr val="phClr"/>
+        </a:solidFill>
+        <a:solidFill>
+          <a:schemeClr val="phClr">
+            <a:tint val="95000"/>
+            <a:satMod val="170000"/>
+          </a:schemeClr>
+        </a:solidFill>
+        <a:gradFill rotWithShape="1">
+          <a:gsLst>
+            <a:gs pos="0">
+              <a:schemeClr val="phClr">
+                <a:tint val="93000"/>
+                <a:satMod val="150000"/>
+                <a:shade val="98000"/>
+                <a:lumMod val="102000"/>
+              </a:schemeClr>
+            </a:gs>
+            <a:gs pos="50000">
+              <a:schemeClr val="phClr">
+                <a:tint val="98000"/>
+                <a:satMod val="130000"/>
+                <a:shade val="90000"/>
+                <a:lumMod val="103000"/>
+              </a:schemeClr>
+            </a:gs>
+            <a:gs pos="100000">
+              <a:schemeClr val="phClr">
+                <a:shade val="63000"/>
+                <a:satMod val="120000"/>
+              </a:schemeClr>
+            </a:gs>
+          </a:gsLst>
+          <a:lin ang="5400000" scaled="0"/>
+        </a:gradFill>
+      </a:bgFillStyleLst>
+    </a:fmtScheme>
+  </a:themeElements>
+  <a:objectDefaults/>
+  <a:extraClrSchemeLst/>
+  <a:extLst>
+    <a:ext uri="{05A4C25C-085E-4340-85A3-A5531E510DB2}">
+      <thm15:themeFamily xmlns:thm15="http://schemas.microsoft.com/office/thememl/2012/main" name="Office Theme" id="{62F939B6-93AF-4DB8-9C6B-D6C7DFDC589F}" vid="{4A3C46E8-61CC-4603-A589-7422A47A8E4A}"/>
+    </a:ext>
+  </a:extLst>
+</a:theme>
 </file>
--- a/docs/KICT_Bmaps_Inframon_연구개발_7p_1.pptx
+++ b/docs/KICT_Bmaps_Inframon_연구개발_7p_1.pptx
@@ -6388,7 +6388,7 @@
                 <a:ea typeface="Paperlogy 5 Medium" pitchFamily="34" charset="-122"/>
                 <a:cs typeface="Paperlogy 5 Medium" pitchFamily="34" charset="-120"/>
               </a:rPr>
-              <a:t>공명 위험 지수(CRI) 산출</a:t>
+              <a:t>위험 지수(CRI) 산출</a:t>
             </a:r>
             <a:endParaRPr lang="en-US" sz="1050" dirty="0"/>
           </a:p>
@@ -7000,7 +7000,7 @@
                           <a:ea typeface="Paperlogy 7 Bold" pitchFamily="34" charset="-122"/>
                           <a:cs typeface="Paperlogy 7 Bold" pitchFamily="34" charset="-120"/>
                         </a:rPr>
-                        <a:t>현재 달성</a:t>
+                        <a:t>지금 단계</a:t>
                       </a:r>
                       <a:endParaRPr lang="en-US" sz="1100" dirty="0">
                         <a:latin typeface="Paperlogy 7 Bold" charset="0"/>
@@ -8116,7 +8116,7 @@
                           <a:ea typeface="Paperlogy 7 Bold" pitchFamily="34" charset="-122"/>
                           <a:cs typeface="Paperlogy 7 Bold" pitchFamily="34" charset="-120"/>
                         </a:rPr>
-                        <a:t>REST 12개 · 탭 예제 구현</a:t>
+                        <a:t>REST 사이드카 · 탭 예제 구현</a:t>
                       </a:r>
                       <a:endParaRPr lang="en-US" sz="1100" dirty="0">
                         <a:latin typeface="Paperlogy 7 Bold" charset="0"/>
@@ -8278,7 +8278,7 @@
                 <a:ea typeface="Paperlogy 5 Medium" pitchFamily="34" charset="-122"/>
                 <a:cs typeface="Paperlogy 5 Medium" pitchFamily="34" charset="-120"/>
               </a:rPr>
-              <a:t>※ 현재 달성 = 실제 Sentinel-1 자료(ASC path127, 2018-06-19 ~ 2025-12-27) 처리 결과 기준.</a:t>
+              <a:t>※ 지금 단계 = 실제 Sentinel-1 자료(ASC path127, 2018-06-19 ~ 2025-12-27)로 전 과정을 돌려 본 결과다. 정확도 지표는 계측 대조와 측점 밀도 확보 뒤에 제시한다.</a:t>
             </a:r>
             <a:endParaRPr lang="en-US" sz="850" dirty="0"/>
           </a:p>
@@ -9986,7 +9986,7 @@
                 <a:ea typeface="Paperlogy 7 Bold" pitchFamily="34" charset="-122"/>
                 <a:cs typeface="Paperlogy 7 Bold" pitchFamily="34" charset="-120"/>
               </a:rPr>
-              <a:t>④ FRAM · 위험도</a:t>
+              <a:t>④ 위험도 평가</a:t>
             </a:r>
             <a:endParaRPr lang="en-US" sz="1200" dirty="0"/>
           </a:p>
@@ -10032,7 +10032,7 @@
                 <a:ea typeface="Paperlogy 5 Medium" pitchFamily="34" charset="-122"/>
                 <a:cs typeface="Paperlogy 5 Medium" pitchFamily="34" charset="-120"/>
               </a:rPr>
-              <a:t>공명 위험 지수 CRI</a:t>
+              <a:t>위험 지수 CRI 산출</a:t>
             </a:r>
             <a:endParaRPr lang="en-US" sz="1050" dirty="0"/>
           </a:p>
@@ -10080,7 +10080,7 @@
                 <a:ea typeface="Paperlogy 5 Medium" pitchFamily="34" charset="-122"/>
                 <a:cs typeface="Paperlogy 5 Medium" pitchFamily="34" charset="-120"/>
               </a:rPr>
-              <a:t>잔존수명 추정</a:t>
+              <a:t>등급 기준은 잠정</a:t>
             </a:r>
             <a:endParaRPr lang="en-US" sz="1050" dirty="0"/>
           </a:p>
@@ -10568,7 +10568,7 @@
                 <a:ea typeface="Paperlogy 7 Bold" pitchFamily="34" charset="-122"/>
                 <a:cs typeface="Paperlogy 7 Bold" pitchFamily="34" charset="-120"/>
               </a:rPr>
-              <a:t>품질 게이트</a:t>
+              <a:t>근거 기록</a:t>
             </a:r>
             <a:endParaRPr lang="en-US" sz="1100" dirty="0"/>
           </a:p>
@@ -10588,7 +10588,7 @@
                 <a:ea typeface="Paperlogy 5 Medium" pitchFamily="34" charset="-122"/>
                 <a:cs typeface="Paperlogy 5 Medium" pitchFamily="34" charset="-120"/>
               </a:rPr>
-              <a:t>기준 미달 결과는 자동으로 전송 보류</a:t>
+              <a:t>관측 조건과 신뢰구간을 결과에 함께 남긴다</a:t>
             </a:r>
             <a:endParaRPr lang="en-US" sz="1100" dirty="0"/>
           </a:p>
@@ -11004,7 +11004,7 @@
                 <a:ea typeface="Paperlogy 5 Medium" pitchFamily="34" charset="-122"/>
                 <a:cs typeface="Paperlogy 5 Medium" pitchFamily="34" charset="-120"/>
               </a:rPr>
-              <a:t>전 과정 관통 교량</a:t>
+              <a:t>전 과정 시범 처리 교량</a:t>
             </a:r>
             <a:endParaRPr lang="en-US" sz="1000" dirty="0"/>
           </a:p>
@@ -11070,7 +11070,7 @@
                 <a:ea typeface="Paperlogy 7 Bold" pitchFamily="34" charset="-122"/>
                 <a:cs typeface="Paperlogy 7 Bold" pitchFamily="34" charset="-120"/>
               </a:rPr>
-              <a:t>16/16</a:t>
+              <a:t>16</a:t>
             </a:r>
             <a:r>
               <a:rPr lang="en-US" sz="1200" dirty="0">
@@ -11123,7 +11123,7 @@
                 <a:ea typeface="Paperlogy 5 Medium" pitchFamily="34" charset="-122"/>
                 <a:cs typeface="Paperlogy 5 Medium" pitchFamily="34" charset="-120"/>
               </a:rPr>
-              <a:t>한강 교량 IFC 트윈</a:t>
+              <a:t>한강 교량 트윈 시범</a:t>
             </a:r>
             <a:endParaRPr lang="en-US" sz="1000" dirty="0"/>
           </a:p>
@@ -11985,45 +11985,38 @@
         </p:nvGraphicFramePr>
         <p:xfrm>
           <a:off x="411480" y="1280160"/>
-          <a:ext cx="5715000" cy="2706624"/>
+          <a:ext cx="5715001" cy="2706624"/>
         </p:xfrm>
         <a:graphic>
           <a:graphicData uri="http://schemas.openxmlformats.org/drawingml/2006/table">
             <a:tbl>
               <a:tblPr/>
               <a:tblGrid>
-                <a:gridCol w="1318846">
+                <a:gridCol w="1672683">
                   <a:extLst>
                     <a:ext uri="{9D8B030D-6E8A-4147-A177-3AD203B41FA5}">
                       <a16:colId xmlns:a16="http://schemas.microsoft.com/office/drawing/2014/main" val="20000"/>
                     </a:ext>
                   </a:extLst>
                 </a:gridCol>
-                <a:gridCol w="1099038">
+                <a:gridCol w="1393902">
                   <a:extLst>
                     <a:ext uri="{9D8B030D-6E8A-4147-A177-3AD203B41FA5}">
                       <a16:colId xmlns:a16="http://schemas.microsoft.com/office/drawing/2014/main" val="20001"/>
                     </a:ext>
                   </a:extLst>
                 </a:gridCol>
-                <a:gridCol w="1044087">
+                <a:gridCol w="1324208">
                   <a:extLst>
                     <a:ext uri="{9D8B030D-6E8A-4147-A177-3AD203B41FA5}">
                       <a16:colId xmlns:a16="http://schemas.microsoft.com/office/drawing/2014/main" val="20002"/>
                     </a:ext>
                   </a:extLst>
                 </a:gridCol>
-                <a:gridCol w="1044087">
+                <a:gridCol w="1324208">
                   <a:extLst>
                     <a:ext uri="{9D8B030D-6E8A-4147-A177-3AD203B41FA5}">
                       <a16:colId xmlns:a16="http://schemas.microsoft.com/office/drawing/2014/main" val="20003"/>
-                    </a:ext>
-                  </a:extLst>
-                </a:gridCol>
-                <a:gridCol w="1208942">
-                  <a:extLst>
-                    <a:ext uri="{9D8B030D-6E8A-4147-A177-3AD203B41FA5}">
-                      <a16:colId xmlns:a16="http://schemas.microsoft.com/office/drawing/2014/main" val="20004"/>
                     </a:ext>
                   </a:extLst>
                 </a:gridCol>
@@ -12251,74 +12244,6 @@
                           <a:cs typeface="Paperlogy 7 Bold" pitchFamily="34" charset="-120"/>
                         </a:rPr>
                         <a:t>교면 측점</a:t>
-                      </a:r>
-                      <a:endParaRPr lang="en-US" sz="1050" dirty="0">
-                        <a:latin typeface="Paperlogy 7 Bold" charset="0"/>
-                        <a:ea typeface="Paperlogy 7 Bold" charset="0"/>
-                        <a:cs typeface="Paperlogy 7 Bold" charset="0"/>
-                      </a:endParaRPr>
-                    </a:p>
-                  </a:txBody>
-                  <a:tcPr marL="73152" marR="45720" marT="0" marB="0" anchor="ctr">
-                    <a:lnL w="6350" cap="flat" cmpd="sng" algn="ctr">
-                      <a:solidFill>
-                        <a:srgbClr val="E3E6EA"/>
-                      </a:solidFill>
-                      <a:prstDash val="solid"/>
-                      <a:round/>
-                      <a:headEnd type="none" w="med" len="med"/>
-                      <a:tailEnd type="none" w="med" len="med"/>
-                    </a:lnL>
-                    <a:lnR w="6350" cap="flat" cmpd="sng" algn="ctr">
-                      <a:solidFill>
-                        <a:srgbClr val="E3E6EA"/>
-                      </a:solidFill>
-                      <a:prstDash val="solid"/>
-                      <a:round/>
-                      <a:headEnd type="none" w="med" len="med"/>
-                      <a:tailEnd type="none" w="med" len="med"/>
-                    </a:lnR>
-                    <a:lnT w="6350" cap="flat" cmpd="sng" algn="ctr">
-                      <a:solidFill>
-                        <a:srgbClr val="E3E6EA"/>
-                      </a:solidFill>
-                      <a:prstDash val="solid"/>
-                      <a:round/>
-                      <a:headEnd type="none" w="med" len="med"/>
-                      <a:tailEnd type="none" w="med" len="med"/>
-                    </a:lnT>
-                    <a:lnB w="6350" cap="flat" cmpd="sng" algn="ctr">
-                      <a:solidFill>
-                        <a:srgbClr val="E3E6EA"/>
-                      </a:solidFill>
-                      <a:prstDash val="solid"/>
-                      <a:round/>
-                      <a:headEnd type="none" w="med" len="med"/>
-                      <a:tailEnd type="none" w="med" len="med"/>
-                    </a:lnB>
-                    <a:solidFill>
-                      <a:srgbClr val="373D47"/>
-                    </a:solidFill>
-                  </a:tcPr>
-                </a:tc>
-                <a:tc>
-                  <a:txBody>
-                    <a:bodyPr/>
-                    <a:lstStyle/>
-                    <a:p>
-                      <a:pPr marL="0" indent="0" algn="ctr">
-                        <a:buNone/>
-                      </a:pPr>
-                      <a:r>
-                        <a:rPr lang="en-US" sz="1050" dirty="0">
-                          <a:solidFill>
-                            <a:srgbClr val="FFFFFF"/>
-                          </a:solidFill>
-                          <a:latin typeface="Paperlogy 7 Bold" pitchFamily="34" charset="0"/>
-                          <a:ea typeface="Paperlogy 7 Bold" pitchFamily="34" charset="-122"/>
-                          <a:cs typeface="Paperlogy 7 Bold" pitchFamily="34" charset="-120"/>
-                        </a:rPr>
-                        <a:t>연 변위속도</a:t>
                       </a:r>
                       <a:endParaRPr lang="en-US" sz="1050" dirty="0">
                         <a:latin typeface="Paperlogy 7 Bold" charset="0"/>
@@ -12648,74 +12573,6 @@
                     </a:solidFill>
                   </a:tcPr>
                 </a:tc>
-                <a:tc>
-                  <a:txBody>
-                    <a:bodyPr/>
-                    <a:lstStyle/>
-                    <a:p>
-                      <a:pPr marL="0" indent="0" algn="ctr">
-                        <a:buNone/>
-                      </a:pPr>
-                      <a:r>
-                        <a:rPr lang="en-US" sz="1050" dirty="0">
-                          <a:solidFill>
-                            <a:srgbClr val="373D47"/>
-                          </a:solidFill>
-                          <a:latin typeface="Paperlogy 5 Medium" pitchFamily="34" charset="0"/>
-                          <a:ea typeface="Paperlogy 5 Medium" pitchFamily="34" charset="-122"/>
-                          <a:cs typeface="Paperlogy 5 Medium" pitchFamily="34" charset="-120"/>
-                        </a:rPr>
-                        <a:t>+0.17 mm</a:t>
-                      </a:r>
-                      <a:endParaRPr lang="en-US" sz="1050" dirty="0">
-                        <a:latin typeface="Paperlogy 5 Medium" charset="0"/>
-                        <a:ea typeface="Paperlogy 5 Medium" charset="0"/>
-                        <a:cs typeface="Paperlogy 5 Medium" charset="0"/>
-                      </a:endParaRPr>
-                    </a:p>
-                  </a:txBody>
-                  <a:tcPr marL="73152" marR="45720" marT="0" marB="0" anchor="ctr">
-                    <a:lnL w="6350" cap="flat" cmpd="sng" algn="ctr">
-                      <a:solidFill>
-                        <a:srgbClr val="E3E6EA"/>
-                      </a:solidFill>
-                      <a:prstDash val="solid"/>
-                      <a:round/>
-                      <a:headEnd type="none" w="med" len="med"/>
-                      <a:tailEnd type="none" w="med" len="med"/>
-                    </a:lnL>
-                    <a:lnR w="6350" cap="flat" cmpd="sng" algn="ctr">
-                      <a:solidFill>
-                        <a:srgbClr val="E3E6EA"/>
-                      </a:solidFill>
-                      <a:prstDash val="solid"/>
-                      <a:round/>
-                      <a:headEnd type="none" w="med" len="med"/>
-                      <a:tailEnd type="none" w="med" len="med"/>
-                    </a:lnR>
-                    <a:lnT w="6350" cap="flat" cmpd="sng" algn="ctr">
-                      <a:solidFill>
-                        <a:srgbClr val="E3E6EA"/>
-                      </a:solidFill>
-                      <a:prstDash val="solid"/>
-                      <a:round/>
-                      <a:headEnd type="none" w="med" len="med"/>
-                      <a:tailEnd type="none" w="med" len="med"/>
-                    </a:lnT>
-                    <a:lnB w="6350" cap="flat" cmpd="sng" algn="ctr">
-                      <a:solidFill>
-                        <a:srgbClr val="E3E6EA"/>
-                      </a:solidFill>
-                      <a:prstDash val="solid"/>
-                      <a:round/>
-                      <a:headEnd type="none" w="med" len="med"/>
-                      <a:tailEnd type="none" w="med" len="med"/>
-                    </a:lnB>
-                    <a:solidFill>
-                      <a:srgbClr val="FFFFFF"/>
-                    </a:solidFill>
-                  </a:tcPr>
-                </a:tc>
                 <a:extLst>
                   <a:ext uri="{0D108BD9-81ED-4DB2-BD59-A6C34878D82A}">
                     <a16:rowId xmlns:a16="http://schemas.microsoft.com/office/drawing/2014/main" val="10001"/>
@@ -12945,74 +12802,6 @@
                           <a:cs typeface="Paperlogy 5 Medium" pitchFamily="34" charset="-120"/>
                         </a:rPr>
                         <a:t>45</a:t>
-                      </a:r>
-                      <a:endParaRPr lang="en-US" sz="1050" dirty="0">
-                        <a:latin typeface="Paperlogy 5 Medium" charset="0"/>
-                        <a:ea typeface="Paperlogy 5 Medium" charset="0"/>
-                        <a:cs typeface="Paperlogy 5 Medium" charset="0"/>
-                      </a:endParaRPr>
-                    </a:p>
-                  </a:txBody>
-                  <a:tcPr marL="73152" marR="45720" marT="0" marB="0" anchor="ctr">
-                    <a:lnL w="6350" cap="flat" cmpd="sng" algn="ctr">
-                      <a:solidFill>
-                        <a:srgbClr val="E3E6EA"/>
-                      </a:solidFill>
-                      <a:prstDash val="solid"/>
-                      <a:round/>
-                      <a:headEnd type="none" w="med" len="med"/>
-                      <a:tailEnd type="none" w="med" len="med"/>
-                    </a:lnL>
-                    <a:lnR w="6350" cap="flat" cmpd="sng" algn="ctr">
-                      <a:solidFill>
-                        <a:srgbClr val="E3E6EA"/>
-                      </a:solidFill>
-                      <a:prstDash val="solid"/>
-                      <a:round/>
-                      <a:headEnd type="none" w="med" len="med"/>
-                      <a:tailEnd type="none" w="med" len="med"/>
-                    </a:lnR>
-                    <a:lnT w="6350" cap="flat" cmpd="sng" algn="ctr">
-                      <a:solidFill>
-                        <a:srgbClr val="E3E6EA"/>
-                      </a:solidFill>
-                      <a:prstDash val="solid"/>
-                      <a:round/>
-                      <a:headEnd type="none" w="med" len="med"/>
-                      <a:tailEnd type="none" w="med" len="med"/>
-                    </a:lnT>
-                    <a:lnB w="6350" cap="flat" cmpd="sng" algn="ctr">
-                      <a:solidFill>
-                        <a:srgbClr val="E3E6EA"/>
-                      </a:solidFill>
-                      <a:prstDash val="solid"/>
-                      <a:round/>
-                      <a:headEnd type="none" w="med" len="med"/>
-                      <a:tailEnd type="none" w="med" len="med"/>
-                    </a:lnB>
-                    <a:solidFill>
-                      <a:srgbClr val="F5F7F9"/>
-                    </a:solidFill>
-                  </a:tcPr>
-                </a:tc>
-                <a:tc>
-                  <a:txBody>
-                    <a:bodyPr/>
-                    <a:lstStyle/>
-                    <a:p>
-                      <a:pPr marL="0" indent="0" algn="ctr">
-                        <a:buNone/>
-                      </a:pPr>
-                      <a:r>
-                        <a:rPr lang="en-US" sz="1050" dirty="0">
-                          <a:solidFill>
-                            <a:srgbClr val="373D47"/>
-                          </a:solidFill>
-                          <a:latin typeface="Paperlogy 5 Medium" pitchFamily="34" charset="0"/>
-                          <a:ea typeface="Paperlogy 5 Medium" pitchFamily="34" charset="-122"/>
-                          <a:cs typeface="Paperlogy 5 Medium" pitchFamily="34" charset="-120"/>
-                        </a:rPr>
-                        <a:t>−0.36 mm</a:t>
                       </a:r>
                       <a:endParaRPr lang="en-US" sz="1050" dirty="0">
                         <a:latin typeface="Paperlogy 5 Medium" charset="0"/>
@@ -13342,74 +13131,6 @@
                     </a:solidFill>
                   </a:tcPr>
                 </a:tc>
-                <a:tc>
-                  <a:txBody>
-                    <a:bodyPr/>
-                    <a:lstStyle/>
-                    <a:p>
-                      <a:pPr marL="0" indent="0" algn="ctr">
-                        <a:buNone/>
-                      </a:pPr>
-                      <a:r>
-                        <a:rPr lang="en-US" sz="1050" dirty="0">
-                          <a:solidFill>
-                            <a:srgbClr val="373D47"/>
-                          </a:solidFill>
-                          <a:latin typeface="Paperlogy 5 Medium" pitchFamily="34" charset="0"/>
-                          <a:ea typeface="Paperlogy 5 Medium" pitchFamily="34" charset="-122"/>
-                          <a:cs typeface="Paperlogy 5 Medium" pitchFamily="34" charset="-120"/>
-                        </a:rPr>
-                        <a:t>−1.38 mm</a:t>
-                      </a:r>
-                      <a:endParaRPr lang="en-US" sz="1050" dirty="0">
-                        <a:latin typeface="Paperlogy 5 Medium" charset="0"/>
-                        <a:ea typeface="Paperlogy 5 Medium" charset="0"/>
-                        <a:cs typeface="Paperlogy 5 Medium" charset="0"/>
-                      </a:endParaRPr>
-                    </a:p>
-                  </a:txBody>
-                  <a:tcPr marL="73152" marR="45720" marT="0" marB="0" anchor="ctr">
-                    <a:lnL w="6350" cap="flat" cmpd="sng" algn="ctr">
-                      <a:solidFill>
-                        <a:srgbClr val="E3E6EA"/>
-                      </a:solidFill>
-                      <a:prstDash val="solid"/>
-                      <a:round/>
-                      <a:headEnd type="none" w="med" len="med"/>
-                      <a:tailEnd type="none" w="med" len="med"/>
-                    </a:lnL>
-                    <a:lnR w="6350" cap="flat" cmpd="sng" algn="ctr">
-                      <a:solidFill>
-                        <a:srgbClr val="E3E6EA"/>
-                      </a:solidFill>
-                      <a:prstDash val="solid"/>
-                      <a:round/>
-                      <a:headEnd type="none" w="med" len="med"/>
-                      <a:tailEnd type="none" w="med" len="med"/>
-                    </a:lnR>
-                    <a:lnT w="6350" cap="flat" cmpd="sng" algn="ctr">
-                      <a:solidFill>
-                        <a:srgbClr val="E3E6EA"/>
-                      </a:solidFill>
-                      <a:prstDash val="solid"/>
-                      <a:round/>
-                      <a:headEnd type="none" w="med" len="med"/>
-                      <a:tailEnd type="none" w="med" len="med"/>
-                    </a:lnT>
-                    <a:lnB w="6350" cap="flat" cmpd="sng" algn="ctr">
-                      <a:solidFill>
-                        <a:srgbClr val="E3E6EA"/>
-                      </a:solidFill>
-                      <a:prstDash val="solid"/>
-                      <a:round/>
-                      <a:headEnd type="none" w="med" len="med"/>
-                      <a:tailEnd type="none" w="med" len="med"/>
-                    </a:lnB>
-                    <a:solidFill>
-                      <a:srgbClr val="FFFFFF"/>
-                    </a:solidFill>
-                  </a:tcPr>
-                </a:tc>
                 <a:extLst>
                   <a:ext uri="{0D108BD9-81ED-4DB2-BD59-A6C34878D82A}">
                     <a16:rowId xmlns:a16="http://schemas.microsoft.com/office/drawing/2014/main" val="10003"/>
@@ -13639,74 +13360,6 @@
                           <a:cs typeface="Paperlogy 5 Medium" pitchFamily="34" charset="-120"/>
                         </a:rPr>
                         <a:t>20</a:t>
-                      </a:r>
-                      <a:endParaRPr lang="en-US" sz="1050" dirty="0">
-                        <a:latin typeface="Paperlogy 5 Medium" charset="0"/>
-                        <a:ea typeface="Paperlogy 5 Medium" charset="0"/>
-                        <a:cs typeface="Paperlogy 5 Medium" charset="0"/>
-                      </a:endParaRPr>
-                    </a:p>
-                  </a:txBody>
-                  <a:tcPr marL="73152" marR="45720" marT="0" marB="0" anchor="ctr">
-                    <a:lnL w="6350" cap="flat" cmpd="sng" algn="ctr">
-                      <a:solidFill>
-                        <a:srgbClr val="E3E6EA"/>
-                      </a:solidFill>
-                      <a:prstDash val="solid"/>
-                      <a:round/>
-                      <a:headEnd type="none" w="med" len="med"/>
-                      <a:tailEnd type="none" w="med" len="med"/>
-                    </a:lnL>
-                    <a:lnR w="6350" cap="flat" cmpd="sng" algn="ctr">
-                      <a:solidFill>
-                        <a:srgbClr val="E3E6EA"/>
-                      </a:solidFill>
-                      <a:prstDash val="solid"/>
-                      <a:round/>
-                      <a:headEnd type="none" w="med" len="med"/>
-                      <a:tailEnd type="none" w="med" len="med"/>
-                    </a:lnR>
-                    <a:lnT w="6350" cap="flat" cmpd="sng" algn="ctr">
-                      <a:solidFill>
-                        <a:srgbClr val="E3E6EA"/>
-                      </a:solidFill>
-                      <a:prstDash val="solid"/>
-                      <a:round/>
-                      <a:headEnd type="none" w="med" len="med"/>
-                      <a:tailEnd type="none" w="med" len="med"/>
-                    </a:lnT>
-                    <a:lnB w="6350" cap="flat" cmpd="sng" algn="ctr">
-                      <a:solidFill>
-                        <a:srgbClr val="E3E6EA"/>
-                      </a:solidFill>
-                      <a:prstDash val="solid"/>
-                      <a:round/>
-                      <a:headEnd type="none" w="med" len="med"/>
-                      <a:tailEnd type="none" w="med" len="med"/>
-                    </a:lnB>
-                    <a:solidFill>
-                      <a:srgbClr val="F5F7F9"/>
-                    </a:solidFill>
-                  </a:tcPr>
-                </a:tc>
-                <a:tc>
-                  <a:txBody>
-                    <a:bodyPr/>
-                    <a:lstStyle/>
-                    <a:p>
-                      <a:pPr marL="0" indent="0" algn="ctr">
-                        <a:buNone/>
-                      </a:pPr>
-                      <a:r>
-                        <a:rPr lang="en-US" sz="1050" dirty="0">
-                          <a:solidFill>
-                            <a:srgbClr val="373D47"/>
-                          </a:solidFill>
-                          <a:latin typeface="Paperlogy 5 Medium" pitchFamily="34" charset="0"/>
-                          <a:ea typeface="Paperlogy 5 Medium" pitchFamily="34" charset="-122"/>
-                          <a:cs typeface="Paperlogy 5 Medium" pitchFamily="34" charset="-120"/>
-                        </a:rPr>
-                        <a:t>−0.99 mm</a:t>
                       </a:r>
                       <a:endParaRPr lang="en-US" sz="1050" dirty="0">
                         <a:latin typeface="Paperlogy 5 Medium" charset="0"/>
@@ -14036,74 +13689,6 @@
                     </a:solidFill>
                   </a:tcPr>
                 </a:tc>
-                <a:tc>
-                  <a:txBody>
-                    <a:bodyPr/>
-                    <a:lstStyle/>
-                    <a:p>
-                      <a:pPr marL="0" indent="0" algn="ctr">
-                        <a:buNone/>
-                      </a:pPr>
-                      <a:r>
-                        <a:rPr lang="en-US" sz="1050" dirty="0">
-                          <a:solidFill>
-                            <a:srgbClr val="373D47"/>
-                          </a:solidFill>
-                          <a:latin typeface="Paperlogy 5 Medium" pitchFamily="34" charset="0"/>
-                          <a:ea typeface="Paperlogy 5 Medium" pitchFamily="34" charset="-122"/>
-                          <a:cs typeface="Paperlogy 5 Medium" pitchFamily="34" charset="-120"/>
-                        </a:rPr>
-                        <a:t>−0.66 mm</a:t>
-                      </a:r>
-                      <a:endParaRPr lang="en-US" sz="1050" dirty="0">
-                        <a:latin typeface="Paperlogy 5 Medium" charset="0"/>
-                        <a:ea typeface="Paperlogy 5 Medium" charset="0"/>
-                        <a:cs typeface="Paperlogy 5 Medium" charset="0"/>
-                      </a:endParaRPr>
-                    </a:p>
-                  </a:txBody>
-                  <a:tcPr marL="73152" marR="45720" marT="0" marB="0" anchor="ctr">
-                    <a:lnL w="6350" cap="flat" cmpd="sng" algn="ctr">
-                      <a:solidFill>
-                        <a:srgbClr val="E3E6EA"/>
-                      </a:solidFill>
-                      <a:prstDash val="solid"/>
-                      <a:round/>
-                      <a:headEnd type="none" w="med" len="med"/>
-                      <a:tailEnd type="none" w="med" len="med"/>
-                    </a:lnL>
-                    <a:lnR w="6350" cap="flat" cmpd="sng" algn="ctr">
-                      <a:solidFill>
-                        <a:srgbClr val="E3E6EA"/>
-                      </a:solidFill>
-                      <a:prstDash val="solid"/>
-                      <a:round/>
-                      <a:headEnd type="none" w="med" len="med"/>
-                      <a:tailEnd type="none" w="med" len="med"/>
-                    </a:lnR>
-                    <a:lnT w="6350" cap="flat" cmpd="sng" algn="ctr">
-                      <a:solidFill>
-                        <a:srgbClr val="E3E6EA"/>
-                      </a:solidFill>
-                      <a:prstDash val="solid"/>
-                      <a:round/>
-                      <a:headEnd type="none" w="med" len="med"/>
-                      <a:tailEnd type="none" w="med" len="med"/>
-                    </a:lnT>
-                    <a:lnB w="6350" cap="flat" cmpd="sng" algn="ctr">
-                      <a:solidFill>
-                        <a:srgbClr val="E3E6EA"/>
-                      </a:solidFill>
-                      <a:prstDash val="solid"/>
-                      <a:round/>
-                      <a:headEnd type="none" w="med" len="med"/>
-                      <a:tailEnd type="none" w="med" len="med"/>
-                    </a:lnB>
-                    <a:solidFill>
-                      <a:srgbClr val="FFFFFF"/>
-                    </a:solidFill>
-                  </a:tcPr>
-                </a:tc>
                 <a:extLst>
                   <a:ext uri="{0D108BD9-81ED-4DB2-BD59-A6C34878D82A}">
                     <a16:rowId xmlns:a16="http://schemas.microsoft.com/office/drawing/2014/main" val="10005"/>
@@ -14333,74 +13918,6 @@
                           <a:cs typeface="Paperlogy 5 Medium" pitchFamily="34" charset="-120"/>
                         </a:rPr>
                         <a:t>237</a:t>
-                      </a:r>
-                      <a:endParaRPr lang="en-US" sz="1050" dirty="0">
-                        <a:latin typeface="Paperlogy 5 Medium" charset="0"/>
-                        <a:ea typeface="Paperlogy 5 Medium" charset="0"/>
-                        <a:cs typeface="Paperlogy 5 Medium" charset="0"/>
-                      </a:endParaRPr>
-                    </a:p>
-                  </a:txBody>
-                  <a:tcPr marL="73152" marR="45720" marT="0" marB="0" anchor="ctr">
-                    <a:lnL w="6350" cap="flat" cmpd="sng" algn="ctr">
-                      <a:solidFill>
-                        <a:srgbClr val="E3E6EA"/>
-                      </a:solidFill>
-                      <a:prstDash val="solid"/>
-                      <a:round/>
-                      <a:headEnd type="none" w="med" len="med"/>
-                      <a:tailEnd type="none" w="med" len="med"/>
-                    </a:lnL>
-                    <a:lnR w="6350" cap="flat" cmpd="sng" algn="ctr">
-                      <a:solidFill>
-                        <a:srgbClr val="E3E6EA"/>
-                      </a:solidFill>
-                      <a:prstDash val="solid"/>
-                      <a:round/>
-                      <a:headEnd type="none" w="med" len="med"/>
-                      <a:tailEnd type="none" w="med" len="med"/>
-                    </a:lnR>
-                    <a:lnT w="6350" cap="flat" cmpd="sng" algn="ctr">
-                      <a:solidFill>
-                        <a:srgbClr val="E3E6EA"/>
-                      </a:solidFill>
-                      <a:prstDash val="solid"/>
-                      <a:round/>
-                      <a:headEnd type="none" w="med" len="med"/>
-                      <a:tailEnd type="none" w="med" len="med"/>
-                    </a:lnT>
-                    <a:lnB w="6350" cap="flat" cmpd="sng" algn="ctr">
-                      <a:solidFill>
-                        <a:srgbClr val="E3E6EA"/>
-                      </a:solidFill>
-                      <a:prstDash val="solid"/>
-                      <a:round/>
-                      <a:headEnd type="none" w="med" len="med"/>
-                      <a:tailEnd type="none" w="med" len="med"/>
-                    </a:lnB>
-                    <a:solidFill>
-                      <a:srgbClr val="F5F7F9"/>
-                    </a:solidFill>
-                  </a:tcPr>
-                </a:tc>
-                <a:tc>
-                  <a:txBody>
-                    <a:bodyPr/>
-                    <a:lstStyle/>
-                    <a:p>
-                      <a:pPr marL="0" indent="0" algn="ctr">
-                        <a:buNone/>
-                      </a:pPr>
-                      <a:r>
-                        <a:rPr lang="en-US" sz="1050" dirty="0">
-                          <a:solidFill>
-                            <a:srgbClr val="373D47"/>
-                          </a:solidFill>
-                          <a:latin typeface="Paperlogy 5 Medium" pitchFamily="34" charset="0"/>
-                          <a:ea typeface="Paperlogy 5 Medium" pitchFamily="34" charset="-122"/>
-                          <a:cs typeface="Paperlogy 5 Medium" pitchFamily="34" charset="-120"/>
-                        </a:rPr>
-                        <a:t>−0.23 mm</a:t>
                       </a:r>
                       <a:endParaRPr lang="en-US" sz="1050" dirty="0">
                         <a:latin typeface="Paperlogy 5 Medium" charset="0"/>
@@ -14730,74 +14247,6 @@
                     </a:solidFill>
                   </a:tcPr>
                 </a:tc>
-                <a:tc>
-                  <a:txBody>
-                    <a:bodyPr/>
-                    <a:lstStyle/>
-                    <a:p>
-                      <a:pPr marL="0" indent="0" algn="ctr">
-                        <a:buNone/>
-                      </a:pPr>
-                      <a:r>
-                        <a:rPr lang="en-US" sz="1050" dirty="0">
-                          <a:solidFill>
-                            <a:srgbClr val="373D47"/>
-                          </a:solidFill>
-                          <a:latin typeface="Paperlogy 5 Medium" pitchFamily="34" charset="0"/>
-                          <a:ea typeface="Paperlogy 5 Medium" pitchFamily="34" charset="-122"/>
-                          <a:cs typeface="Paperlogy 5 Medium" pitchFamily="34" charset="-120"/>
-                        </a:rPr>
-                        <a:t>−4.26 mm</a:t>
-                      </a:r>
-                      <a:endParaRPr lang="en-US" sz="1050" dirty="0">
-                        <a:latin typeface="Paperlogy 5 Medium" charset="0"/>
-                        <a:ea typeface="Paperlogy 5 Medium" charset="0"/>
-                        <a:cs typeface="Paperlogy 5 Medium" charset="0"/>
-                      </a:endParaRPr>
-                    </a:p>
-                  </a:txBody>
-                  <a:tcPr marL="73152" marR="45720" marT="0" marB="0" anchor="ctr">
-                    <a:lnL w="6350" cap="flat" cmpd="sng" algn="ctr">
-                      <a:solidFill>
-                        <a:srgbClr val="E3E6EA"/>
-                      </a:solidFill>
-                      <a:prstDash val="solid"/>
-                      <a:round/>
-                      <a:headEnd type="none" w="med" len="med"/>
-                      <a:tailEnd type="none" w="med" len="med"/>
-                    </a:lnL>
-                    <a:lnR w="6350" cap="flat" cmpd="sng" algn="ctr">
-                      <a:solidFill>
-                        <a:srgbClr val="E3E6EA"/>
-                      </a:solidFill>
-                      <a:prstDash val="solid"/>
-                      <a:round/>
-                      <a:headEnd type="none" w="med" len="med"/>
-                      <a:tailEnd type="none" w="med" len="med"/>
-                    </a:lnR>
-                    <a:lnT w="6350" cap="flat" cmpd="sng" algn="ctr">
-                      <a:solidFill>
-                        <a:srgbClr val="E3E6EA"/>
-                      </a:solidFill>
-                      <a:prstDash val="solid"/>
-                      <a:round/>
-                      <a:headEnd type="none" w="med" len="med"/>
-                      <a:tailEnd type="none" w="med" len="med"/>
-                    </a:lnT>
-                    <a:lnB w="6350" cap="flat" cmpd="sng" algn="ctr">
-                      <a:solidFill>
-                        <a:srgbClr val="E3E6EA"/>
-                      </a:solidFill>
-                      <a:prstDash val="solid"/>
-                      <a:round/>
-                      <a:headEnd type="none" w="med" len="med"/>
-                      <a:tailEnd type="none" w="med" len="med"/>
-                    </a:lnB>
-                    <a:solidFill>
-                      <a:srgbClr val="FFFFFF"/>
-                    </a:solidFill>
-                  </a:tcPr>
-                </a:tc>
                 <a:extLst>
                   <a:ext uri="{0D108BD9-81ED-4DB2-BD59-A6C34878D82A}">
                     <a16:rowId xmlns:a16="http://schemas.microsoft.com/office/drawing/2014/main" val="10007"/>
@@ -14841,7 +14290,7 @@
                 <a:ea typeface="Paperlogy 5 Medium" pitchFamily="34" charset="-122"/>
                 <a:cs typeface="Paperlogy 5 Medium" pitchFamily="34" charset="-120"/>
               </a:rPr>
-              <a:t>연 변위속도 = 교면 측점 중앙값(mm/년) · 관측 시점 수가 다르면 신뢰구간도 다르다</a:t>
+              <a:t>관측 시점 수와 교면 측점 수는 교량마다 다르다 — 변위속도와 정밀도는 측점 밀도를 확보한 뒤에 제시한다</a:t>
             </a:r>
             <a:endParaRPr lang="en-US" sz="900" dirty="0"/>
           </a:p>
@@ -19330,7 +18779,7 @@
                 <a:ea typeface="Paperlogy 7 Bold" pitchFamily="34" charset="-122"/>
                 <a:cs typeface="Paperlogy 7 Bold" pitchFamily="34" charset="-120"/>
               </a:rPr>
-              <a:t>개발은 끝났다 — KICT 와 연동 규칙을 정하면 시범 연동부터 바로 시작한다</a:t>
+              <a:t>파이프라인은 끝까지 돌아간다 — KICT 와 연동 규칙을 정하면 시범 연동부터 시작할 수 있다</a:t>
             </a:r>
             <a:endParaRPr lang="en-US" sz="1450" dirty="0"/>
           </a:p>
@@ -19551,7 +19000,7 @@
                 <a:ea typeface="Paperlogy 7 Bold" pitchFamily="34" charset="-122"/>
                 <a:cs typeface="Paperlogy 7 Bold" pitchFamily="34" charset="-120"/>
               </a:rPr>
-              <a:t>완료</a:t>
+              <a:t>진행</a:t>
             </a:r>
             <a:endParaRPr lang="en-US" sz="1100" dirty="0"/>
           </a:p>
@@ -19660,7 +19109,7 @@
                 <a:ea typeface="Paperlogy 5 Medium" pitchFamily="34" charset="-122"/>
                 <a:cs typeface="Paperlogy 5 Medium" pitchFamily="34" charset="-120"/>
               </a:rPr>
-              <a:t>실 Sentinel-1 교량 23개소 관통</a:t>
+              <a:t>실 Sentinel-1 자료로 전 과정 시범 처리</a:t>
             </a:r>
             <a:endParaRPr lang="en-US" sz="1100" dirty="0"/>
           </a:p>
@@ -19684,7 +19133,7 @@
                 <a:ea typeface="Paperlogy 5 Medium" pitchFamily="34" charset="-122"/>
                 <a:cs typeface="Paperlogy 5 Medium" pitchFamily="34" charset="-120"/>
               </a:rPr>
-              <a:t>B-Maps REST 12개 · 탭 예제</a:t>
+              <a:t>B-Maps REST 사이드카 · 탭 예제</a:t>
             </a:r>
             <a:endParaRPr lang="en-US" sz="1100" dirty="0"/>
           </a:p>

--- a/docs/KICT_Bmaps_Inframon_연구개발_7p_1.pptx
+++ b/docs/KICT_Bmaps_Inframon_연구개발_7p_1.pptx
@@ -19728,7 +19728,7 @@
                 <a:ea typeface="Paperlogy 7 Bold" pitchFamily="34" charset="-122"/>
                 <a:cs typeface="Paperlogy 7 Bold" pitchFamily="34" charset="-120"/>
               </a:rPr>
-              <a:t>KICT 협의 요청</a:t>
+              <a:t>KICT 자료 요청</a:t>
             </a:r>
             <a:endParaRPr lang="en-US" sz="1150" dirty="0"/>
           </a:p>
@@ -19831,7 +19831,7 @@
                 <a:ea typeface="Paperlogy 7 Bold" pitchFamily="34" charset="-122"/>
                 <a:cs typeface="Paperlogy 7 Bold" pitchFamily="34" charset="-120"/>
               </a:rPr>
-              <a:t>시범 교량 선정</a:t>
+              <a:t>교량 대장 제원</a:t>
             </a:r>
             <a:endParaRPr lang="en-US" sz="1100" dirty="0"/>
           </a:p>
@@ -19848,7 +19848,7 @@
                 <a:ea typeface="Paperlogy 5 Medium" pitchFamily="34" charset="-122"/>
                 <a:cs typeface="Paperlogy 5 Medium" pitchFamily="34" charset="-120"/>
               </a:rPr>
-              <a:t>계측 자료가 있는 곳부터</a:t>
+              <a:t>연장 · 폭 · 경간 · 형하고</a:t>
             </a:r>
             <a:endParaRPr lang="en-US" sz="1100" dirty="0"/>
           </a:p>
@@ -19951,7 +19951,7 @@
                 <a:ea typeface="Paperlogy 7 Bold" pitchFamily="34" charset="-122"/>
                 <a:cs typeface="Paperlogy 7 Bold" pitchFamily="34" charset="-120"/>
               </a:rPr>
-              <a:t>화면 필드 매핑</a:t>
+              <a:t>교량관리번호</a:t>
             </a:r>
             <a:endParaRPr lang="en-US" sz="1100" dirty="0"/>
           </a:p>
@@ -19968,7 +19968,7 @@
                 <a:ea typeface="Paperlogy 5 Medium" pitchFamily="34" charset="-122"/>
                 <a:cs typeface="Paperlogy 5 Medium" pitchFamily="34" charset="-120"/>
               </a:rPr>
-              <a:t>교량관리번호 · B-Maps 표시 항목</a:t>
+              <a:t>대장 좌표와 함께</a:t>
             </a:r>
             <a:endParaRPr lang="en-US" sz="1100" dirty="0"/>
           </a:p>
@@ -20071,7 +20071,7 @@
                 <a:ea typeface="Paperlogy 7 Bold" pitchFamily="34" charset="-122"/>
                 <a:cs typeface="Paperlogy 7 Bold" pitchFamily="34" charset="-120"/>
               </a:rPr>
-              <a:t>운영 규칙 합의</a:t>
+              <a:t>보유 IFC 모델</a:t>
             </a:r>
             <a:endParaRPr lang="en-US" sz="1100" dirty="0"/>
           </a:p>
@@ -20088,7 +20088,7 @@
                 <a:ea typeface="Paperlogy 5 Medium" pitchFamily="34" charset="-122"/>
                 <a:cs typeface="Paperlogy 5 Medium" pitchFamily="34" charset="-120"/>
               </a:rPr>
-              <a:t>갱신 주기 · 경보 임계 · 인증</a:t>
+              <a:t>있는 교량만이라도</a:t>
             </a:r>
             <a:endParaRPr lang="en-US" sz="1100" dirty="0"/>
           </a:p>
@@ -20191,7 +20191,7 @@
                 <a:ea typeface="Paperlogy 7 Bold" pitchFamily="34" charset="-122"/>
                 <a:cs typeface="Paperlogy 7 Bold" pitchFamily="34" charset="-120"/>
               </a:rPr>
-              <a:t>검증 자료 공유</a:t>
+              <a:t>준공 · 보수 이력</a:t>
             </a:r>
             <a:endParaRPr lang="en-US" sz="1100" dirty="0"/>
           </a:p>
@@ -20208,7 +20208,7 @@
                 <a:ea typeface="Paperlogy 5 Medium" pitchFamily="34" charset="-122"/>
                 <a:cs typeface="Paperlogy 5 Medium" pitchFamily="34" charset="-120"/>
               </a:rPr>
-              <a:t>계측 위치 · 실 제원 · 점검 이력</a:t>
+              <a:t>연도와 일자만</a:t>
             </a:r>
             <a:endParaRPr lang="en-US" sz="1100" dirty="0"/>
           </a:p>

--- a/docs/KICT_Bmaps_Inframon_연구개발_7p_1.pptx
+++ b/docs/KICT_Bmaps_Inframon_연구개발_7p_1.pptx
@@ -6768,7 +6768,7 @@
                 <a:ea typeface="Paperlogy 5 Medium" pitchFamily="34" charset="-122"/>
                 <a:cs typeface="Paperlogy 5 Medium" pitchFamily="34" charset="-120"/>
               </a:rPr>
-              <a:t>REST 사이드카로</a:t>
+              <a:t>본체 수정 없이</a:t>
             </a:r>
             <a:endParaRPr lang="en-US" sz="1050" dirty="0"/>
           </a:p>
@@ -6788,7 +6788,7 @@
                 <a:ea typeface="Paperlogy 5 Medium" pitchFamily="34" charset="-122"/>
                 <a:cs typeface="Paperlogy 5 Medium" pitchFamily="34" charset="-120"/>
               </a:rPr>
-              <a:t>B-Maps 탭에 결과 제공</a:t>
+              <a:t>조회 전용 서버가 탭에 결과 제공</a:t>
             </a:r>
             <a:endParaRPr lang="en-US" sz="1050" dirty="0"/>
           </a:p>
@@ -8116,7 +8116,7 @@
                           <a:ea typeface="Paperlogy 7 Bold" pitchFamily="34" charset="-122"/>
                           <a:cs typeface="Paperlogy 7 Bold" pitchFamily="34" charset="-120"/>
                         </a:rPr>
-                        <a:t>REST 사이드카 · 탭 예제 구현</a:t>
+                        <a:t>조회 전용 API · 탭 예제 구현</a:t>
                       </a:r>
                       <a:endParaRPr lang="en-US" sz="1100" dirty="0">
                         <a:latin typeface="Paperlogy 7 Bold" charset="0"/>
@@ -15985,7 +15985,7 @@
                 <a:ea typeface="Paperlogy 7 Bold" pitchFamily="34" charset="-122"/>
                 <a:cs typeface="Paperlogy 7 Bold" pitchFamily="34" charset="-120"/>
               </a:rPr>
-              <a:t>B-Maps 본체를 고치지 않고 읽기 전용 사이드카로 붙인다 — 교량관리번호로 조회하면 교면 변위와 IFC 트윈이 그대로 올라온다</a:t>
+              <a:t>B-Maps 본체를 고치지 않고 옆에 붙는 조회 전용 프로그램으로 잇는다 — 교량관리번호로 조회하면 교면 변위와 IFC 트윈이 그대로 올라온다</a:t>
             </a:r>
             <a:endParaRPr lang="en-US" sz="1450" dirty="0"/>
           </a:p>
@@ -16436,7 +16436,7 @@
                 <a:ea typeface="Paperlogy 5 Medium" pitchFamily="34" charset="-122"/>
                 <a:cs typeface="Paperlogy 5 Medium" pitchFamily="34" charset="-120"/>
               </a:rPr>
-              <a:t>사이드카 · 읽기 전용</a:t>
+              <a:t>조회 전용 서버</a:t>
             </a:r>
             <a:endParaRPr lang="en-US" sz="1100" dirty="0"/>
           </a:p>
@@ -18265,7 +18265,7 @@
                 <a:ea typeface="Paperlogy 5 Medium" pitchFamily="34" charset="-122"/>
                 <a:cs typeface="Paperlogy 5 Medium" pitchFamily="34" charset="-120"/>
               </a:rPr>
-              <a:t>※ 교면 전용 재선별(MT-InSAR: 기선망 · 점별 DEM 오차 · 열팽창 · APS) 뒤의 교면 PS 를 쓴다. 연동은 읽기 전용 사이드카라 B-Maps 본체를 고치지 않는다.</a:t>
+              <a:t>※ 교면 전용 재선별(MT-InSAR: 기선망 · 점별 DEM 오차 · 열팽창 · APS) 뒤의 교면 PS 를 쓴다. 연동은 조회 전용이라 B-Maps 본체를 고치지 않는다.</a:t>
             </a:r>
             <a:endParaRPr lang="en-US" sz="850" dirty="0"/>
           </a:p>
@@ -19133,7 +19133,7 @@
                 <a:ea typeface="Paperlogy 5 Medium" pitchFamily="34" charset="-122"/>
                 <a:cs typeface="Paperlogy 5 Medium" pitchFamily="34" charset="-120"/>
               </a:rPr>
-              <a:t>B-Maps REST 사이드카 · 탭 예제</a:t>
+              <a:t>B-Maps 조회 API · 탭 예제</a:t>
             </a:r>
             <a:endParaRPr lang="en-US" sz="1100" dirty="0"/>
           </a:p>

--- a/docs/KICT_Bmaps_Inframon_연구개발_7p_1.pptx
+++ b/docs/KICT_Bmaps_Inframon_연구개발_7p_1.pptx
@@ -7626,7 +7626,7 @@
                           <a:ea typeface="Paperlogy 5 Medium" pitchFamily="34" charset="-122"/>
                           <a:cs typeface="Paperlogy 5 Medium" pitchFamily="34" charset="-120"/>
                         </a:rPr>
-                        <a:t>실측 건강 교량으로 기준 재설정 → 잠정 해제</a:t>
+                        <a:t>안전등급 양호 교량의 실측값으로 기준 확정</a:t>
                       </a:r>
                       <a:endParaRPr lang="en-US" sz="1100" dirty="0">
                         <a:latin typeface="Paperlogy 5 Medium" charset="0"/>

--- a/docs/KICT_Bmaps_Inframon_연구개발_7p_1.pptx
+++ b/docs/KICT_Bmaps_Inframon_연구개발_7p_1.pptx
@@ -2216,6 +2216,10 @@
             <a:prstDash val="solid"/>
           </a:ln>
         </p:spPr>
+        <p:txBody>
+          <a:bodyPr/>
+          <a:p/>
+        </p:txBody>
       </p:sp>
       <p:sp>
         <p:nvSpPr>
@@ -2241,6 +2245,10 @@
             <a:prstDash val="solid"/>
           </a:ln>
         </p:spPr>
+        <p:txBody>
+          <a:bodyPr/>
+          <a:p/>
+        </p:txBody>
       </p:sp>
       <p:sp>
         <p:nvSpPr>
@@ -2422,6 +2430,10 @@
             <a:prstDash val="solid"/>
           </a:ln>
         </p:spPr>
+        <p:txBody>
+          <a:bodyPr/>
+          <a:p/>
+        </p:txBody>
       </p:sp>
       <p:sp>
         <p:nvSpPr>
@@ -2519,6 +2531,10 @@
             <a:prstDash val="solid"/>
           </a:ln>
         </p:spPr>
+        <p:txBody>
+          <a:bodyPr/>
+          <a:p/>
+        </p:txBody>
       </p:sp>
       <p:sp>
         <p:nvSpPr>
@@ -2544,6 +2560,10 @@
             <a:prstDash val="solid"/>
           </a:ln>
         </p:spPr>
+        <p:txBody>
+          <a:bodyPr/>
+          <a:p/>
+        </p:txBody>
       </p:sp>
       <p:sp>
         <p:nvSpPr>
@@ -2608,6 +2628,10 @@
             <a:prstDash val="solid"/>
           </a:ln>
         </p:spPr>
+        <p:txBody>
+          <a:bodyPr/>
+          <a:p/>
+        </p:txBody>
       </p:sp>
       <p:sp>
         <p:nvSpPr>
@@ -2674,6 +2698,10 @@
             <a:prstDash val="solid"/>
           </a:ln>
         </p:spPr>
+        <p:txBody>
+          <a:bodyPr/>
+          <a:p/>
+        </p:txBody>
       </p:sp>
       <p:sp>
         <p:nvSpPr>
@@ -2740,6 +2768,10 @@
             <a:prstDash val="solid"/>
           </a:ln>
         </p:spPr>
+        <p:txBody>
+          <a:bodyPr/>
+          <a:p/>
+        </p:txBody>
       </p:sp>
       <p:sp>
         <p:nvSpPr>
@@ -2806,6 +2838,10 @@
             <a:prstDash val="solid"/>
           </a:ln>
         </p:spPr>
+        <p:txBody>
+          <a:bodyPr/>
+          <a:p/>
+        </p:txBody>
       </p:sp>
       <p:sp>
         <p:nvSpPr>
@@ -2872,6 +2908,10 @@
             <a:prstDash val="solid"/>
           </a:ln>
         </p:spPr>
+        <p:txBody>
+          <a:bodyPr/>
+          <a:p/>
+        </p:txBody>
       </p:sp>
       <p:sp>
         <p:nvSpPr>
@@ -2936,6 +2976,10 @@
             <a:prstDash val="solid"/>
           </a:ln>
         </p:spPr>
+        <p:txBody>
+          <a:bodyPr/>
+          <a:p/>
+        </p:txBody>
       </p:sp>
       <p:sp>
         <p:nvSpPr>
@@ -3000,6 +3044,10 @@
             <a:prstDash val="solid"/>
           </a:ln>
         </p:spPr>
+        <p:txBody>
+          <a:bodyPr/>
+          <a:p/>
+        </p:txBody>
       </p:sp>
       <p:sp>
         <p:nvSpPr>
@@ -3064,6 +3112,10 @@
             <a:prstDash val="solid"/>
           </a:ln>
         </p:spPr>
+        <p:txBody>
+          <a:bodyPr/>
+          <a:p/>
+        </p:txBody>
       </p:sp>
       <p:sp>
         <p:nvSpPr>
@@ -3130,6 +3182,10 @@
             <a:prstDash val="solid"/>
           </a:ln>
         </p:spPr>
+        <p:txBody>
+          <a:bodyPr/>
+          <a:p/>
+        </p:txBody>
       </p:sp>
       <p:sp>
         <p:nvSpPr>
@@ -3157,6 +3213,10 @@
             <a:prstDash val="solid"/>
           </a:ln>
         </p:spPr>
+        <p:txBody>
+          <a:bodyPr/>
+          <a:p/>
+        </p:txBody>
       </p:sp>
       <p:sp>
         <p:nvSpPr>
@@ -3350,6 +3410,10 @@
             <a:prstDash val="solid"/>
           </a:ln>
         </p:spPr>
+        <p:txBody>
+          <a:bodyPr/>
+          <a:p/>
+        </p:txBody>
       </p:sp>
       <p:sp>
         <p:nvSpPr>
@@ -3377,6 +3441,10 @@
             <a:prstDash val="solid"/>
           </a:ln>
         </p:spPr>
+        <p:txBody>
+          <a:bodyPr/>
+          <a:p/>
+        </p:txBody>
       </p:sp>
       <p:sp>
         <p:nvSpPr>
@@ -3570,6 +3638,10 @@
             <a:prstDash val="solid"/>
           </a:ln>
         </p:spPr>
+        <p:txBody>
+          <a:bodyPr/>
+          <a:p/>
+        </p:txBody>
       </p:sp>
       <p:sp>
         <p:nvSpPr>
@@ -3597,6 +3669,10 @@
             <a:prstDash val="solid"/>
           </a:ln>
         </p:spPr>
+        <p:txBody>
+          <a:bodyPr/>
+          <a:p/>
+        </p:txBody>
       </p:sp>
       <p:sp>
         <p:nvSpPr>
@@ -3790,6 +3866,10 @@
             <a:prstDash val="solid"/>
           </a:ln>
         </p:spPr>
+        <p:txBody>
+          <a:bodyPr/>
+          <a:p/>
+        </p:txBody>
       </p:sp>
       <p:sp>
         <p:nvSpPr>
@@ -3909,6 +3989,10 @@
             <a:prstDash val="solid"/>
           </a:ln>
         </p:spPr>
+        <p:txBody>
+          <a:bodyPr/>
+          <a:p/>
+        </p:txBody>
       </p:sp>
       <p:sp>
         <p:nvSpPr>
@@ -4028,6 +4112,10 @@
             <a:prstDash val="solid"/>
           </a:ln>
         </p:spPr>
+        <p:txBody>
+          <a:bodyPr/>
+          <a:p/>
+        </p:txBody>
       </p:sp>
       <p:sp>
         <p:nvSpPr>
@@ -4147,6 +4235,10 @@
             <a:prstDash val="solid"/>
           </a:ln>
         </p:spPr>
+        <p:txBody>
+          <a:bodyPr/>
+          <a:p/>
+        </p:txBody>
       </p:sp>
       <p:sp>
         <p:nvSpPr>
@@ -7279,7 +7371,7 @@
                           <a:ea typeface="Paperlogy 7 Bold" pitchFamily="34" charset="-122"/>
                           <a:cs typeface="Paperlogy 7 Bold" pitchFamily="34" charset="-120"/>
                         </a:rPr>
-                        <a:t>좌표 1개로 수집–처리–교면 변위 시계열까지 자동</a:t>
+                        <a:t>수집–처리–교면 변위 시계열까지 자동</a:t>
                       </a:r>
                       <a:endParaRPr lang="en-US" sz="1100" dirty="0">
                         <a:latin typeface="Paperlogy 7 Bold" charset="0"/>
@@ -8341,6 +8433,10 @@
             <a:prstDash val="solid"/>
           </a:ln>
         </p:spPr>
+        <p:txBody>
+          <a:bodyPr/>
+          <a:p/>
+        </p:txBody>
       </p:sp>
       <p:sp>
         <p:nvSpPr>
@@ -8366,6 +8462,10 @@
             <a:prstDash val="solid"/>
           </a:ln>
         </p:spPr>
+        <p:txBody>
+          <a:bodyPr/>
+          <a:p/>
+        </p:txBody>
       </p:sp>
       <p:sp>
         <p:nvSpPr>
@@ -8430,6 +8530,10 @@
             <a:prstDash val="solid"/>
           </a:ln>
         </p:spPr>
+        <p:txBody>
+          <a:bodyPr/>
+          <a:p/>
+        </p:txBody>
       </p:sp>
       <p:sp>
         <p:nvSpPr>
@@ -8496,6 +8600,10 @@
             <a:prstDash val="solid"/>
           </a:ln>
         </p:spPr>
+        <p:txBody>
+          <a:bodyPr/>
+          <a:p/>
+        </p:txBody>
       </p:sp>
       <p:sp>
         <p:nvSpPr>
@@ -8562,6 +8670,10 @@
             <a:prstDash val="solid"/>
           </a:ln>
         </p:spPr>
+        <p:txBody>
+          <a:bodyPr/>
+          <a:p/>
+        </p:txBody>
       </p:sp>
       <p:sp>
         <p:nvSpPr>
@@ -8628,6 +8740,10 @@
             <a:prstDash val="solid"/>
           </a:ln>
         </p:spPr>
+        <p:txBody>
+          <a:bodyPr/>
+          <a:p/>
+        </p:txBody>
       </p:sp>
       <p:sp>
         <p:nvSpPr>
@@ -8694,6 +8810,10 @@
             <a:prstDash val="solid"/>
           </a:ln>
         </p:spPr>
+        <p:txBody>
+          <a:bodyPr/>
+          <a:p/>
+        </p:txBody>
       </p:sp>
       <p:sp>
         <p:nvSpPr>
@@ -8758,6 +8878,10 @@
             <a:prstDash val="solid"/>
           </a:ln>
         </p:spPr>
+        <p:txBody>
+          <a:bodyPr/>
+          <a:p/>
+        </p:txBody>
       </p:sp>
       <p:sp>
         <p:nvSpPr>
@@ -8792,7 +8916,7 @@
                 <a:ea typeface="Paperlogy 7 Bold" pitchFamily="34" charset="-122"/>
                 <a:cs typeface="Paperlogy 7 Bold" pitchFamily="34" charset="-120"/>
               </a:rPr>
-              <a:t>Inframon 은 좌표 하나로 위성 → 변위 → AI 해석 → 트윈 → B-Maps 까지 잇는 6단계 파이프라인이다</a:t>
+              <a:t>위성 영상에서 변위를 뽑아 AI 로 해석하고, 트윈으로 만들어 B-Maps 에 넘기는 6단계다</a:t>
             </a:r>
             <a:endParaRPr lang="en-US" sz="1450" dirty="0"/>
           </a:p>
@@ -8822,6 +8946,10 @@
             <a:prstDash val="solid"/>
           </a:ln>
         </p:spPr>
+        <p:txBody>
+          <a:bodyPr/>
+          <a:p/>
+        </p:txBody>
       </p:sp>
       <p:sp>
         <p:nvSpPr>
@@ -8886,6 +9014,10 @@
             <a:prstDash val="solid"/>
           </a:ln>
         </p:spPr>
+        <p:txBody>
+          <a:bodyPr/>
+          <a:p/>
+        </p:txBody>
       </p:sp>
       <p:sp>
         <p:nvSpPr>
@@ -8952,6 +9084,10 @@
             <a:prstDash val="solid"/>
           </a:ln>
         </p:spPr>
+        <p:txBody>
+          <a:bodyPr/>
+          <a:p/>
+        </p:txBody>
       </p:sp>
       <p:sp>
         <p:nvSpPr>
@@ -8979,6 +9115,10 @@
             <a:prstDash val="solid"/>
           </a:ln>
         </p:spPr>
+        <p:txBody>
+          <a:bodyPr/>
+          <a:p/>
+        </p:txBody>
       </p:sp>
       <p:sp>
         <p:nvSpPr>
@@ -9004,6 +9144,10 @@
             <a:prstDash val="solid"/>
           </a:ln>
         </p:spPr>
+        <p:txBody>
+          <a:bodyPr/>
+          <a:p/>
+        </p:txBody>
       </p:sp>
       <p:sp>
         <p:nvSpPr>
@@ -9038,7 +9182,7 @@
                 <a:ea typeface="Paperlogy 7 Bold" pitchFamily="34" charset="-122"/>
                 <a:cs typeface="Paperlogy 7 Bold" pitchFamily="34" charset="-120"/>
               </a:rPr>
-              <a:t>⓪ 교량·영상 선별</a:t>
+              <a:t>① 교량·영상 선별</a:t>
             </a:r>
             <a:endParaRPr lang="en-US" sz="1200" dirty="0"/>
           </a:p>
@@ -9162,6 +9306,10 @@
             <a:prstDash val="solid"/>
           </a:ln>
         </p:spPr>
+        <p:txBody>
+          <a:bodyPr/>
+          <a:p/>
+        </p:txBody>
       </p:sp>
       <p:sp>
         <p:nvSpPr>
@@ -9189,6 +9337,10 @@
             <a:prstDash val="solid"/>
           </a:ln>
         </p:spPr>
+        <p:txBody>
+          <a:bodyPr/>
+          <a:p/>
+        </p:txBody>
       </p:sp>
       <p:sp>
         <p:nvSpPr>
@@ -9216,6 +9368,10 @@
             <a:prstDash val="solid"/>
           </a:ln>
         </p:spPr>
+        <p:txBody>
+          <a:bodyPr/>
+          <a:p/>
+        </p:txBody>
       </p:sp>
       <p:sp>
         <p:nvSpPr>
@@ -9241,6 +9397,10 @@
             <a:prstDash val="solid"/>
           </a:ln>
         </p:spPr>
+        <p:txBody>
+          <a:bodyPr/>
+          <a:p/>
+        </p:txBody>
       </p:sp>
       <p:sp>
         <p:nvSpPr>
@@ -9275,7 +9435,7 @@
                 <a:ea typeface="Paperlogy 7 Bold" pitchFamily="34" charset="-122"/>
                 <a:cs typeface="Paperlogy 7 Bold" pitchFamily="34" charset="-120"/>
               </a:rPr>
-              <a:t>① InSAR 처리</a:t>
+              <a:t>② InSAR 처리</a:t>
             </a:r>
             <a:endParaRPr lang="en-US" sz="1200" dirty="0"/>
           </a:p>
@@ -9399,6 +9559,10 @@
             <a:prstDash val="solid"/>
           </a:ln>
         </p:spPr>
+        <p:txBody>
+          <a:bodyPr/>
+          <a:p/>
+        </p:txBody>
       </p:sp>
       <p:sp>
         <p:nvSpPr>
@@ -9426,6 +9590,10 @@
             <a:prstDash val="solid"/>
           </a:ln>
         </p:spPr>
+        <p:txBody>
+          <a:bodyPr/>
+          <a:p/>
+        </p:txBody>
       </p:sp>
       <p:sp>
         <p:nvSpPr>
@@ -9453,6 +9621,10 @@
             <a:prstDash val="solid"/>
           </a:ln>
         </p:spPr>
+        <p:txBody>
+          <a:bodyPr/>
+          <a:p/>
+        </p:txBody>
       </p:sp>
       <p:sp>
         <p:nvSpPr>
@@ -9478,6 +9650,10 @@
             <a:prstDash val="solid"/>
           </a:ln>
         </p:spPr>
+        <p:txBody>
+          <a:bodyPr/>
+          <a:p/>
+        </p:txBody>
       </p:sp>
       <p:sp>
         <p:nvSpPr>
@@ -9512,7 +9688,7 @@
                 <a:ea typeface="Paperlogy 7 Bold" pitchFamily="34" charset="-122"/>
                 <a:cs typeface="Paperlogy 7 Bold" pitchFamily="34" charset="-120"/>
               </a:rPr>
-              <a:t>② 교면 측점 정합</a:t>
+              <a:t>③ 교면 측점 정합</a:t>
             </a:r>
             <a:endParaRPr lang="en-US" sz="1200" dirty="0"/>
           </a:p>
@@ -9636,6 +9812,10 @@
             <a:prstDash val="solid"/>
           </a:ln>
         </p:spPr>
+        <p:txBody>
+          <a:bodyPr/>
+          <a:p/>
+        </p:txBody>
       </p:sp>
       <p:sp>
         <p:nvSpPr>
@@ -9663,6 +9843,10 @@
             <a:prstDash val="solid"/>
           </a:ln>
         </p:spPr>
+        <p:txBody>
+          <a:bodyPr/>
+          <a:p/>
+        </p:txBody>
       </p:sp>
       <p:sp>
         <p:nvSpPr>
@@ -9690,6 +9874,10 @@
             <a:prstDash val="solid"/>
           </a:ln>
         </p:spPr>
+        <p:txBody>
+          <a:bodyPr/>
+          <a:p/>
+        </p:txBody>
       </p:sp>
       <p:sp>
         <p:nvSpPr>
@@ -9715,6 +9903,10 @@
             <a:prstDash val="solid"/>
           </a:ln>
         </p:spPr>
+        <p:txBody>
+          <a:bodyPr/>
+          <a:p/>
+        </p:txBody>
       </p:sp>
       <p:sp>
         <p:nvSpPr>
@@ -9749,7 +9941,7 @@
                 <a:ea typeface="Paperlogy 7 Bold" pitchFamily="34" charset="-122"/>
                 <a:cs typeface="Paperlogy 7 Bold" pitchFamily="34" charset="-120"/>
               </a:rPr>
-              <a:t>③ PINN 역산</a:t>
+              <a:t>④ PINN 역산</a:t>
             </a:r>
             <a:endParaRPr lang="en-US" sz="1200" dirty="0"/>
           </a:p>
@@ -9873,6 +10065,10 @@
             <a:prstDash val="solid"/>
           </a:ln>
         </p:spPr>
+        <p:txBody>
+          <a:bodyPr/>
+          <a:p/>
+        </p:txBody>
       </p:sp>
       <p:sp>
         <p:nvSpPr>
@@ -9900,6 +10096,10 @@
             <a:prstDash val="solid"/>
           </a:ln>
         </p:spPr>
+        <p:txBody>
+          <a:bodyPr/>
+          <a:p/>
+        </p:txBody>
       </p:sp>
       <p:sp>
         <p:nvSpPr>
@@ -9927,6 +10127,10 @@
             <a:prstDash val="solid"/>
           </a:ln>
         </p:spPr>
+        <p:txBody>
+          <a:bodyPr/>
+          <a:p/>
+        </p:txBody>
       </p:sp>
       <p:sp>
         <p:nvSpPr>
@@ -9952,6 +10156,10 @@
             <a:prstDash val="solid"/>
           </a:ln>
         </p:spPr>
+        <p:txBody>
+          <a:bodyPr/>
+          <a:p/>
+        </p:txBody>
       </p:sp>
       <p:sp>
         <p:nvSpPr>
@@ -9986,7 +10194,7 @@
                 <a:ea typeface="Paperlogy 7 Bold" pitchFamily="34" charset="-122"/>
                 <a:cs typeface="Paperlogy 7 Bold" pitchFamily="34" charset="-120"/>
               </a:rPr>
-              <a:t>④ 위험도 평가</a:t>
+              <a:t>⑤ 위험도 평가</a:t>
             </a:r>
             <a:endParaRPr lang="en-US" sz="1200" dirty="0"/>
           </a:p>
@@ -10110,6 +10318,10 @@
             <a:prstDash val="solid"/>
           </a:ln>
         </p:spPr>
+        <p:txBody>
+          <a:bodyPr/>
+          <a:p/>
+        </p:txBody>
       </p:sp>
       <p:sp>
         <p:nvSpPr>
@@ -10137,6 +10349,10 @@
             <a:prstDash val="solid"/>
           </a:ln>
         </p:spPr>
+        <p:txBody>
+          <a:bodyPr/>
+          <a:p/>
+        </p:txBody>
       </p:sp>
       <p:sp>
         <p:nvSpPr>
@@ -10164,6 +10380,10 @@
             <a:prstDash val="solid"/>
           </a:ln>
         </p:spPr>
+        <p:txBody>
+          <a:bodyPr/>
+          <a:p/>
+        </p:txBody>
       </p:sp>
       <p:sp>
         <p:nvSpPr>
@@ -10189,6 +10409,10 @@
             <a:prstDash val="solid"/>
           </a:ln>
         </p:spPr>
+        <p:txBody>
+          <a:bodyPr/>
+          <a:p/>
+        </p:txBody>
       </p:sp>
       <p:sp>
         <p:nvSpPr>
@@ -10223,7 +10447,7 @@
                 <a:ea typeface="Paperlogy 7 Bold" pitchFamily="34" charset="-122"/>
                 <a:cs typeface="Paperlogy 7 Bold" pitchFamily="34" charset="-120"/>
               </a:rPr>
-              <a:t>⑤ 산출 · 연동</a:t>
+              <a:t>⑥ 산출 · 연동</a:t>
             </a:r>
             <a:endParaRPr lang="en-US" sz="1200" dirty="0"/>
           </a:p>
@@ -10349,6 +10573,10 @@
             <a:prstDash val="solid"/>
           </a:ln>
         </p:spPr>
+        <p:txBody>
+          <a:bodyPr/>
+          <a:p/>
+        </p:txBody>
       </p:sp>
       <p:sp>
         <p:nvSpPr>
@@ -10376,6 +10604,10 @@
             <a:prstDash val="solid"/>
           </a:ln>
         </p:spPr>
+        <p:txBody>
+          <a:bodyPr/>
+          <a:p/>
+        </p:txBody>
       </p:sp>
       <p:sp>
         <p:nvSpPr>
@@ -10442,6 +10674,10 @@
             <a:prstDash val="solid"/>
           </a:ln>
         </p:spPr>
+        <p:txBody>
+          <a:bodyPr/>
+          <a:p/>
+        </p:txBody>
       </p:sp>
       <p:sp>
         <p:nvSpPr>
@@ -10479,7 +10715,7 @@
                 <a:ea typeface="Paperlogy 7 Bold" pitchFamily="34" charset="-122"/>
                 <a:cs typeface="Paperlogy 7 Bold" pitchFamily="34" charset="-120"/>
               </a:rPr>
-              <a:t>좌표 1개 실행</a:t>
+              <a:t>같은 절차로</a:t>
             </a:r>
             <a:endParaRPr lang="en-US" sz="1100" dirty="0"/>
           </a:p>
@@ -10499,7 +10735,7 @@
                 <a:ea typeface="Paperlogy 5 Medium" pitchFamily="34" charset="-122"/>
                 <a:cs typeface="Paperlogy 5 Medium" pitchFamily="34" charset="-120"/>
               </a:rPr>
-              <a:t>교량을 바꿔도 코드 수정이 없다</a:t>
+              <a:t>교량이 바뀌어도 고칠 것이 없다</a:t>
             </a:r>
             <a:endParaRPr lang="en-US" sz="1100" dirty="0"/>
           </a:p>
@@ -10531,6 +10767,10 @@
             <a:prstDash val="solid"/>
           </a:ln>
         </p:spPr>
+        <p:txBody>
+          <a:bodyPr/>
+          <a:p/>
+        </p:txBody>
       </p:sp>
       <p:sp>
         <p:nvSpPr>
@@ -10620,6 +10860,10 @@
             <a:prstDash val="solid"/>
           </a:ln>
         </p:spPr>
+        <p:txBody>
+          <a:bodyPr/>
+          <a:p/>
+        </p:txBody>
       </p:sp>
       <p:sp>
         <p:nvSpPr>
@@ -10709,6 +10953,10 @@
             <a:prstDash val="solid"/>
           </a:ln>
         </p:spPr>
+        <p:txBody>
+          <a:bodyPr/>
+          <a:p/>
+        </p:txBody>
       </p:sp>
       <p:sp>
         <p:nvSpPr>
@@ -10798,6 +11046,10 @@
             <a:prstDash val="solid"/>
           </a:ln>
         </p:spPr>
+        <p:txBody>
+          <a:bodyPr/>
+          <a:p/>
+        </p:txBody>
       </p:sp>
       <p:sp>
         <p:nvSpPr>
@@ -10832,7 +11084,7 @@
                 <a:ea typeface="Paperlogy 7 Bold" pitchFamily="34" charset="-122"/>
                 <a:cs typeface="Paperlogy 7 Bold" pitchFamily="34" charset="-120"/>
               </a:rPr>
-              <a:t>51</a:t>
+              <a:t>6</a:t>
             </a:r>
             <a:r>
               <a:rPr lang="en-US" sz="1200" dirty="0">
@@ -10843,7 +11095,7 @@
                 <a:ea typeface="Paperlogy 7 Bold" pitchFamily="34" charset="-122"/>
                 <a:cs typeface="Paperlogy 7 Bold" pitchFamily="34" charset="-120"/>
               </a:rPr>
-              <a:t>  장면</a:t>
+              <a:t>  단계</a:t>
             </a:r>
             <a:endParaRPr lang="en-US" sz="1100" dirty="0"/>
           </a:p>
@@ -10885,7 +11137,7 @@
                 <a:ea typeface="Paperlogy 5 Medium" pitchFamily="34" charset="-122"/>
                 <a:cs typeface="Paperlogy 5 Medium" pitchFamily="34" charset="-120"/>
               </a:rPr>
-              <a:t>실제 Sentinel-1 영상</a:t>
+              <a:t>영상 고르기부터 B-Maps 전달까지</a:t>
             </a:r>
             <a:endParaRPr lang="en-US" sz="1000" dirty="0"/>
           </a:p>
@@ -10917,6 +11169,10 @@
             <a:prstDash val="solid"/>
           </a:ln>
         </p:spPr>
+        <p:txBody>
+          <a:bodyPr/>
+          <a:p/>
+        </p:txBody>
       </p:sp>
       <p:sp>
         <p:nvSpPr>
@@ -10951,7 +11207,7 @@
                 <a:ea typeface="Paperlogy 7 Bold" pitchFamily="34" charset="-122"/>
                 <a:cs typeface="Paperlogy 7 Bold" pitchFamily="34" charset="-120"/>
               </a:rPr>
-              <a:t>23</a:t>
+              <a:t>1</a:t>
             </a:r>
             <a:r>
               <a:rPr lang="en-US" sz="1200" dirty="0">
@@ -10962,7 +11218,7 @@
                 <a:ea typeface="Paperlogy 7 Bold" pitchFamily="34" charset="-122"/>
                 <a:cs typeface="Paperlogy 7 Bold" pitchFamily="34" charset="-120"/>
               </a:rPr>
-              <a:t>  개소</a:t>
+              <a:t>  개</a:t>
             </a:r>
             <a:endParaRPr lang="en-US" sz="1100" dirty="0"/>
           </a:p>
@@ -11004,7 +11260,7 @@
                 <a:ea typeface="Paperlogy 5 Medium" pitchFamily="34" charset="-122"/>
                 <a:cs typeface="Paperlogy 5 Medium" pitchFamily="34" charset="-120"/>
               </a:rPr>
-              <a:t>전 과정 시범 처리 교량</a:t>
+              <a:t>넣는 것은 좌표뿐</a:t>
             </a:r>
             <a:endParaRPr lang="en-US" sz="1000" dirty="0"/>
           </a:p>
@@ -11036,6 +11292,10 @@
             <a:prstDash val="solid"/>
           </a:ln>
         </p:spPr>
+        <p:txBody>
+          <a:bodyPr/>
+          <a:p/>
+        </p:txBody>
       </p:sp>
       <p:sp>
         <p:nvSpPr>
@@ -11070,7 +11330,7 @@
                 <a:ea typeface="Paperlogy 7 Bold" pitchFamily="34" charset="-122"/>
                 <a:cs typeface="Paperlogy 7 Bold" pitchFamily="34" charset="-120"/>
               </a:rPr>
-              <a:t>16</a:t>
+              <a:t>12</a:t>
             </a:r>
             <a:r>
               <a:rPr lang="en-US" sz="1200" dirty="0">
@@ -11081,7 +11341,7 @@
                 <a:ea typeface="Paperlogy 7 Bold" pitchFamily="34" charset="-122"/>
                 <a:cs typeface="Paperlogy 7 Bold" pitchFamily="34" charset="-120"/>
               </a:rPr>
-              <a:t>  개소</a:t>
+              <a:t>  일</a:t>
             </a:r>
             <a:endParaRPr lang="en-US" sz="1100" dirty="0"/>
           </a:p>
@@ -11123,7 +11383,7 @@
                 <a:ea typeface="Paperlogy 5 Medium" pitchFamily="34" charset="-122"/>
                 <a:cs typeface="Paperlogy 5 Medium" pitchFamily="34" charset="-120"/>
               </a:rPr>
-              <a:t>한강 교량 트윈 시범</a:t>
+              <a:t>위성이 다시 찍는 주기</a:t>
             </a:r>
             <a:endParaRPr lang="en-US" sz="1000" dirty="0"/>
           </a:p>
@@ -11155,6 +11415,10 @@
             <a:prstDash val="solid"/>
           </a:ln>
         </p:spPr>
+        <p:txBody>
+          <a:bodyPr/>
+          <a:p/>
+        </p:txBody>
       </p:sp>
       <p:sp>
         <p:nvSpPr>
@@ -11189,7 +11453,7 @@
                 <a:ea typeface="Paperlogy 7 Bold" pitchFamily="34" charset="-122"/>
                 <a:cs typeface="Paperlogy 7 Bold" pitchFamily="34" charset="-120"/>
               </a:rPr>
-              <a:t>12</a:t>
+              <a:t>0</a:t>
             </a:r>
             <a:r>
               <a:rPr lang="en-US" sz="1200" dirty="0">
@@ -11242,7 +11506,7 @@
                 <a:ea typeface="Paperlogy 5 Medium" pitchFamily="34" charset="-122"/>
                 <a:cs typeface="Paperlogy 5 Medium" pitchFamily="34" charset="-120"/>
               </a:rPr>
-              <a:t>B-Maps REST 엔드포인트</a:t>
+              <a:t>교량에 다는 장비</a:t>
             </a:r>
             <a:endParaRPr lang="en-US" sz="1000" dirty="0"/>
           </a:p>
@@ -11827,7 +12091,7 @@
                 <a:ea typeface="Paperlogy 7 Bold" pitchFamily="34" charset="-122"/>
                 <a:cs typeface="Paperlogy 7 Bold" pitchFamily="34" charset="-120"/>
               </a:rPr>
-              <a:t>교량마다 사람 손 없이 같은 산출물과 IFC 트윈이 나온다 — 좌표 하나로 끝까지</a:t>
+              <a:t>교량마다 같은 산출물과 IFC 트윈이 자동으로 나온다</a:t>
             </a:r>
             <a:endParaRPr lang="en-US" sz="1450" dirty="0"/>
           </a:p>
@@ -15007,7 +15271,7 @@
                 <a:ea typeface="Paperlogy 5 Medium" pitchFamily="34" charset="-122"/>
                 <a:cs typeface="Paperlogy 5 Medium" pitchFamily="34" charset="-120"/>
               </a:rPr>
-              <a:t>IFC 트윈 + 교면 위성 측점 (산출물 원본)</a:t>
+              <a:t>IFC 트윈 + 교면 위성 측점 (높이는 추정값)</a:t>
             </a:r>
             <a:endParaRPr lang="en-US" sz="900" dirty="0"/>
           </a:p>
@@ -18328,6 +18592,10 @@
             <a:prstDash val="solid"/>
           </a:ln>
         </p:spPr>
+        <p:txBody>
+          <a:bodyPr/>
+          <a:p/>
+        </p:txBody>
       </p:sp>
       <p:sp>
         <p:nvSpPr>
@@ -18353,6 +18621,10 @@
             <a:prstDash val="solid"/>
           </a:ln>
         </p:spPr>
+        <p:txBody>
+          <a:bodyPr/>
+          <a:p/>
+        </p:txBody>
       </p:sp>
       <p:sp>
         <p:nvSpPr>
@@ -18417,6 +18689,10 @@
             <a:prstDash val="solid"/>
           </a:ln>
         </p:spPr>
+        <p:txBody>
+          <a:bodyPr/>
+          <a:p/>
+        </p:txBody>
       </p:sp>
       <p:sp>
         <p:nvSpPr>
@@ -18483,6 +18759,10 @@
             <a:prstDash val="solid"/>
           </a:ln>
         </p:spPr>
+        <p:txBody>
+          <a:bodyPr/>
+          <a:p/>
+        </p:txBody>
       </p:sp>
       <p:sp>
         <p:nvSpPr>
@@ -18549,6 +18829,10 @@
             <a:prstDash val="solid"/>
           </a:ln>
         </p:spPr>
+        <p:txBody>
+          <a:bodyPr/>
+          <a:p/>
+        </p:txBody>
       </p:sp>
       <p:sp>
         <p:nvSpPr>
@@ -18615,6 +18899,10 @@
             <a:prstDash val="solid"/>
           </a:ln>
         </p:spPr>
+        <p:txBody>
+          <a:bodyPr/>
+          <a:p/>
+        </p:txBody>
       </p:sp>
       <p:sp>
         <p:nvSpPr>
@@ -18681,6 +18969,10 @@
             <a:prstDash val="solid"/>
           </a:ln>
         </p:spPr>
+        <p:txBody>
+          <a:bodyPr/>
+          <a:p/>
+        </p:txBody>
       </p:sp>
       <p:sp>
         <p:nvSpPr>
@@ -18745,6 +19037,10 @@
             <a:prstDash val="solid"/>
           </a:ln>
         </p:spPr>
+        <p:txBody>
+          <a:bodyPr/>
+          <a:p/>
+        </p:txBody>
       </p:sp>
       <p:sp>
         <p:nvSpPr>
@@ -18809,6 +19105,10 @@
             <a:prstDash val="solid"/>
           </a:ln>
         </p:spPr>
+        <p:txBody>
+          <a:bodyPr/>
+          <a:p/>
+        </p:txBody>
       </p:sp>
       <p:sp>
         <p:nvSpPr>
@@ -18873,6 +19173,10 @@
             <a:prstDash val="solid"/>
           </a:ln>
         </p:spPr>
+        <p:txBody>
+          <a:bodyPr/>
+          <a:p/>
+        </p:txBody>
       </p:sp>
       <p:sp>
         <p:nvSpPr>
@@ -18939,6 +19243,10 @@
             <a:prstDash val="solid"/>
           </a:ln>
         </p:spPr>
+        <p:txBody>
+          <a:bodyPr/>
+          <a:p/>
+        </p:txBody>
       </p:sp>
       <p:sp>
         <p:nvSpPr>
@@ -18966,6 +19274,10 @@
             <a:prstDash val="solid"/>
           </a:ln>
         </p:spPr>
+        <p:txBody>
+          <a:bodyPr/>
+          <a:p/>
+        </p:txBody>
       </p:sp>
       <p:sp>
         <p:nvSpPr>
@@ -19163,6 +19475,10 @@
             <a:prstDash val="solid"/>
           </a:ln>
         </p:spPr>
+        <p:txBody>
+          <a:bodyPr/>
+          <a:p/>
+        </p:txBody>
       </p:sp>
       <p:sp>
         <p:nvSpPr>
@@ -19190,6 +19506,10 @@
             <a:prstDash val="solid"/>
           </a:ln>
         </p:spPr>
+        <p:txBody>
+          <a:bodyPr/>
+          <a:p/>
+        </p:txBody>
       </p:sp>
       <p:sp>
         <p:nvSpPr>
@@ -19217,6 +19537,10 @@
             <a:prstDash val="solid"/>
           </a:ln>
         </p:spPr>
+        <p:txBody>
+          <a:bodyPr/>
+          <a:p/>
+        </p:txBody>
       </p:sp>
       <p:sp>
         <p:nvSpPr>
@@ -19414,6 +19738,10 @@
             <a:prstDash val="solid"/>
           </a:ln>
         </p:spPr>
+        <p:txBody>
+          <a:bodyPr/>
+          <a:p/>
+        </p:txBody>
       </p:sp>
       <p:sp>
         <p:nvSpPr>
@@ -19441,6 +19769,10 @@
             <a:prstDash val="solid"/>
           </a:ln>
         </p:spPr>
+        <p:txBody>
+          <a:bodyPr/>
+          <a:p/>
+        </p:txBody>
       </p:sp>
       <p:sp>
         <p:nvSpPr>
@@ -19468,6 +19800,10 @@
             <a:prstDash val="solid"/>
           </a:ln>
         </p:spPr>
+        <p:txBody>
+          <a:bodyPr/>
+          <a:p/>
+        </p:txBody>
       </p:sp>
       <p:sp>
         <p:nvSpPr>
@@ -19611,7 +19947,7 @@
                 <a:ea typeface="Paperlogy 5 Medium" pitchFamily="34" charset="-122"/>
                 <a:cs typeface="Paperlogy 5 Medium" pitchFamily="34" charset="-120"/>
               </a:rPr>
-              <a:t>계측 위치 기반 정확도 검증 · CRI 기준 재설정</a:t>
+              <a:t>PINN 성능 평가 · 노후도 추정 · 거동 예측</a:t>
             </a:r>
             <a:endParaRPr lang="en-US" sz="1100" dirty="0"/>
           </a:p>
@@ -19635,7 +19971,7 @@
                 <a:ea typeface="Paperlogy 5 Medium" pitchFamily="34" charset="-122"/>
                 <a:cs typeface="Paperlogy 5 Medium" pitchFamily="34" charset="-120"/>
               </a:rPr>
-              <a:t>코너리플렉터 · 고해상도 SAR 보강</a:t>
+              <a:t>코너리플렉터로 측점 확보 · 정확도 검증</a:t>
             </a:r>
             <a:endParaRPr lang="en-US" sz="1100" dirty="0"/>
           </a:p>
@@ -19667,6 +20003,10 @@
             <a:prstDash val="solid"/>
           </a:ln>
         </p:spPr>
+        <p:txBody>
+          <a:bodyPr/>
+          <a:p/>
+        </p:txBody>
       </p:sp>
       <p:sp>
         <p:nvSpPr>
@@ -19694,6 +20034,10 @@
             <a:prstDash val="solid"/>
           </a:ln>
         </p:spPr>
+        <p:txBody>
+          <a:bodyPr/>
+          <a:p/>
+        </p:txBody>
       </p:sp>
       <p:sp>
         <p:nvSpPr>
@@ -19758,6 +20102,10 @@
             <a:prstDash val="solid"/>
           </a:ln>
         </p:spPr>
+        <p:txBody>
+          <a:bodyPr/>
+          <a:p/>
+        </p:txBody>
       </p:sp>
       <p:sp>
         <p:nvSpPr>
@@ -19878,6 +20226,10 @@
             <a:prstDash val="solid"/>
           </a:ln>
         </p:spPr>
+        <p:txBody>
+          <a:bodyPr/>
+          <a:p/>
+        </p:txBody>
       </p:sp>
       <p:sp>
         <p:nvSpPr>
@@ -19998,6 +20350,10 @@
             <a:prstDash val="solid"/>
           </a:ln>
         </p:spPr>
+        <p:txBody>
+          <a:bodyPr/>
+          <a:p/>
+        </p:txBody>
       </p:sp>
       <p:sp>
         <p:nvSpPr>
@@ -20118,6 +20474,10 @@
             <a:prstDash val="solid"/>
           </a:ln>
         </p:spPr>
+        <p:txBody>
+          <a:bodyPr/>
+          <a:p/>
+        </p:txBody>
       </p:sp>
       <p:sp>
         <p:nvSpPr>
@@ -20240,6 +20600,10 @@
             <a:prstDash val="solid"/>
           </a:ln>
         </p:spPr>
+        <p:txBody>
+          <a:bodyPr/>
+          <a:p/>
+        </p:txBody>
       </p:sp>
       <p:sp>
         <p:nvSpPr>
@@ -20267,6 +20631,10 @@
             <a:prstDash val="solid"/>
           </a:ln>
         </p:spPr>
+        <p:txBody>
+          <a:bodyPr/>
+          <a:p/>
+        </p:txBody>
       </p:sp>
       <p:sp>
         <p:nvSpPr>
@@ -20460,6 +20828,10 @@
             <a:prstDash val="solid"/>
           </a:ln>
         </p:spPr>
+        <p:txBody>
+          <a:bodyPr/>
+          <a:p/>
+        </p:txBody>
       </p:sp>
       <p:sp>
         <p:nvSpPr>

--- a/docs/KICT_Bmaps_Inframon_연구개발_7p_1.pptx
+++ b/docs/KICT_Bmaps_Inframon_연구개발_7p_1.pptx
@@ -2361,7 +2361,7 @@
                 <a:ea typeface="Paperlogy 5 Medium" pitchFamily="34" charset="-122"/>
                 <a:cs typeface="Paperlogy 5 Medium" pitchFamily="34" charset="-120"/>
               </a:rPr>
-              <a:t>단계별 추진 계획 · KICT 협의 요청 · 기대 효과</a:t>
+              <a:t>단계별 추진 계획 · KICT 자료 요청 · 기대 효과</a:t>
             </a:r>
             <a:endParaRPr lang="en-US" sz="1150" dirty="0"/>
           </a:p>

--- a/docs/KICT_Bmaps_Inframon_연구개발_7p_1.pptx
+++ b/docs/KICT_Bmaps_Inframon_연구개발_7p_1.pptx
@@ -11022,45 +11022,14 @@
       </p:sp>
       <p:sp>
         <p:nvSpPr>
-          <p:cNvPr id="68" name="Shape 65"/>
-          <p:cNvSpPr/>
-          <p:nvPr/>
-        </p:nvSpPr>
-        <p:spPr>
-          <a:xfrm>
-            <a:off x="7589520" y="3520440"/>
-            <a:ext cx="2020824" cy="1280160"/>
-          </a:xfrm>
-          <a:prstGeom prst="roundRect">
-            <a:avLst>
-              <a:gd name="adj" fmla="val 4286"/>
-            </a:avLst>
-          </a:prstGeom>
-          <a:solidFill>
-            <a:srgbClr val="FFFFFF"/>
-          </a:solidFill>
-          <a:ln w="9525">
-            <a:solidFill>
-              <a:srgbClr val="E3E6EA"/>
-            </a:solidFill>
-            <a:prstDash val="solid"/>
-          </a:ln>
-        </p:spPr>
-        <p:txBody>
-          <a:bodyPr/>
-          <a:p/>
-        </p:txBody>
-      </p:sp>
-      <p:sp>
-        <p:nvSpPr>
-          <p:cNvPr id="69" name="Text 66"/>
+          <p:cNvPr id="80" name="Text 77"/>
           <p:cNvSpPr txBox="1"/>
           <p:nvPr/>
         </p:nvSpPr>
         <p:spPr>
           <a:xfrm>
-            <a:off x="7772400" y="3630168"/>
-            <a:ext cx="1700784" cy="475488"/>
+            <a:off x="411480" y="6355080"/>
+            <a:ext cx="11365992" cy="274320"/>
           </a:xfrm>
           <a:prstGeom prst="rect">
             <a:avLst/>
@@ -11076,478 +11045,526 @@
               <a:buNone/>
             </a:pPr>
             <a:r>
-              <a:rPr lang="en-US" sz="2400" dirty="0">
-                <a:solidFill>
-                  <a:srgbClr val="1C5B8A"/>
-                </a:solidFill>
-                <a:latin typeface="Paperlogy 7 Bold" pitchFamily="34" charset="0"/>
-                <a:ea typeface="Paperlogy 7 Bold" pitchFamily="34" charset="-122"/>
-                <a:cs typeface="Paperlogy 7 Bold" pitchFamily="34" charset="-120"/>
-              </a:rPr>
-              <a:t>6</a:t>
-            </a:r>
-            <a:r>
-              <a:rPr lang="en-US" sz="1200" dirty="0">
-                <a:solidFill>
-                  <a:srgbClr val="1C5B8A"/>
-                </a:solidFill>
-                <a:latin typeface="Paperlogy 7 Bold" pitchFamily="34" charset="0"/>
-                <a:ea typeface="Paperlogy 7 Bold" pitchFamily="34" charset="-122"/>
-                <a:cs typeface="Paperlogy 7 Bold" pitchFamily="34" charset="-120"/>
-              </a:rPr>
-              <a:t>  단계</a:t>
-            </a:r>
-            <a:endParaRPr lang="en-US" sz="1100" dirty="0"/>
-          </a:p>
-        </p:txBody>
-      </p:sp>
-      <p:sp>
-        <p:nvSpPr>
-          <p:cNvPr id="70" name="Text 67"/>
-          <p:cNvSpPr txBox="1"/>
-          <p:nvPr/>
-        </p:nvSpPr>
-        <p:spPr>
-          <a:xfrm>
-            <a:off x="7772400" y="4123944"/>
-            <a:ext cx="1700784" cy="603504"/>
-          </a:xfrm>
-          <a:prstGeom prst="rect">
-            <a:avLst/>
-          </a:prstGeom>
-          <a:noFill/>
-          <a:ln/>
-        </p:spPr>
-        <p:txBody>
-          <a:bodyPr wrap="square" lIns="0" tIns="0" rIns="0" bIns="0" rtlCol="0" anchor="t"/>
-          <a:lstStyle/>
-          <a:p>
-            <a:pPr marL="0" indent="0">
-              <a:lnSpc>
-                <a:spcPct val="110000"/>
-              </a:lnSpc>
-              <a:buNone/>
-            </a:pPr>
-            <a:r>
-              <a:rPr lang="en-US" sz="1000" dirty="0">
-                <a:solidFill>
-                  <a:srgbClr val="373D47"/>
+              <a:rPr lang="en-US" sz="850" dirty="0">
+                <a:solidFill>
+                  <a:srgbClr val="6B7480"/>
                 </a:solidFill>
                 <a:latin typeface="Paperlogy 5 Medium" pitchFamily="34" charset="0"/>
                 <a:ea typeface="Paperlogy 5 Medium" pitchFamily="34" charset="-122"/>
                 <a:cs typeface="Paperlogy 5 Medium" pitchFamily="34" charset="-120"/>
               </a:rPr>
-              <a:t>영상 고르기부터 B-Maps 전달까지</a:t>
-            </a:r>
-            <a:endParaRPr lang="en-US" sz="1000" dirty="0"/>
-          </a:p>
-        </p:txBody>
-      </p:sp>
-      <p:sp>
-        <p:nvSpPr>
-          <p:cNvPr id="71" name="Shape 68"/>
+              <a:t>※ 실행 예: python scripts/bridge_run.py --name 성수대교 --lat 37.5374 --lon 127.0351 — 궤도 자료가 없으면 영상 선별·다운로드·처리부터 스스로 수행.</a:t>
+            </a:r>
+            <a:endParaRPr lang="en-US" sz="850" dirty="0"/>
+          </a:p>
+        </p:txBody>
+      </p:sp>
+      <p:sp>
+        <p:nvSpPr>
+          <p:cNvPr id="81" name="Rectangle 80"/>
           <p:cNvSpPr/>
           <p:nvPr/>
         </p:nvSpPr>
         <p:spPr>
           <a:xfrm>
-            <a:off x="9756648" y="3520440"/>
-            <a:ext cx="2020824" cy="1280160"/>
-          </a:xfrm>
-          <a:prstGeom prst="roundRect">
-            <a:avLst>
-              <a:gd name="adj" fmla="val 4286"/>
-            </a:avLst>
+            <a:off x="7589520" y="3977640"/>
+            <a:ext cx="4233672" cy="2057400"/>
+          </a:xfrm>
+          <a:prstGeom prst="rect">
+            <a:avLst/>
           </a:prstGeom>
           <a:solidFill>
-            <a:srgbClr val="FFFFFF"/>
+            <a:srgbClr val="F5F7F9"/>
           </a:solidFill>
-          <a:ln w="9525">
+          <a:ln w="12700">
             <a:solidFill>
-              <a:srgbClr val="E3E6EA"/>
+              <a:srgbClr val="E9EBEE"/>
             </a:solidFill>
-            <a:prstDash val="solid"/>
           </a:ln>
-        </p:spPr>
-        <p:txBody>
-          <a:bodyPr/>
-          <a:p/>
-        </p:txBody>
-      </p:sp>
-      <p:sp>
-        <p:nvSpPr>
-          <p:cNvPr id="72" name="Text 69"/>
+          <a:effectLst/>
+        </p:spPr>
+        <p:style>
+          <a:lnRef idx="1">
+            <a:schemeClr val="accent1"/>
+          </a:lnRef>
+          <a:fillRef idx="3">
+            <a:schemeClr val="accent1"/>
+          </a:fillRef>
+          <a:effectRef idx="2">
+            <a:schemeClr val="accent1"/>
+          </a:effectRef>
+          <a:fontRef idx="minor">
+            <a:schemeClr val="lt1"/>
+          </a:fontRef>
+        </p:style>
+        <p:txBody>
+          <a:bodyPr rtlCol="0" anchor="ctr"/>
+          <a:lstStyle/>
+          <a:p>
+            <a:pPr algn="ctr"/>
+          </a:p>
+        </p:txBody>
+      </p:sp>
+      <p:sp>
+        <p:nvSpPr>
+          <p:cNvPr id="82" name="Rectangle 81"/>
+          <p:cNvSpPr/>
+          <p:nvPr/>
+        </p:nvSpPr>
+        <p:spPr>
+          <a:xfrm>
+            <a:off x="8951976" y="3835908"/>
+            <a:ext cx="1508760" cy="283464"/>
+          </a:xfrm>
+          <a:prstGeom prst="rect">
+            <a:avLst/>
+          </a:prstGeom>
+          <a:solidFill>
+            <a:srgbClr val="373D47"/>
+          </a:solidFill>
+          <a:ln>
+            <a:noFill/>
+          </a:ln>
+          <a:effectLst/>
+        </p:spPr>
+        <p:style>
+          <a:lnRef idx="1">
+            <a:schemeClr val="accent1"/>
+          </a:lnRef>
+          <a:fillRef idx="3">
+            <a:schemeClr val="accent1"/>
+          </a:fillRef>
+          <a:effectRef idx="2">
+            <a:schemeClr val="accent1"/>
+          </a:effectRef>
+          <a:fontRef idx="minor">
+            <a:schemeClr val="lt1"/>
+          </a:fontRef>
+        </p:style>
+        <p:txBody>
+          <a:bodyPr rtlCol="0" anchor="ctr"/>
+          <a:lstStyle/>
+          <a:p>
+            <a:pPr algn="ctr"/>
+          </a:p>
+        </p:txBody>
+      </p:sp>
+      <p:sp>
+        <p:nvSpPr>
+          <p:cNvPr id="83" name="TextBox 82"/>
           <p:cNvSpPr txBox="1"/>
           <p:nvPr/>
         </p:nvSpPr>
         <p:spPr>
           <a:xfrm>
-            <a:off x="9939528" y="3630168"/>
-            <a:ext cx="1700784" cy="475488"/>
+            <a:off x="8951976" y="3835908"/>
+            <a:ext cx="1508760" cy="283464"/>
           </a:xfrm>
           <a:prstGeom prst="rect">
             <a:avLst/>
           </a:prstGeom>
           <a:noFill/>
-          <a:ln/>
-        </p:spPr>
-        <p:txBody>
-          <a:bodyPr wrap="square" lIns="0" tIns="0" rIns="0" bIns="0" rtlCol="0" anchor="ctr"/>
-          <a:lstStyle/>
-          <a:p>
-            <a:pPr marL="0" indent="0">
-              <a:buNone/>
-            </a:pPr>
-            <a:r>
-              <a:rPr lang="en-US" sz="2400" dirty="0">
-                <a:solidFill>
-                  <a:srgbClr val="373D47"/>
-                </a:solidFill>
-                <a:latin typeface="Paperlogy 7 Bold" pitchFamily="34" charset="0"/>
-                <a:ea typeface="Paperlogy 7 Bold" pitchFamily="34" charset="-122"/>
-                <a:cs typeface="Paperlogy 7 Bold" pitchFamily="34" charset="-120"/>
-              </a:rPr>
-              <a:t>1</a:t>
-            </a:r>
-            <a:r>
-              <a:rPr lang="en-US" sz="1200" dirty="0">
-                <a:solidFill>
-                  <a:srgbClr val="373D47"/>
-                </a:solidFill>
-                <a:latin typeface="Paperlogy 7 Bold" pitchFamily="34" charset="0"/>
-                <a:ea typeface="Paperlogy 7 Bold" pitchFamily="34" charset="-122"/>
-                <a:cs typeface="Paperlogy 7 Bold" pitchFamily="34" charset="-120"/>
-              </a:rPr>
-              <a:t>  개</a:t>
-            </a:r>
-            <a:endParaRPr lang="en-US" sz="1100" dirty="0"/>
-          </a:p>
-        </p:txBody>
-      </p:sp>
-      <p:sp>
-        <p:nvSpPr>
-          <p:cNvPr id="73" name="Text 70"/>
+        </p:spPr>
+        <p:txBody>
+          <a:bodyPr wrap="square" anchor="ctr" lIns="0" rIns="0" tIns="0" bIns="0">
+            <a:spAutoFit/>
+          </a:bodyPr>
+          <a:lstStyle/>
+          <a:p>
+            <a:pPr algn="ctr">
+              <a:lnSpc>
+                <a:spcPct val="100000"/>
+              </a:lnSpc>
+            </a:pPr>
+            <a:r>
+              <a:rPr sz="1250" b="1">
+                <a:solidFill>
+                  <a:srgbClr val="FFFFFF"/>
+                </a:solidFill>
+                <a:latin typeface="Paperlogy 7 Bold"/>
+                <a:ea typeface="Paperlogy 7 Bold"/>
+                <a:cs typeface="Paperlogy 7 Bold"/>
+              </a:rPr>
+              <a:t>원리상 못 하는 것</a:t>
+            </a:r>
+          </a:p>
+        </p:txBody>
+      </p:sp>
+      <p:sp>
+        <p:nvSpPr>
+          <p:cNvPr id="84" name="Rectangle 83"/>
+          <p:cNvSpPr/>
+          <p:nvPr/>
+        </p:nvSpPr>
+        <p:spPr>
+          <a:xfrm>
+            <a:off x="7754112" y="4453128"/>
+            <a:ext cx="45720" cy="182880"/>
+          </a:xfrm>
+          <a:prstGeom prst="rect">
+            <a:avLst/>
+          </a:prstGeom>
+          <a:solidFill>
+            <a:srgbClr val="1C5B8A"/>
+          </a:solidFill>
+          <a:ln>
+            <a:noFill/>
+          </a:ln>
+          <a:effectLst/>
+        </p:spPr>
+        <p:style>
+          <a:lnRef idx="1">
+            <a:schemeClr val="accent1"/>
+          </a:lnRef>
+          <a:fillRef idx="3">
+            <a:schemeClr val="accent1"/>
+          </a:fillRef>
+          <a:effectRef idx="2">
+            <a:schemeClr val="accent1"/>
+          </a:effectRef>
+          <a:fontRef idx="minor">
+            <a:schemeClr val="lt1"/>
+          </a:fontRef>
+        </p:style>
+        <p:txBody>
+          <a:bodyPr rtlCol="0" anchor="ctr"/>
+          <a:lstStyle/>
+          <a:p>
+            <a:pPr algn="ctr"/>
+          </a:p>
+        </p:txBody>
+      </p:sp>
+      <p:sp>
+        <p:nvSpPr>
+          <p:cNvPr id="85" name="TextBox 84"/>
           <p:cNvSpPr txBox="1"/>
           <p:nvPr/>
         </p:nvSpPr>
         <p:spPr>
           <a:xfrm>
-            <a:off x="9939528" y="4123944"/>
-            <a:ext cx="1700784" cy="603504"/>
+            <a:off x="7900416" y="4398264"/>
+            <a:ext cx="3758184" cy="219456"/>
           </a:xfrm>
           <a:prstGeom prst="rect">
             <a:avLst/>
           </a:prstGeom>
           <a:noFill/>
-          <a:ln/>
-        </p:spPr>
-        <p:txBody>
-          <a:bodyPr wrap="square" lIns="0" tIns="0" rIns="0" bIns="0" rtlCol="0" anchor="t"/>
-          <a:lstStyle/>
-          <a:p>
-            <a:pPr marL="0" indent="0">
+        </p:spPr>
+        <p:txBody>
+          <a:bodyPr wrap="square" anchor="t" lIns="0" rIns="0" tIns="0" bIns="0">
+            <a:spAutoFit/>
+          </a:bodyPr>
+          <a:lstStyle/>
+          <a:p>
+            <a:pPr algn="l">
               <a:lnSpc>
-                <a:spcPct val="110000"/>
+                <a:spcPct val="100000"/>
               </a:lnSpc>
-              <a:buNone/>
-            </a:pPr>
-            <a:r>
-              <a:rPr lang="en-US" sz="1000" dirty="0">
-                <a:solidFill>
-                  <a:srgbClr val="373D47"/>
-                </a:solidFill>
-                <a:latin typeface="Paperlogy 5 Medium" pitchFamily="34" charset="0"/>
-                <a:ea typeface="Paperlogy 5 Medium" pitchFamily="34" charset="-122"/>
-                <a:cs typeface="Paperlogy 5 Medium" pitchFamily="34" charset="-120"/>
-              </a:rPr>
-              <a:t>넣는 것은 좌표뿐</a:t>
-            </a:r>
-            <a:endParaRPr lang="en-US" sz="1000" dirty="0"/>
-          </a:p>
-        </p:txBody>
-      </p:sp>
-      <p:sp>
-        <p:nvSpPr>
-          <p:cNvPr id="74" name="Shape 71"/>
+            </a:pPr>
+            <a:r>
+              <a:rPr sz="1100" b="1">
+                <a:solidFill>
+                  <a:srgbClr val="10171E"/>
+                </a:solidFill>
+                <a:latin typeface="Paperlogy 7 Bold"/>
+                <a:ea typeface="Paperlogy 7 Bold"/>
+                <a:cs typeface="Paperlogy 7 Bold"/>
+              </a:rPr>
+              <a:t>교면 측점 밀도</a:t>
+            </a:r>
+          </a:p>
+        </p:txBody>
+      </p:sp>
+      <p:sp>
+        <p:nvSpPr>
+          <p:cNvPr id="86" name="TextBox 85"/>
+          <p:cNvSpPr txBox="1"/>
+          <p:nvPr/>
+        </p:nvSpPr>
+        <p:spPr>
+          <a:xfrm>
+            <a:off x="7900416" y="4617720"/>
+            <a:ext cx="3758184" cy="384048"/>
+          </a:xfrm>
+          <a:prstGeom prst="rect">
+            <a:avLst/>
+          </a:prstGeom>
+          <a:noFill/>
+        </p:spPr>
+        <p:txBody>
+          <a:bodyPr wrap="square" anchor="t" lIns="0" rIns="0" tIns="0" bIns="0">
+            <a:spAutoFit/>
+          </a:bodyPr>
+          <a:lstStyle/>
+          <a:p>
+            <a:pPr algn="l">
+              <a:lnSpc>
+                <a:spcPct val="100000"/>
+              </a:lnSpc>
+            </a:pPr>
+            <a:r>
+              <a:rPr sz="919" b="0">
+                <a:solidFill>
+                  <a:srgbClr val="6B7480"/>
+                </a:solidFill>
+                <a:latin typeface="Paperlogy 5 Medium"/>
+                <a:ea typeface="Paperlogy 5 Medium"/>
+                <a:cs typeface="Paperlogy 5 Medium"/>
+              </a:rPr>
+              <a:t>위성 화소가 지상 5×20 m 다. 데크 폭은 1~2 화소라 프로그램으로 늘릴 수 없다</a:t>
+            </a:r>
+          </a:p>
+        </p:txBody>
+      </p:sp>
+      <p:sp>
+        <p:nvSpPr>
+          <p:cNvPr id="87" name="Rectangle 86"/>
           <p:cNvSpPr/>
           <p:nvPr/>
         </p:nvSpPr>
         <p:spPr>
           <a:xfrm>
-            <a:off x="7589520" y="4892040"/>
-            <a:ext cx="2020824" cy="1280160"/>
-          </a:xfrm>
-          <a:prstGeom prst="roundRect">
-            <a:avLst>
-              <a:gd name="adj" fmla="val 4286"/>
-            </a:avLst>
+            <a:off x="7754112" y="5001768"/>
+            <a:ext cx="45720" cy="182880"/>
+          </a:xfrm>
+          <a:prstGeom prst="rect">
+            <a:avLst/>
           </a:prstGeom>
           <a:solidFill>
-            <a:srgbClr val="FFFFFF"/>
+            <a:srgbClr val="1C5B8A"/>
           </a:solidFill>
-          <a:ln w="9525">
-            <a:solidFill>
-              <a:srgbClr val="E3E6EA"/>
-            </a:solidFill>
-            <a:prstDash val="solid"/>
+          <a:ln>
+            <a:noFill/>
           </a:ln>
-        </p:spPr>
-        <p:txBody>
-          <a:bodyPr/>
-          <a:p/>
-        </p:txBody>
-      </p:sp>
-      <p:sp>
-        <p:nvSpPr>
-          <p:cNvPr id="75" name="Text 72"/>
+          <a:effectLst/>
+        </p:spPr>
+        <p:style>
+          <a:lnRef idx="1">
+            <a:schemeClr val="accent1"/>
+          </a:lnRef>
+          <a:fillRef idx="3">
+            <a:schemeClr val="accent1"/>
+          </a:fillRef>
+          <a:effectRef idx="2">
+            <a:schemeClr val="accent1"/>
+          </a:effectRef>
+          <a:fontRef idx="minor">
+            <a:schemeClr val="lt1"/>
+          </a:fontRef>
+        </p:style>
+        <p:txBody>
+          <a:bodyPr rtlCol="0" anchor="ctr"/>
+          <a:lstStyle/>
+          <a:p>
+            <a:pPr algn="ctr"/>
+          </a:p>
+        </p:txBody>
+      </p:sp>
+      <p:sp>
+        <p:nvSpPr>
+          <p:cNvPr id="88" name="TextBox 87"/>
           <p:cNvSpPr txBox="1"/>
           <p:nvPr/>
         </p:nvSpPr>
         <p:spPr>
           <a:xfrm>
-            <a:off x="7772400" y="5001768"/>
-            <a:ext cx="1700784" cy="475488"/>
+            <a:off x="7900416" y="4946904"/>
+            <a:ext cx="3758184" cy="219456"/>
           </a:xfrm>
           <a:prstGeom prst="rect">
             <a:avLst/>
           </a:prstGeom>
           <a:noFill/>
-          <a:ln/>
-        </p:spPr>
-        <p:txBody>
-          <a:bodyPr wrap="square" lIns="0" tIns="0" rIns="0" bIns="0" rtlCol="0" anchor="ctr"/>
-          <a:lstStyle/>
-          <a:p>
-            <a:pPr marL="0" indent="0">
-              <a:buNone/>
-            </a:pPr>
-            <a:r>
-              <a:rPr lang="en-US" sz="2400" dirty="0">
-                <a:solidFill>
-                  <a:srgbClr val="1C5B8A"/>
-                </a:solidFill>
-                <a:latin typeface="Paperlogy 7 Bold" pitchFamily="34" charset="0"/>
-                <a:ea typeface="Paperlogy 7 Bold" pitchFamily="34" charset="-122"/>
-                <a:cs typeface="Paperlogy 7 Bold" pitchFamily="34" charset="-120"/>
-              </a:rPr>
-              <a:t>12</a:t>
-            </a:r>
-            <a:r>
-              <a:rPr lang="en-US" sz="1200" dirty="0">
-                <a:solidFill>
-                  <a:srgbClr val="1C5B8A"/>
-                </a:solidFill>
-                <a:latin typeface="Paperlogy 7 Bold" pitchFamily="34" charset="0"/>
-                <a:ea typeface="Paperlogy 7 Bold" pitchFamily="34" charset="-122"/>
-                <a:cs typeface="Paperlogy 7 Bold" pitchFamily="34" charset="-120"/>
-              </a:rPr>
-              <a:t>  일</a:t>
-            </a:r>
-            <a:endParaRPr lang="en-US" sz="1100" dirty="0"/>
-          </a:p>
-        </p:txBody>
-      </p:sp>
-      <p:sp>
-        <p:nvSpPr>
-          <p:cNvPr id="76" name="Text 73"/>
+        </p:spPr>
+        <p:txBody>
+          <a:bodyPr wrap="square" anchor="t" lIns="0" rIns="0" tIns="0" bIns="0">
+            <a:spAutoFit/>
+          </a:bodyPr>
+          <a:lstStyle/>
+          <a:p>
+            <a:pPr algn="l">
+              <a:lnSpc>
+                <a:spcPct val="100000"/>
+              </a:lnSpc>
+            </a:pPr>
+            <a:r>
+              <a:rPr sz="1100" b="1">
+                <a:solidFill>
+                  <a:srgbClr val="10171E"/>
+                </a:solidFill>
+                <a:latin typeface="Paperlogy 7 Bold"/>
+                <a:ea typeface="Paperlogy 7 Bold"/>
+                <a:cs typeface="Paperlogy 7 Bold"/>
+              </a:rPr>
+              <a:t>절대 강성(EI)</a:t>
+            </a:r>
+          </a:p>
+        </p:txBody>
+      </p:sp>
+      <p:sp>
+        <p:nvSpPr>
+          <p:cNvPr id="89" name="TextBox 88"/>
           <p:cNvSpPr txBox="1"/>
           <p:nvPr/>
         </p:nvSpPr>
         <p:spPr>
           <a:xfrm>
-            <a:off x="7772400" y="5495544"/>
-            <a:ext cx="1700784" cy="603504"/>
+            <a:off x="7900416" y="5166360"/>
+            <a:ext cx="3758184" cy="384048"/>
           </a:xfrm>
           <a:prstGeom prst="rect">
             <a:avLst/>
           </a:prstGeom>
           <a:noFill/>
-          <a:ln/>
-        </p:spPr>
-        <p:txBody>
-          <a:bodyPr wrap="square" lIns="0" tIns="0" rIns="0" bIns="0" rtlCol="0" anchor="t"/>
-          <a:lstStyle/>
-          <a:p>
-            <a:pPr marL="0" indent="0">
+        </p:spPr>
+        <p:txBody>
+          <a:bodyPr wrap="square" anchor="t" lIns="0" rIns="0" tIns="0" bIns="0">
+            <a:spAutoFit/>
+          </a:bodyPr>
+          <a:lstStyle/>
+          <a:p>
+            <a:pPr algn="l">
               <a:lnSpc>
-                <a:spcPct val="110000"/>
+                <a:spcPct val="100000"/>
               </a:lnSpc>
-              <a:buNone/>
-            </a:pPr>
-            <a:r>
-              <a:rPr lang="en-US" sz="1000" dirty="0">
-                <a:solidFill>
-                  <a:srgbClr val="373D47"/>
-                </a:solidFill>
-                <a:latin typeface="Paperlogy 5 Medium" pitchFamily="34" charset="0"/>
-                <a:ea typeface="Paperlogy 5 Medium" pitchFamily="34" charset="-122"/>
-                <a:cs typeface="Paperlogy 5 Medium" pitchFamily="34" charset="-120"/>
-              </a:rPr>
-              <a:t>위성이 다시 찍는 주기</a:t>
-            </a:r>
-            <a:endParaRPr lang="en-US" sz="1000" dirty="0"/>
-          </a:p>
-        </p:txBody>
-      </p:sp>
-      <p:sp>
-        <p:nvSpPr>
-          <p:cNvPr id="77" name="Shape 74"/>
+            </a:pPr>
+            <a:r>
+              <a:rPr sz="919" b="0">
+                <a:solidFill>
+                  <a:srgbClr val="6B7480"/>
+                </a:solidFill>
+                <a:latin typeface="Paperlogy 5 Medium"/>
+                <a:ea typeface="Paperlogy 5 Medium"/>
+                <a:cs typeface="Paperlogy 5 Medium"/>
+              </a:rPr>
+              <a:t>상대 변위만 보므로 관측으로 낼 수 없다 — 설계 제원으로 계산한 값이다</a:t>
+            </a:r>
+          </a:p>
+        </p:txBody>
+      </p:sp>
+      <p:sp>
+        <p:nvSpPr>
+          <p:cNvPr id="90" name="Rectangle 89"/>
           <p:cNvSpPr/>
           <p:nvPr/>
         </p:nvSpPr>
         <p:spPr>
           <a:xfrm>
-            <a:off x="9756648" y="4892040"/>
-            <a:ext cx="2020824" cy="1280160"/>
-          </a:xfrm>
-          <a:prstGeom prst="roundRect">
-            <a:avLst>
-              <a:gd name="adj" fmla="val 4286"/>
-            </a:avLst>
+            <a:off x="7754112" y="5550408"/>
+            <a:ext cx="45720" cy="182880"/>
+          </a:xfrm>
+          <a:prstGeom prst="rect">
+            <a:avLst/>
           </a:prstGeom>
           <a:solidFill>
-            <a:srgbClr val="FFFFFF"/>
+            <a:srgbClr val="1C5B8A"/>
           </a:solidFill>
-          <a:ln w="9525">
-            <a:solidFill>
-              <a:srgbClr val="E3E6EA"/>
-            </a:solidFill>
-            <a:prstDash val="solid"/>
+          <a:ln>
+            <a:noFill/>
           </a:ln>
-        </p:spPr>
-        <p:txBody>
-          <a:bodyPr/>
-          <a:p/>
-        </p:txBody>
-      </p:sp>
-      <p:sp>
-        <p:nvSpPr>
-          <p:cNvPr id="78" name="Text 75"/>
+          <a:effectLst/>
+        </p:spPr>
+        <p:style>
+          <a:lnRef idx="1">
+            <a:schemeClr val="accent1"/>
+          </a:lnRef>
+          <a:fillRef idx="3">
+            <a:schemeClr val="accent1"/>
+          </a:fillRef>
+          <a:effectRef idx="2">
+            <a:schemeClr val="accent1"/>
+          </a:effectRef>
+          <a:fontRef idx="minor">
+            <a:schemeClr val="lt1"/>
+          </a:fontRef>
+        </p:style>
+        <p:txBody>
+          <a:bodyPr rtlCol="0" anchor="ctr"/>
+          <a:lstStyle/>
+          <a:p>
+            <a:pPr algn="ctr"/>
+          </a:p>
+        </p:txBody>
+      </p:sp>
+      <p:sp>
+        <p:nvSpPr>
+          <p:cNvPr id="91" name="TextBox 90"/>
           <p:cNvSpPr txBox="1"/>
           <p:nvPr/>
         </p:nvSpPr>
         <p:spPr>
           <a:xfrm>
-            <a:off x="9939528" y="5001768"/>
-            <a:ext cx="1700784" cy="475488"/>
+            <a:off x="7900416" y="5495544"/>
+            <a:ext cx="3758184" cy="219456"/>
           </a:xfrm>
           <a:prstGeom prst="rect">
             <a:avLst/>
           </a:prstGeom>
           <a:noFill/>
-          <a:ln/>
-        </p:spPr>
-        <p:txBody>
-          <a:bodyPr wrap="square" lIns="0" tIns="0" rIns="0" bIns="0" rtlCol="0" anchor="ctr"/>
-          <a:lstStyle/>
-          <a:p>
-            <a:pPr marL="0" indent="0">
-              <a:buNone/>
-            </a:pPr>
-            <a:r>
-              <a:rPr lang="en-US" sz="2400" dirty="0">
-                <a:solidFill>
-                  <a:srgbClr val="ED6C00"/>
-                </a:solidFill>
-                <a:latin typeface="Paperlogy 7 Bold" pitchFamily="34" charset="0"/>
-                <a:ea typeface="Paperlogy 7 Bold" pitchFamily="34" charset="-122"/>
-                <a:cs typeface="Paperlogy 7 Bold" pitchFamily="34" charset="-120"/>
-              </a:rPr>
-              <a:t>0</a:t>
-            </a:r>
-            <a:r>
-              <a:rPr lang="en-US" sz="1200" dirty="0">
-                <a:solidFill>
-                  <a:srgbClr val="ED6C00"/>
-                </a:solidFill>
-                <a:latin typeface="Paperlogy 7 Bold" pitchFamily="34" charset="0"/>
-                <a:ea typeface="Paperlogy 7 Bold" pitchFamily="34" charset="-122"/>
-                <a:cs typeface="Paperlogy 7 Bold" pitchFamily="34" charset="-120"/>
-              </a:rPr>
-              <a:t>  개</a:t>
-            </a:r>
-            <a:endParaRPr lang="en-US" sz="1100" dirty="0"/>
-          </a:p>
-        </p:txBody>
-      </p:sp>
-      <p:sp>
-        <p:nvSpPr>
-          <p:cNvPr id="79" name="Text 76"/>
+        </p:spPr>
+        <p:txBody>
+          <a:bodyPr wrap="square" anchor="t" lIns="0" rIns="0" tIns="0" bIns="0">
+            <a:spAutoFit/>
+          </a:bodyPr>
+          <a:lstStyle/>
+          <a:p>
+            <a:pPr algn="l">
+              <a:lnSpc>
+                <a:spcPct val="100000"/>
+              </a:lnSpc>
+            </a:pPr>
+            <a:r>
+              <a:rPr sz="1100" b="1">
+                <a:solidFill>
+                  <a:srgbClr val="10171E"/>
+                </a:solidFill>
+                <a:latin typeface="Paperlogy 7 Bold"/>
+                <a:ea typeface="Paperlogy 7 Bold"/>
+                <a:cs typeface="Paperlogy 7 Bold"/>
+              </a:rPr>
+              <a:t>연직 변위</a:t>
+            </a:r>
+          </a:p>
+        </p:txBody>
+      </p:sp>
+      <p:sp>
+        <p:nvSpPr>
+          <p:cNvPr id="92" name="TextBox 91"/>
           <p:cNvSpPr txBox="1"/>
           <p:nvPr/>
         </p:nvSpPr>
         <p:spPr>
           <a:xfrm>
-            <a:off x="9939528" y="5495544"/>
-            <a:ext cx="1700784" cy="603504"/>
+            <a:off x="7900416" y="5715000"/>
+            <a:ext cx="3758184" cy="384048"/>
           </a:xfrm>
           <a:prstGeom prst="rect">
             <a:avLst/>
           </a:prstGeom>
           <a:noFill/>
-          <a:ln/>
-        </p:spPr>
-        <p:txBody>
-          <a:bodyPr wrap="square" lIns="0" tIns="0" rIns="0" bIns="0" rtlCol="0" anchor="t"/>
-          <a:lstStyle/>
-          <a:p>
-            <a:pPr marL="0" indent="0">
+        </p:spPr>
+        <p:txBody>
+          <a:bodyPr wrap="square" anchor="t" lIns="0" rIns="0" tIns="0" bIns="0">
+            <a:spAutoFit/>
+          </a:bodyPr>
+          <a:lstStyle/>
+          <a:p>
+            <a:pPr algn="l">
               <a:lnSpc>
-                <a:spcPct val="110000"/>
+                <a:spcPct val="100000"/>
               </a:lnSpc>
-              <a:buNone/>
-            </a:pPr>
-            <a:r>
-              <a:rPr lang="en-US" sz="1000" dirty="0">
-                <a:solidFill>
-                  <a:srgbClr val="373D47"/>
-                </a:solidFill>
-                <a:latin typeface="Paperlogy 5 Medium" pitchFamily="34" charset="0"/>
-                <a:ea typeface="Paperlogy 5 Medium" pitchFamily="34" charset="-122"/>
-                <a:cs typeface="Paperlogy 5 Medium" pitchFamily="34" charset="-120"/>
-              </a:rPr>
-              <a:t>교량에 다는 장비</a:t>
-            </a:r>
-            <a:endParaRPr lang="en-US" sz="1000" dirty="0"/>
-          </a:p>
-        </p:txBody>
-      </p:sp>
-      <p:sp>
-        <p:nvSpPr>
-          <p:cNvPr id="80" name="Text 77"/>
-          <p:cNvSpPr txBox="1"/>
-          <p:nvPr/>
-        </p:nvSpPr>
-        <p:spPr>
-          <a:xfrm>
-            <a:off x="411480" y="6355080"/>
-            <a:ext cx="11365992" cy="274320"/>
-          </a:xfrm>
-          <a:prstGeom prst="rect">
-            <a:avLst/>
-          </a:prstGeom>
-          <a:noFill/>
-          <a:ln/>
-        </p:spPr>
-        <p:txBody>
-          <a:bodyPr wrap="square" lIns="0" tIns="0" rIns="0" bIns="0" rtlCol="0" anchor="ctr"/>
-          <a:lstStyle/>
-          <a:p>
-            <a:pPr marL="0" indent="0">
-              <a:buNone/>
-            </a:pPr>
-            <a:r>
-              <a:rPr lang="en-US" sz="850" dirty="0">
+            </a:pPr>
+            <a:r>
+              <a:rPr sz="919" b="0">
                 <a:solidFill>
                   <a:srgbClr val="6B7480"/>
                 </a:solidFill>
-                <a:latin typeface="Paperlogy 5 Medium" pitchFamily="34" charset="0"/>
-                <a:ea typeface="Paperlogy 5 Medium" pitchFamily="34" charset="-122"/>
-                <a:cs typeface="Paperlogy 5 Medium" pitchFamily="34" charset="-120"/>
-              </a:rPr>
-              <a:t>※ 실행 예: python scripts/bridge_run.py --name 성수대교 --lat 37.5374 --lon 127.0351 — 궤도 자료가 없으면 영상 선별·다운로드·처리부터 스스로 수행.</a:t>
-            </a:r>
-            <a:endParaRPr lang="en-US" sz="850" dirty="0"/>
+                <a:latin typeface="Paperlogy 5 Medium"/>
+                <a:ea typeface="Paperlogy 5 Medium"/>
+                <a:cs typeface="Paperlogy 5 Medium"/>
+              </a:rPr>
+              <a:t>한 궤도로는 위성 시선 방향만 나온다. 두 궤도를 합쳐야 위아래가 된다</a:t>
+            </a:r>
           </a:p>
         </p:txBody>
       </p:sp>
